--- a/content/05-teaching-resources/slides/specialism/05-business-context-constraints-and-metrics.pptx
+++ b/content/05-teaching-resources/slides/specialism/05-business-context-constraints-and-metrics.pptx
@@ -8,12 +8,16 @@
     <p:sldId id="256" r:id="rId7"/>
     <p:sldId id="257" r:id="rId8"/>
     <p:sldId id="258" r:id="rId9"/>
-    <p:sldId id="259" r:id="rId11"/>
+    <p:sldId id="259" r:id="rId10"/>
     <p:sldId id="260" r:id="rId12"/>
     <p:sldId id="261" r:id="rId13"/>
     <p:sldId id="262" r:id="rId14"/>
     <p:sldId id="263" r:id="rId15"/>
     <p:sldId id="264" r:id="rId16"/>
+    <p:sldId id="265" r:id="rId17"/>
+    <p:sldId id="266" r:id="rId18"/>
+    <p:sldId id="267" r:id="rId19"/>
+    <p:sldId id="268" r:id="rId20"/>
   </p:sldIdLst>
   <p:sldSz cx="12191695" cy="6858000" type="screen4x3"/>
   <p:notesSz cx="6858000" cy="9144000"/>
@@ -580,7 +584,22 @@
           <a:lstStyle/>
           <a:p>
             <a:r>
-              <a:t>Give students a few minutes to answer on mini whiteboards or paper, then reveal the answers on the next slide.</a:t>
+              <a:t>Answers:</a:t>
+            </a:r>
+          </a:p>
+          <a:p>
+            <a:r>
+              <a:t>1. Products developed in response to customer demand.</a:t>
+            </a:r>
+          </a:p>
+          <a:p>
+            <a:r>
+              <a:t>2. New technology creating products that find a market.</a:t>
+            </a:r>
+          </a:p>
+          <a:p>
+            <a:r>
+              <a:t>3. E.g. tools, materials, process capability, skills.</a:t>
             </a:r>
           </a:p>
         </p:txBody>
@@ -650,7 +669,22 @@
           <a:lstStyle/>
           <a:p>
             <a:r>
-              <a:t>Talk through any answers the class found difficult.</a:t>
+              <a:t>Answers:</a:t>
+            </a:r>
+          </a:p>
+          <a:p>
+            <a:r>
+              <a:t>1. Materials, labour, overheads.</a:t>
+            </a:r>
+          </a:p>
+          <a:p>
+            <a:r>
+              <a:t>2. 3 pounds.</a:t>
+            </a:r>
+          </a:p>
+          <a:p>
+            <a:r>
+              <a:t>3. They set materials, parts and processes.</a:t>
             </a:r>
           </a:p>
         </p:txBody>
@@ -676,6 +710,146 @@
 </file>
 
 <file path=ppt/notesSlides/notesSlide4.xml><?xml version="1.0" encoding="utf-8"?>
+<p:notes xmlns:a="http://schemas.openxmlformats.org/drawingml/2006/main" xmlns:p="http://schemas.openxmlformats.org/presentationml/2006/main" xmlns:r="http://schemas.openxmlformats.org/officeDocument/2006/relationships">
+  <p:cSld>
+    <p:spTree>
+      <p:nvGrpSpPr>
+        <p:cNvPr id="1" name=""/>
+        <p:cNvGrpSpPr/>
+        <p:nvPr/>
+      </p:nvGrpSpPr>
+      <p:grpSpPr>
+        <a:xfrm>
+          <a:off x="0" y="0"/>
+          <a:ext cx="0" cy="0"/>
+          <a:chOff x="0" y="0"/>
+          <a:chExt cx="0" cy="0"/>
+        </a:xfrm>
+      </p:grpSpPr>
+      <p:sp>
+        <p:nvSpPr>
+          <p:cNvPr id="2" name="Slide Image Placeholder 1"/>
+          <p:cNvSpPr>
+            <a:spLocks noGrp="1"/>
+          </p:cNvSpPr>
+          <p:nvPr>
+            <p:ph type="sldImg" idx="2"/>
+          </p:nvPr>
+        </p:nvSpPr>
+        <p:spPr/>
+      </p:sp>
+      <p:sp>
+        <p:nvSpPr>
+          <p:cNvPr id="3" name="Notes Placeholder 2"/>
+          <p:cNvSpPr>
+            <a:spLocks noGrp="1"/>
+          </p:cNvSpPr>
+          <p:nvPr>
+            <p:ph type="body" idx="3" sz="quarter"/>
+          </p:nvPr>
+        </p:nvSpPr>
+        <p:spPr/>
+        <p:txBody>
+          <a:bodyPr/>
+          <a:lstStyle/>
+          <a:p>
+            <a:r>
+              <a:t>Give students a few minutes to answer on mini whiteboards or paper, then reveal the answers on the next slide.</a:t>
+            </a:r>
+          </a:p>
+        </p:txBody>
+      </p:sp>
+      <p:sp>
+        <p:nvSpPr>
+          <p:cNvPr id="4" name="Slide Number Placeholder 3"/>
+          <p:cNvSpPr>
+            <a:spLocks noGrp="1"/>
+          </p:cNvSpPr>
+          <p:nvPr>
+            <p:ph type="sldNum" idx="5" sz="quarter"/>
+          </p:nvPr>
+        </p:nvSpPr>
+        <p:spPr/>
+      </p:sp>
+    </p:spTree>
+  </p:cSld>
+  <p:clrMapOvr>
+    <a:masterClrMapping/>
+  </p:clrMapOvr>
+</p:notes>
+</file>
+
+<file path=ppt/notesSlides/notesSlide5.xml><?xml version="1.0" encoding="utf-8"?>
+<p:notes xmlns:a="http://schemas.openxmlformats.org/drawingml/2006/main" xmlns:p="http://schemas.openxmlformats.org/presentationml/2006/main" xmlns:r="http://schemas.openxmlformats.org/officeDocument/2006/relationships">
+  <p:cSld>
+    <p:spTree>
+      <p:nvGrpSpPr>
+        <p:cNvPr id="1" name=""/>
+        <p:cNvGrpSpPr/>
+        <p:nvPr/>
+      </p:nvGrpSpPr>
+      <p:grpSpPr>
+        <a:xfrm>
+          <a:off x="0" y="0"/>
+          <a:ext cx="0" cy="0"/>
+          <a:chOff x="0" y="0"/>
+          <a:chExt cx="0" cy="0"/>
+        </a:xfrm>
+      </p:grpSpPr>
+      <p:sp>
+        <p:nvSpPr>
+          <p:cNvPr id="2" name="Slide Image Placeholder 1"/>
+          <p:cNvSpPr>
+            <a:spLocks noGrp="1"/>
+          </p:cNvSpPr>
+          <p:nvPr>
+            <p:ph type="sldImg" idx="2"/>
+          </p:nvPr>
+        </p:nvSpPr>
+        <p:spPr/>
+      </p:sp>
+      <p:sp>
+        <p:nvSpPr>
+          <p:cNvPr id="3" name="Notes Placeholder 2"/>
+          <p:cNvSpPr>
+            <a:spLocks noGrp="1"/>
+          </p:cNvSpPr>
+          <p:nvPr>
+            <p:ph type="body" idx="3" sz="quarter"/>
+          </p:nvPr>
+        </p:nvSpPr>
+        <p:spPr/>
+        <p:txBody>
+          <a:bodyPr/>
+          <a:lstStyle/>
+          <a:p>
+            <a:r>
+              <a:t>Talk through any answers the class found difficult.</a:t>
+            </a:r>
+          </a:p>
+        </p:txBody>
+      </p:sp>
+      <p:sp>
+        <p:nvSpPr>
+          <p:cNvPr id="4" name="Slide Number Placeholder 3"/>
+          <p:cNvSpPr>
+            <a:spLocks noGrp="1"/>
+          </p:cNvSpPr>
+          <p:nvPr>
+            <p:ph type="sldNum" idx="5" sz="quarter"/>
+          </p:nvPr>
+        </p:nvSpPr>
+        <p:spPr/>
+      </p:sp>
+    </p:spTree>
+  </p:cSld>
+  <p:clrMapOvr>
+    <a:masterClrMapping/>
+  </p:clrMapOvr>
+</p:notes>
+</file>
+
+<file path=ppt/notesSlides/notesSlide6.xml><?xml version="1.0" encoding="utf-8"?>
 <p:notes xmlns:a="http://schemas.openxmlformats.org/drawingml/2006/main" xmlns:p="http://schemas.openxmlformats.org/presentationml/2006/main" xmlns:r="http://schemas.openxmlformats.org/officeDocument/2006/relationships">
   <p:cSld>
     <p:spTree>
@@ -4045,6 +4219,2355 @@
 </p:sld>
 </file>
 
+<file path=ppt/slides/slide10.xml><?xml version="1.0" encoding="utf-8"?>
+<p:sld xmlns:a="http://schemas.openxmlformats.org/drawingml/2006/main" xmlns:p="http://schemas.openxmlformats.org/presentationml/2006/main" xmlns:r="http://schemas.openxmlformats.org/officeDocument/2006/relationships">
+  <p:cSld>
+    <p:bg>
+      <p:bgPr>
+        <a:solidFill>
+          <a:srgbClr val="FFFFFF"/>
+        </a:solidFill>
+        <a:effectLst/>
+      </p:bgPr>
+    </p:bg>
+    <p:spTree>
+      <p:nvGrpSpPr>
+        <p:cNvPr id="1" name=""/>
+        <p:cNvGrpSpPr/>
+        <p:nvPr/>
+      </p:nvGrpSpPr>
+      <p:grpSpPr/>
+      <p:sp>
+        <p:nvSpPr>
+          <p:cNvPr id="2" name="TextBox 1"/>
+          <p:cNvSpPr txBox="1"/>
+          <p:nvPr/>
+        </p:nvSpPr>
+        <p:spPr>
+          <a:xfrm>
+            <a:off x="548640" y="320040"/>
+            <a:ext cx="11094415" cy="274320"/>
+          </a:xfrm>
+          <a:prstGeom prst="rect">
+            <a:avLst/>
+          </a:prstGeom>
+          <a:noFill/>
+        </p:spPr>
+        <p:txBody>
+          <a:bodyPr wrap="square" anchor="t" lIns="0" rIns="0" tIns="0" bIns="0"/>
+          <a:lstStyle/>
+          <a:p>
+            <a:pPr algn="l"/>
+            <a:r>
+              <a:rPr sz="1100" b="1" i="0">
+                <a:solidFill>
+                  <a:srgbClr val="54595D"/>
+                </a:solidFill>
+                <a:latin typeface="Calibri"/>
+              </a:rPr>
+              <a:t>MECHANICAL ENGINEERING  ·  Mechanical: Knowledge criteria</a:t>
+            </a:r>
+          </a:p>
+        </p:txBody>
+      </p:sp>
+      <p:sp>
+        <p:nvSpPr>
+          <p:cNvPr id="3" name="TextBox 2"/>
+          <p:cNvSpPr txBox="1"/>
+          <p:nvPr/>
+        </p:nvSpPr>
+        <p:spPr>
+          <a:xfrm>
+            <a:off x="548640" y="566928"/>
+            <a:ext cx="11094415" cy="822960"/>
+          </a:xfrm>
+          <a:prstGeom prst="rect">
+            <a:avLst/>
+          </a:prstGeom>
+          <a:noFill/>
+        </p:spPr>
+        <p:txBody>
+          <a:bodyPr wrap="square" anchor="ctr" lIns="0" rIns="0" tIns="0" bIns="0"/>
+          <a:lstStyle/>
+          <a:p>
+            <a:pPr algn="l"/>
+            <a:r>
+              <a:rPr sz="3200" b="1" i="0">
+                <a:solidFill>
+                  <a:srgbClr val="03306E"/>
+                </a:solidFill>
+                <a:latin typeface="Cambria"/>
+              </a:rPr>
+              <a:t>Check your understanding</a:t>
+            </a:r>
+          </a:p>
+        </p:txBody>
+      </p:sp>
+      <p:sp>
+        <p:nvSpPr>
+          <p:cNvPr id="4" name="TextBox 3"/>
+          <p:cNvSpPr txBox="1"/>
+          <p:nvPr/>
+        </p:nvSpPr>
+        <p:spPr>
+          <a:xfrm>
+            <a:off x="548640" y="6446520"/>
+            <a:ext cx="8229600" cy="274320"/>
+          </a:xfrm>
+          <a:prstGeom prst="rect">
+            <a:avLst/>
+          </a:prstGeom>
+          <a:noFill/>
+        </p:spPr>
+        <p:txBody>
+          <a:bodyPr wrap="square" anchor="t" lIns="0" rIns="0" tIns="0" bIns="0"/>
+          <a:lstStyle/>
+          <a:p>
+            <a:pPr algn="l"/>
+            <a:r>
+              <a:rPr sz="1000" b="0" i="0">
+                <a:solidFill>
+                  <a:srgbClr val="54595D"/>
+                </a:solidFill>
+                <a:latin typeface="Calibri"/>
+              </a:rPr>
+              <a:t>Design and Development for Engineering and Manufacturing T Level  ·  Business Context, Constraints and Metrics in Design</a:t>
+            </a:r>
+          </a:p>
+        </p:txBody>
+      </p:sp>
+      <p:sp>
+        <p:nvSpPr>
+          <p:cNvPr id="5" name="TextBox 4"/>
+          <p:cNvSpPr txBox="1"/>
+          <p:nvPr/>
+        </p:nvSpPr>
+        <p:spPr>
+          <a:xfrm>
+            <a:off x="10728655" y="6446520"/>
+            <a:ext cx="914400" cy="274320"/>
+          </a:xfrm>
+          <a:prstGeom prst="rect">
+            <a:avLst/>
+          </a:prstGeom>
+          <a:noFill/>
+        </p:spPr>
+        <p:txBody>
+          <a:bodyPr wrap="square" anchor="t" lIns="0" rIns="0" tIns="0" bIns="0"/>
+          <a:lstStyle/>
+          <a:p>
+            <a:pPr algn="r"/>
+            <a:r>
+              <a:rPr sz="1000" b="0" i="0">
+                <a:solidFill>
+                  <a:srgbClr val="54595D"/>
+                </a:solidFill>
+                <a:latin typeface="Calibri"/>
+              </a:rPr>
+              <a:t>10</a:t>
+            </a:r>
+          </a:p>
+        </p:txBody>
+      </p:sp>
+      <p:sp>
+        <p:nvSpPr>
+          <p:cNvPr id="6" name="Oval 5"/>
+          <p:cNvSpPr/>
+          <p:nvPr/>
+        </p:nvSpPr>
+        <p:spPr>
+          <a:xfrm>
+            <a:off x="548640" y="1618488"/>
+            <a:ext cx="411480" cy="411480"/>
+          </a:xfrm>
+          <a:prstGeom prst="ellipse">
+            <a:avLst/>
+          </a:prstGeom>
+          <a:solidFill>
+            <a:srgbClr val="E0463A"/>
+          </a:solidFill>
+          <a:ln>
+            <a:noFill/>
+          </a:ln>
+          <a:effectLst/>
+        </p:spPr>
+        <p:style>
+          <a:lnRef idx="1">
+            <a:schemeClr val="accent1"/>
+          </a:lnRef>
+          <a:fillRef idx="3">
+            <a:schemeClr val="accent1"/>
+          </a:fillRef>
+          <a:effectRef idx="2">
+            <a:schemeClr val="accent1"/>
+          </a:effectRef>
+          <a:fontRef idx="minor">
+            <a:schemeClr val="lt1"/>
+          </a:fontRef>
+        </p:style>
+        <p:txBody>
+          <a:bodyPr rtlCol="0" anchor="ctr" lIns="0" rIns="0" tIns="0" bIns="0"/>
+          <a:lstStyle/>
+          <a:p>
+            <a:pPr algn="ctr"/>
+            <a:r>
+              <a:rPr sz="1400" b="1">
+                <a:solidFill>
+                  <a:srgbClr val="FFFFFF"/>
+                </a:solidFill>
+                <a:latin typeface="Calibri"/>
+              </a:rPr>
+              <a:t>1</a:t>
+            </a:r>
+          </a:p>
+        </p:txBody>
+      </p:sp>
+      <p:sp>
+        <p:nvSpPr>
+          <p:cNvPr id="7" name="TextBox 6"/>
+          <p:cNvSpPr txBox="1"/>
+          <p:nvPr/>
+        </p:nvSpPr>
+        <p:spPr>
+          <a:xfrm>
+            <a:off x="1234440" y="1600200"/>
+            <a:ext cx="10408615" cy="1030986"/>
+          </a:xfrm>
+          <a:prstGeom prst="rect">
+            <a:avLst/>
+          </a:prstGeom>
+          <a:noFill/>
+        </p:spPr>
+        <p:txBody>
+          <a:bodyPr wrap="square" anchor="t" lIns="0" rIns="0" tIns="0" bIns="0"/>
+          <a:lstStyle/>
+          <a:p>
+            <a:pPr algn="l"/>
+            <a:r>
+              <a:rPr sz="2200" b="0" i="0">
+                <a:solidFill>
+                  <a:srgbClr val="202122"/>
+                </a:solidFill>
+                <a:latin typeface="Calibri"/>
+              </a:rPr>
+              <a:t>Is a customer-requested feature market pull or technology push?</a:t>
+            </a:r>
+          </a:p>
+        </p:txBody>
+      </p:sp>
+      <p:sp>
+        <p:nvSpPr>
+          <p:cNvPr id="8" name="Oval 7"/>
+          <p:cNvSpPr/>
+          <p:nvPr/>
+        </p:nvSpPr>
+        <p:spPr>
+          <a:xfrm>
+            <a:off x="548640" y="2814066"/>
+            <a:ext cx="411480" cy="411480"/>
+          </a:xfrm>
+          <a:prstGeom prst="ellipse">
+            <a:avLst/>
+          </a:prstGeom>
+          <a:solidFill>
+            <a:srgbClr val="E0463A"/>
+          </a:solidFill>
+          <a:ln>
+            <a:noFill/>
+          </a:ln>
+          <a:effectLst/>
+        </p:spPr>
+        <p:style>
+          <a:lnRef idx="1">
+            <a:schemeClr val="accent1"/>
+          </a:lnRef>
+          <a:fillRef idx="3">
+            <a:schemeClr val="accent1"/>
+          </a:fillRef>
+          <a:effectRef idx="2">
+            <a:schemeClr val="accent1"/>
+          </a:effectRef>
+          <a:fontRef idx="minor">
+            <a:schemeClr val="lt1"/>
+          </a:fontRef>
+        </p:style>
+        <p:txBody>
+          <a:bodyPr rtlCol="0" anchor="ctr" lIns="0" rIns="0" tIns="0" bIns="0"/>
+          <a:lstStyle/>
+          <a:p>
+            <a:pPr algn="ctr"/>
+            <a:r>
+              <a:rPr sz="1400" b="1">
+                <a:solidFill>
+                  <a:srgbClr val="FFFFFF"/>
+                </a:solidFill>
+                <a:latin typeface="Calibri"/>
+              </a:rPr>
+              <a:t>2</a:t>
+            </a:r>
+          </a:p>
+        </p:txBody>
+      </p:sp>
+      <p:sp>
+        <p:nvSpPr>
+          <p:cNvPr id="9" name="TextBox 8"/>
+          <p:cNvSpPr txBox="1"/>
+          <p:nvPr/>
+        </p:nvSpPr>
+        <p:spPr>
+          <a:xfrm>
+            <a:off x="1234440" y="2795778"/>
+            <a:ext cx="10408615" cy="1030986"/>
+          </a:xfrm>
+          <a:prstGeom prst="rect">
+            <a:avLst/>
+          </a:prstGeom>
+          <a:noFill/>
+        </p:spPr>
+        <p:txBody>
+          <a:bodyPr wrap="square" anchor="t" lIns="0" rIns="0" tIns="0" bIns="0"/>
+          <a:lstStyle/>
+          <a:p>
+            <a:pPr algn="l"/>
+            <a:r>
+              <a:rPr sz="2200" b="0" i="0">
+                <a:solidFill>
+                  <a:srgbClr val="202122"/>
+                </a:solidFill>
+                <a:latin typeface="Calibri"/>
+              </a:rPr>
+              <a:t>Name the three parts of manufacturing cost.</a:t>
+            </a:r>
+          </a:p>
+        </p:txBody>
+      </p:sp>
+      <p:sp>
+        <p:nvSpPr>
+          <p:cNvPr id="10" name="Oval 9"/>
+          <p:cNvSpPr/>
+          <p:nvPr/>
+        </p:nvSpPr>
+        <p:spPr>
+          <a:xfrm>
+            <a:off x="548640" y="4009644"/>
+            <a:ext cx="411480" cy="411480"/>
+          </a:xfrm>
+          <a:prstGeom prst="ellipse">
+            <a:avLst/>
+          </a:prstGeom>
+          <a:solidFill>
+            <a:srgbClr val="E0463A"/>
+          </a:solidFill>
+          <a:ln>
+            <a:noFill/>
+          </a:ln>
+          <a:effectLst/>
+        </p:spPr>
+        <p:style>
+          <a:lnRef idx="1">
+            <a:schemeClr val="accent1"/>
+          </a:lnRef>
+          <a:fillRef idx="3">
+            <a:schemeClr val="accent1"/>
+          </a:fillRef>
+          <a:effectRef idx="2">
+            <a:schemeClr val="accent1"/>
+          </a:effectRef>
+          <a:fontRef idx="minor">
+            <a:schemeClr val="lt1"/>
+          </a:fontRef>
+        </p:style>
+        <p:txBody>
+          <a:bodyPr rtlCol="0" anchor="ctr" lIns="0" rIns="0" tIns="0" bIns="0"/>
+          <a:lstStyle/>
+          <a:p>
+            <a:pPr algn="ctr"/>
+            <a:r>
+              <a:rPr sz="1400" b="1">
+                <a:solidFill>
+                  <a:srgbClr val="FFFFFF"/>
+                </a:solidFill>
+                <a:latin typeface="Calibri"/>
+              </a:rPr>
+              <a:t>3</a:t>
+            </a:r>
+          </a:p>
+        </p:txBody>
+      </p:sp>
+      <p:sp>
+        <p:nvSpPr>
+          <p:cNvPr id="11" name="TextBox 10"/>
+          <p:cNvSpPr txBox="1"/>
+          <p:nvPr/>
+        </p:nvSpPr>
+        <p:spPr>
+          <a:xfrm>
+            <a:off x="1234440" y="3991356"/>
+            <a:ext cx="10408615" cy="1030986"/>
+          </a:xfrm>
+          <a:prstGeom prst="rect">
+            <a:avLst/>
+          </a:prstGeom>
+          <a:noFill/>
+        </p:spPr>
+        <p:txBody>
+          <a:bodyPr wrap="square" anchor="t" lIns="0" rIns="0" tIns="0" bIns="0"/>
+          <a:lstStyle/>
+          <a:p>
+            <a:pPr algn="l"/>
+            <a:r>
+              <a:rPr sz="2200" b="0" i="0">
+                <a:solidFill>
+                  <a:srgbClr val="202122"/>
+                </a:solidFill>
+                <a:latin typeface="Calibri"/>
+              </a:rPr>
+              <a:t>A part costs 8 pounds to make and sells for 11. Profit per unit?</a:t>
+            </a:r>
+          </a:p>
+        </p:txBody>
+      </p:sp>
+      <p:sp>
+        <p:nvSpPr>
+          <p:cNvPr id="12" name="Oval 11"/>
+          <p:cNvSpPr/>
+          <p:nvPr/>
+        </p:nvSpPr>
+        <p:spPr>
+          <a:xfrm>
+            <a:off x="548640" y="5205221"/>
+            <a:ext cx="411480" cy="411480"/>
+          </a:xfrm>
+          <a:prstGeom prst="ellipse">
+            <a:avLst/>
+          </a:prstGeom>
+          <a:solidFill>
+            <a:srgbClr val="E0463A"/>
+          </a:solidFill>
+          <a:ln>
+            <a:noFill/>
+          </a:ln>
+          <a:effectLst/>
+        </p:spPr>
+        <p:style>
+          <a:lnRef idx="1">
+            <a:schemeClr val="accent1"/>
+          </a:lnRef>
+          <a:fillRef idx="3">
+            <a:schemeClr val="accent1"/>
+          </a:fillRef>
+          <a:effectRef idx="2">
+            <a:schemeClr val="accent1"/>
+          </a:effectRef>
+          <a:fontRef idx="minor">
+            <a:schemeClr val="lt1"/>
+          </a:fontRef>
+        </p:style>
+        <p:txBody>
+          <a:bodyPr rtlCol="0" anchor="ctr" lIns="0" rIns="0" tIns="0" bIns="0"/>
+          <a:lstStyle/>
+          <a:p>
+            <a:pPr algn="ctr"/>
+            <a:r>
+              <a:rPr sz="1400" b="1">
+                <a:solidFill>
+                  <a:srgbClr val="FFFFFF"/>
+                </a:solidFill>
+                <a:latin typeface="Calibri"/>
+              </a:rPr>
+              <a:t>4</a:t>
+            </a:r>
+          </a:p>
+        </p:txBody>
+      </p:sp>
+      <p:sp>
+        <p:nvSpPr>
+          <p:cNvPr id="13" name="TextBox 12"/>
+          <p:cNvSpPr txBox="1"/>
+          <p:nvPr/>
+        </p:nvSpPr>
+        <p:spPr>
+          <a:xfrm>
+            <a:off x="1234440" y="5186933"/>
+            <a:ext cx="10408615" cy="1030986"/>
+          </a:xfrm>
+          <a:prstGeom prst="rect">
+            <a:avLst/>
+          </a:prstGeom>
+          <a:noFill/>
+        </p:spPr>
+        <p:txBody>
+          <a:bodyPr wrap="square" anchor="t" lIns="0" rIns="0" tIns="0" bIns="0"/>
+          <a:lstStyle/>
+          <a:p>
+            <a:pPr algn="l"/>
+            <a:r>
+              <a:rPr sz="2200" b="0" i="0">
+                <a:solidFill>
+                  <a:srgbClr val="202122"/>
+                </a:solidFill>
+                <a:latin typeface="Calibri"/>
+              </a:rPr>
+              <a:t>Give one operational constraint.</a:t>
+            </a:r>
+          </a:p>
+        </p:txBody>
+      </p:sp>
+    </p:spTree>
+  </p:cSld>
+  <p:clrMapOvr>
+    <a:masterClrMapping/>
+  </p:clrMapOvr>
+</p:sld>
+</file>
+
+<file path=ppt/slides/slide11.xml><?xml version="1.0" encoding="utf-8"?>
+<p:sld xmlns:a="http://schemas.openxmlformats.org/drawingml/2006/main" xmlns:p="http://schemas.openxmlformats.org/presentationml/2006/main" xmlns:r="http://schemas.openxmlformats.org/officeDocument/2006/relationships">
+  <p:cSld>
+    <p:bg>
+      <p:bgPr>
+        <a:solidFill>
+          <a:srgbClr val="FFFFFF"/>
+        </a:solidFill>
+        <a:effectLst/>
+      </p:bgPr>
+    </p:bg>
+    <p:spTree>
+      <p:nvGrpSpPr>
+        <p:cNvPr id="1" name=""/>
+        <p:cNvGrpSpPr/>
+        <p:nvPr/>
+      </p:nvGrpSpPr>
+      <p:grpSpPr/>
+      <p:sp>
+        <p:nvSpPr>
+          <p:cNvPr id="2" name="TextBox 1"/>
+          <p:cNvSpPr txBox="1"/>
+          <p:nvPr/>
+        </p:nvSpPr>
+        <p:spPr>
+          <a:xfrm>
+            <a:off x="548640" y="320040"/>
+            <a:ext cx="11094415" cy="274320"/>
+          </a:xfrm>
+          <a:prstGeom prst="rect">
+            <a:avLst/>
+          </a:prstGeom>
+          <a:noFill/>
+        </p:spPr>
+        <p:txBody>
+          <a:bodyPr wrap="square" anchor="t" lIns="0" rIns="0" tIns="0" bIns="0"/>
+          <a:lstStyle/>
+          <a:p>
+            <a:pPr algn="l"/>
+            <a:r>
+              <a:rPr sz="1100" b="1" i="0">
+                <a:solidFill>
+                  <a:srgbClr val="54595D"/>
+                </a:solidFill>
+                <a:latin typeface="Calibri"/>
+              </a:rPr>
+              <a:t>MECHANICAL ENGINEERING  ·  Mechanical: Knowledge criteria</a:t>
+            </a:r>
+          </a:p>
+        </p:txBody>
+      </p:sp>
+      <p:sp>
+        <p:nvSpPr>
+          <p:cNvPr id="3" name="TextBox 2"/>
+          <p:cNvSpPr txBox="1"/>
+          <p:nvPr/>
+        </p:nvSpPr>
+        <p:spPr>
+          <a:xfrm>
+            <a:off x="548640" y="566928"/>
+            <a:ext cx="11094415" cy="822960"/>
+          </a:xfrm>
+          <a:prstGeom prst="rect">
+            <a:avLst/>
+          </a:prstGeom>
+          <a:noFill/>
+        </p:spPr>
+        <p:txBody>
+          <a:bodyPr wrap="square" anchor="ctr" lIns="0" rIns="0" tIns="0" bIns="0"/>
+          <a:lstStyle/>
+          <a:p>
+            <a:pPr algn="l"/>
+            <a:r>
+              <a:rPr sz="3200" b="1" i="0">
+                <a:solidFill>
+                  <a:srgbClr val="03306E"/>
+                </a:solidFill>
+                <a:latin typeface="Cambria"/>
+              </a:rPr>
+              <a:t>Answers</a:t>
+            </a:r>
+          </a:p>
+        </p:txBody>
+      </p:sp>
+      <p:sp>
+        <p:nvSpPr>
+          <p:cNvPr id="4" name="TextBox 3"/>
+          <p:cNvSpPr txBox="1"/>
+          <p:nvPr/>
+        </p:nvSpPr>
+        <p:spPr>
+          <a:xfrm>
+            <a:off x="548640" y="6446520"/>
+            <a:ext cx="8229600" cy="274320"/>
+          </a:xfrm>
+          <a:prstGeom prst="rect">
+            <a:avLst/>
+          </a:prstGeom>
+          <a:noFill/>
+        </p:spPr>
+        <p:txBody>
+          <a:bodyPr wrap="square" anchor="t" lIns="0" rIns="0" tIns="0" bIns="0"/>
+          <a:lstStyle/>
+          <a:p>
+            <a:pPr algn="l"/>
+            <a:r>
+              <a:rPr sz="1000" b="0" i="0">
+                <a:solidFill>
+                  <a:srgbClr val="54595D"/>
+                </a:solidFill>
+                <a:latin typeface="Calibri"/>
+              </a:rPr>
+              <a:t>Design and Development for Engineering and Manufacturing T Level  ·  Business Context, Constraints and Metrics in Design</a:t>
+            </a:r>
+          </a:p>
+        </p:txBody>
+      </p:sp>
+      <p:sp>
+        <p:nvSpPr>
+          <p:cNvPr id="5" name="TextBox 4"/>
+          <p:cNvSpPr txBox="1"/>
+          <p:nvPr/>
+        </p:nvSpPr>
+        <p:spPr>
+          <a:xfrm>
+            <a:off x="10728655" y="6446520"/>
+            <a:ext cx="914400" cy="274320"/>
+          </a:xfrm>
+          <a:prstGeom prst="rect">
+            <a:avLst/>
+          </a:prstGeom>
+          <a:noFill/>
+        </p:spPr>
+        <p:txBody>
+          <a:bodyPr wrap="square" anchor="t" lIns="0" rIns="0" tIns="0" bIns="0"/>
+          <a:lstStyle/>
+          <a:p>
+            <a:pPr algn="r"/>
+            <a:r>
+              <a:rPr sz="1000" b="0" i="0">
+                <a:solidFill>
+                  <a:srgbClr val="54595D"/>
+                </a:solidFill>
+                <a:latin typeface="Calibri"/>
+              </a:rPr>
+              <a:t>11</a:t>
+            </a:r>
+          </a:p>
+        </p:txBody>
+      </p:sp>
+      <p:sp>
+        <p:nvSpPr>
+          <p:cNvPr id="6" name="Oval 5"/>
+          <p:cNvSpPr/>
+          <p:nvPr/>
+        </p:nvSpPr>
+        <p:spPr>
+          <a:xfrm>
+            <a:off x="548640" y="1618488"/>
+            <a:ext cx="411480" cy="411480"/>
+          </a:xfrm>
+          <a:prstGeom prst="ellipse">
+            <a:avLst/>
+          </a:prstGeom>
+          <a:solidFill>
+            <a:srgbClr val="E0463A"/>
+          </a:solidFill>
+          <a:ln>
+            <a:noFill/>
+          </a:ln>
+          <a:effectLst/>
+        </p:spPr>
+        <p:style>
+          <a:lnRef idx="1">
+            <a:schemeClr val="accent1"/>
+          </a:lnRef>
+          <a:fillRef idx="3">
+            <a:schemeClr val="accent1"/>
+          </a:fillRef>
+          <a:effectRef idx="2">
+            <a:schemeClr val="accent1"/>
+          </a:effectRef>
+          <a:fontRef idx="minor">
+            <a:schemeClr val="lt1"/>
+          </a:fontRef>
+        </p:style>
+        <p:txBody>
+          <a:bodyPr rtlCol="0" anchor="ctr" lIns="0" rIns="0" tIns="0" bIns="0"/>
+          <a:lstStyle/>
+          <a:p>
+            <a:pPr algn="ctr"/>
+            <a:r>
+              <a:rPr sz="1400" b="1">
+                <a:solidFill>
+                  <a:srgbClr val="FFFFFF"/>
+                </a:solidFill>
+                <a:latin typeface="Calibri"/>
+              </a:rPr>
+              <a:t>1</a:t>
+            </a:r>
+          </a:p>
+        </p:txBody>
+      </p:sp>
+      <p:sp>
+        <p:nvSpPr>
+          <p:cNvPr id="7" name="TextBox 6"/>
+          <p:cNvSpPr txBox="1"/>
+          <p:nvPr/>
+        </p:nvSpPr>
+        <p:spPr>
+          <a:xfrm>
+            <a:off x="1234440" y="1600200"/>
+            <a:ext cx="10408615" cy="1030986"/>
+          </a:xfrm>
+          <a:prstGeom prst="rect">
+            <a:avLst/>
+          </a:prstGeom>
+          <a:noFill/>
+        </p:spPr>
+        <p:txBody>
+          <a:bodyPr wrap="square" anchor="t" lIns="0" rIns="0" tIns="0" bIns="0"/>
+          <a:lstStyle/>
+          <a:p>
+            <a:pPr algn="l"/>
+            <a:r>
+              <a:rPr sz="1800" b="0" i="0">
+                <a:solidFill>
+                  <a:srgbClr val="54595D"/>
+                </a:solidFill>
+                <a:latin typeface="Calibri"/>
+              </a:rPr>
+              <a:t>Is a customer-requested feature market pull or technology push?</a:t>
+            </a:r>
+          </a:p>
+          <a:p>
+            <a:r>
+              <a:rPr sz="1800" b="1">
+                <a:solidFill>
+                  <a:srgbClr val="03306E"/>
+                </a:solidFill>
+                <a:latin typeface="Calibri"/>
+              </a:rPr>
+              <a:t>Market pull.</a:t>
+            </a:r>
+          </a:p>
+        </p:txBody>
+      </p:sp>
+      <p:sp>
+        <p:nvSpPr>
+          <p:cNvPr id="8" name="Oval 7"/>
+          <p:cNvSpPr/>
+          <p:nvPr/>
+        </p:nvSpPr>
+        <p:spPr>
+          <a:xfrm>
+            <a:off x="548640" y="2814066"/>
+            <a:ext cx="411480" cy="411480"/>
+          </a:xfrm>
+          <a:prstGeom prst="ellipse">
+            <a:avLst/>
+          </a:prstGeom>
+          <a:solidFill>
+            <a:srgbClr val="E0463A"/>
+          </a:solidFill>
+          <a:ln>
+            <a:noFill/>
+          </a:ln>
+          <a:effectLst/>
+        </p:spPr>
+        <p:style>
+          <a:lnRef idx="1">
+            <a:schemeClr val="accent1"/>
+          </a:lnRef>
+          <a:fillRef idx="3">
+            <a:schemeClr val="accent1"/>
+          </a:fillRef>
+          <a:effectRef idx="2">
+            <a:schemeClr val="accent1"/>
+          </a:effectRef>
+          <a:fontRef idx="minor">
+            <a:schemeClr val="lt1"/>
+          </a:fontRef>
+        </p:style>
+        <p:txBody>
+          <a:bodyPr rtlCol="0" anchor="ctr" lIns="0" rIns="0" tIns="0" bIns="0"/>
+          <a:lstStyle/>
+          <a:p>
+            <a:pPr algn="ctr"/>
+            <a:r>
+              <a:rPr sz="1400" b="1">
+                <a:solidFill>
+                  <a:srgbClr val="FFFFFF"/>
+                </a:solidFill>
+                <a:latin typeface="Calibri"/>
+              </a:rPr>
+              <a:t>2</a:t>
+            </a:r>
+          </a:p>
+        </p:txBody>
+      </p:sp>
+      <p:sp>
+        <p:nvSpPr>
+          <p:cNvPr id="9" name="TextBox 8"/>
+          <p:cNvSpPr txBox="1"/>
+          <p:nvPr/>
+        </p:nvSpPr>
+        <p:spPr>
+          <a:xfrm>
+            <a:off x="1234440" y="2795778"/>
+            <a:ext cx="10408615" cy="1030986"/>
+          </a:xfrm>
+          <a:prstGeom prst="rect">
+            <a:avLst/>
+          </a:prstGeom>
+          <a:noFill/>
+        </p:spPr>
+        <p:txBody>
+          <a:bodyPr wrap="square" anchor="t" lIns="0" rIns="0" tIns="0" bIns="0"/>
+          <a:lstStyle/>
+          <a:p>
+            <a:pPr algn="l"/>
+            <a:r>
+              <a:rPr sz="1800" b="0" i="0">
+                <a:solidFill>
+                  <a:srgbClr val="54595D"/>
+                </a:solidFill>
+                <a:latin typeface="Calibri"/>
+              </a:rPr>
+              <a:t>Name the three parts of manufacturing cost.</a:t>
+            </a:r>
+          </a:p>
+          <a:p>
+            <a:r>
+              <a:rPr sz="1800" b="1">
+                <a:solidFill>
+                  <a:srgbClr val="03306E"/>
+                </a:solidFill>
+                <a:latin typeface="Calibri"/>
+              </a:rPr>
+              <a:t>Materials, labour, overheads.</a:t>
+            </a:r>
+          </a:p>
+        </p:txBody>
+      </p:sp>
+      <p:sp>
+        <p:nvSpPr>
+          <p:cNvPr id="10" name="Oval 9"/>
+          <p:cNvSpPr/>
+          <p:nvPr/>
+        </p:nvSpPr>
+        <p:spPr>
+          <a:xfrm>
+            <a:off x="548640" y="4009644"/>
+            <a:ext cx="411480" cy="411480"/>
+          </a:xfrm>
+          <a:prstGeom prst="ellipse">
+            <a:avLst/>
+          </a:prstGeom>
+          <a:solidFill>
+            <a:srgbClr val="E0463A"/>
+          </a:solidFill>
+          <a:ln>
+            <a:noFill/>
+          </a:ln>
+          <a:effectLst/>
+        </p:spPr>
+        <p:style>
+          <a:lnRef idx="1">
+            <a:schemeClr val="accent1"/>
+          </a:lnRef>
+          <a:fillRef idx="3">
+            <a:schemeClr val="accent1"/>
+          </a:fillRef>
+          <a:effectRef idx="2">
+            <a:schemeClr val="accent1"/>
+          </a:effectRef>
+          <a:fontRef idx="minor">
+            <a:schemeClr val="lt1"/>
+          </a:fontRef>
+        </p:style>
+        <p:txBody>
+          <a:bodyPr rtlCol="0" anchor="ctr" lIns="0" rIns="0" tIns="0" bIns="0"/>
+          <a:lstStyle/>
+          <a:p>
+            <a:pPr algn="ctr"/>
+            <a:r>
+              <a:rPr sz="1400" b="1">
+                <a:solidFill>
+                  <a:srgbClr val="FFFFFF"/>
+                </a:solidFill>
+                <a:latin typeface="Calibri"/>
+              </a:rPr>
+              <a:t>3</a:t>
+            </a:r>
+          </a:p>
+        </p:txBody>
+      </p:sp>
+      <p:sp>
+        <p:nvSpPr>
+          <p:cNvPr id="11" name="TextBox 10"/>
+          <p:cNvSpPr txBox="1"/>
+          <p:nvPr/>
+        </p:nvSpPr>
+        <p:spPr>
+          <a:xfrm>
+            <a:off x="1234440" y="3991356"/>
+            <a:ext cx="10408615" cy="1030986"/>
+          </a:xfrm>
+          <a:prstGeom prst="rect">
+            <a:avLst/>
+          </a:prstGeom>
+          <a:noFill/>
+        </p:spPr>
+        <p:txBody>
+          <a:bodyPr wrap="square" anchor="t" lIns="0" rIns="0" tIns="0" bIns="0"/>
+          <a:lstStyle/>
+          <a:p>
+            <a:pPr algn="l"/>
+            <a:r>
+              <a:rPr sz="1800" b="0" i="0">
+                <a:solidFill>
+                  <a:srgbClr val="54595D"/>
+                </a:solidFill>
+                <a:latin typeface="Calibri"/>
+              </a:rPr>
+              <a:t>A part costs 8 pounds to make and sells for 11. Profit per unit?</a:t>
+            </a:r>
+          </a:p>
+          <a:p>
+            <a:r>
+              <a:rPr sz="1800" b="1">
+                <a:solidFill>
+                  <a:srgbClr val="03306E"/>
+                </a:solidFill>
+                <a:latin typeface="Calibri"/>
+              </a:rPr>
+              <a:t>3 pounds.</a:t>
+            </a:r>
+          </a:p>
+        </p:txBody>
+      </p:sp>
+      <p:sp>
+        <p:nvSpPr>
+          <p:cNvPr id="12" name="Oval 11"/>
+          <p:cNvSpPr/>
+          <p:nvPr/>
+        </p:nvSpPr>
+        <p:spPr>
+          <a:xfrm>
+            <a:off x="548640" y="5205221"/>
+            <a:ext cx="411480" cy="411480"/>
+          </a:xfrm>
+          <a:prstGeom prst="ellipse">
+            <a:avLst/>
+          </a:prstGeom>
+          <a:solidFill>
+            <a:srgbClr val="E0463A"/>
+          </a:solidFill>
+          <a:ln>
+            <a:noFill/>
+          </a:ln>
+          <a:effectLst/>
+        </p:spPr>
+        <p:style>
+          <a:lnRef idx="1">
+            <a:schemeClr val="accent1"/>
+          </a:lnRef>
+          <a:fillRef idx="3">
+            <a:schemeClr val="accent1"/>
+          </a:fillRef>
+          <a:effectRef idx="2">
+            <a:schemeClr val="accent1"/>
+          </a:effectRef>
+          <a:fontRef idx="minor">
+            <a:schemeClr val="lt1"/>
+          </a:fontRef>
+        </p:style>
+        <p:txBody>
+          <a:bodyPr rtlCol="0" anchor="ctr" lIns="0" rIns="0" tIns="0" bIns="0"/>
+          <a:lstStyle/>
+          <a:p>
+            <a:pPr algn="ctr"/>
+            <a:r>
+              <a:rPr sz="1400" b="1">
+                <a:solidFill>
+                  <a:srgbClr val="FFFFFF"/>
+                </a:solidFill>
+                <a:latin typeface="Calibri"/>
+              </a:rPr>
+              <a:t>4</a:t>
+            </a:r>
+          </a:p>
+        </p:txBody>
+      </p:sp>
+      <p:sp>
+        <p:nvSpPr>
+          <p:cNvPr id="13" name="TextBox 12"/>
+          <p:cNvSpPr txBox="1"/>
+          <p:nvPr/>
+        </p:nvSpPr>
+        <p:spPr>
+          <a:xfrm>
+            <a:off x="1234440" y="5186933"/>
+            <a:ext cx="10408615" cy="1030986"/>
+          </a:xfrm>
+          <a:prstGeom prst="rect">
+            <a:avLst/>
+          </a:prstGeom>
+          <a:noFill/>
+        </p:spPr>
+        <p:txBody>
+          <a:bodyPr wrap="square" anchor="t" lIns="0" rIns="0" tIns="0" bIns="0"/>
+          <a:lstStyle/>
+          <a:p>
+            <a:pPr algn="l"/>
+            <a:r>
+              <a:rPr sz="1800" b="0" i="0">
+                <a:solidFill>
+                  <a:srgbClr val="54595D"/>
+                </a:solidFill>
+                <a:latin typeface="Calibri"/>
+              </a:rPr>
+              <a:t>Give one operational constraint.</a:t>
+            </a:r>
+          </a:p>
+          <a:p>
+            <a:r>
+              <a:rPr sz="1800" b="1">
+                <a:solidFill>
+                  <a:srgbClr val="03306E"/>
+                </a:solidFill>
+                <a:latin typeface="Calibri"/>
+              </a:rPr>
+              <a:t>E.g. tools, equipment, process capability, training.</a:t>
+            </a:r>
+          </a:p>
+        </p:txBody>
+      </p:sp>
+    </p:spTree>
+  </p:cSld>
+  <p:clrMapOvr>
+    <a:masterClrMapping/>
+  </p:clrMapOvr>
+</p:sld>
+</file>
+
+<file path=ppt/slides/slide12.xml><?xml version="1.0" encoding="utf-8"?>
+<p:sld xmlns:a="http://schemas.openxmlformats.org/drawingml/2006/main" xmlns:p="http://schemas.openxmlformats.org/presentationml/2006/main" xmlns:r="http://schemas.openxmlformats.org/officeDocument/2006/relationships">
+  <p:cSld>
+    <p:bg>
+      <p:bgPr>
+        <a:solidFill>
+          <a:srgbClr val="FFFFFF"/>
+        </a:solidFill>
+        <a:effectLst/>
+      </p:bgPr>
+    </p:bg>
+    <p:spTree>
+      <p:nvGrpSpPr>
+        <p:cNvPr id="1" name=""/>
+        <p:cNvGrpSpPr/>
+        <p:nvPr/>
+      </p:nvGrpSpPr>
+      <p:grpSpPr/>
+      <p:sp>
+        <p:nvSpPr>
+          <p:cNvPr id="2" name="TextBox 1"/>
+          <p:cNvSpPr txBox="1"/>
+          <p:nvPr/>
+        </p:nvSpPr>
+        <p:spPr>
+          <a:xfrm>
+            <a:off x="548640" y="320040"/>
+            <a:ext cx="11094415" cy="274320"/>
+          </a:xfrm>
+          <a:prstGeom prst="rect">
+            <a:avLst/>
+          </a:prstGeom>
+          <a:noFill/>
+        </p:spPr>
+        <p:txBody>
+          <a:bodyPr wrap="square" anchor="t" lIns="0" rIns="0" tIns="0" bIns="0"/>
+          <a:lstStyle/>
+          <a:p>
+            <a:pPr algn="l"/>
+            <a:r>
+              <a:rPr sz="1100" b="1" i="0">
+                <a:solidFill>
+                  <a:srgbClr val="54595D"/>
+                </a:solidFill>
+                <a:latin typeface="Calibri"/>
+              </a:rPr>
+              <a:t>MECHANICAL ENGINEERING  ·  Mechanical: Knowledge criteria</a:t>
+            </a:r>
+          </a:p>
+        </p:txBody>
+      </p:sp>
+      <p:sp>
+        <p:nvSpPr>
+          <p:cNvPr id="3" name="TextBox 2"/>
+          <p:cNvSpPr txBox="1"/>
+          <p:nvPr/>
+        </p:nvSpPr>
+        <p:spPr>
+          <a:xfrm>
+            <a:off x="548640" y="566928"/>
+            <a:ext cx="11094415" cy="822960"/>
+          </a:xfrm>
+          <a:prstGeom prst="rect">
+            <a:avLst/>
+          </a:prstGeom>
+          <a:noFill/>
+        </p:spPr>
+        <p:txBody>
+          <a:bodyPr wrap="square" anchor="ctr" lIns="0" rIns="0" tIns="0" bIns="0"/>
+          <a:lstStyle/>
+          <a:p>
+            <a:pPr algn="l"/>
+            <a:r>
+              <a:rPr sz="3200" b="1" i="0">
+                <a:solidFill>
+                  <a:srgbClr val="03306E"/>
+                </a:solidFill>
+                <a:latin typeface="Cambria"/>
+              </a:rPr>
+              <a:t>Activity: Cost a design</a:t>
+            </a:r>
+          </a:p>
+        </p:txBody>
+      </p:sp>
+      <p:sp>
+        <p:nvSpPr>
+          <p:cNvPr id="4" name="TextBox 3"/>
+          <p:cNvSpPr txBox="1"/>
+          <p:nvPr/>
+        </p:nvSpPr>
+        <p:spPr>
+          <a:xfrm>
+            <a:off x="548640" y="6446520"/>
+            <a:ext cx="8229600" cy="274320"/>
+          </a:xfrm>
+          <a:prstGeom prst="rect">
+            <a:avLst/>
+          </a:prstGeom>
+          <a:noFill/>
+        </p:spPr>
+        <p:txBody>
+          <a:bodyPr wrap="square" anchor="t" lIns="0" rIns="0" tIns="0" bIns="0"/>
+          <a:lstStyle/>
+          <a:p>
+            <a:pPr algn="l"/>
+            <a:r>
+              <a:rPr sz="1000" b="0" i="0">
+                <a:solidFill>
+                  <a:srgbClr val="54595D"/>
+                </a:solidFill>
+                <a:latin typeface="Calibri"/>
+              </a:rPr>
+              <a:t>Design and Development for Engineering and Manufacturing T Level  ·  Business Context, Constraints and Metrics in Design</a:t>
+            </a:r>
+          </a:p>
+        </p:txBody>
+      </p:sp>
+      <p:sp>
+        <p:nvSpPr>
+          <p:cNvPr id="5" name="TextBox 4"/>
+          <p:cNvSpPr txBox="1"/>
+          <p:nvPr/>
+        </p:nvSpPr>
+        <p:spPr>
+          <a:xfrm>
+            <a:off x="10728655" y="6446520"/>
+            <a:ext cx="914400" cy="274320"/>
+          </a:xfrm>
+          <a:prstGeom prst="rect">
+            <a:avLst/>
+          </a:prstGeom>
+          <a:noFill/>
+        </p:spPr>
+        <p:txBody>
+          <a:bodyPr wrap="square" anchor="t" lIns="0" rIns="0" tIns="0" bIns="0"/>
+          <a:lstStyle/>
+          <a:p>
+            <a:pPr algn="r"/>
+            <a:r>
+              <a:rPr sz="1000" b="0" i="0">
+                <a:solidFill>
+                  <a:srgbClr val="54595D"/>
+                </a:solidFill>
+                <a:latin typeface="Calibri"/>
+              </a:rPr>
+              <a:t>12</a:t>
+            </a:r>
+          </a:p>
+        </p:txBody>
+      </p:sp>
+      <p:sp>
+        <p:nvSpPr>
+          <p:cNvPr id="6" name="Rounded Rectangle 5"/>
+          <p:cNvSpPr/>
+          <p:nvPr/>
+        </p:nvSpPr>
+        <p:spPr>
+          <a:xfrm>
+            <a:off x="548640" y="1508760"/>
+            <a:ext cx="2011680" cy="457200"/>
+          </a:xfrm>
+          <a:prstGeom prst="roundRect">
+            <a:avLst>
+              <a:gd name="adj" fmla="val 50000"/>
+            </a:avLst>
+          </a:prstGeom>
+          <a:solidFill>
+            <a:srgbClr val="E0463A"/>
+          </a:solidFill>
+          <a:ln>
+            <a:noFill/>
+          </a:ln>
+          <a:effectLst/>
+        </p:spPr>
+        <p:style>
+          <a:lnRef idx="1">
+            <a:schemeClr val="accent1"/>
+          </a:lnRef>
+          <a:fillRef idx="3">
+            <a:schemeClr val="accent1"/>
+          </a:fillRef>
+          <a:effectRef idx="2">
+            <a:schemeClr val="accent1"/>
+          </a:effectRef>
+          <a:fontRef idx="minor">
+            <a:schemeClr val="lt1"/>
+          </a:fontRef>
+        </p:style>
+        <p:txBody>
+          <a:bodyPr rtlCol="0" anchor="ctr"/>
+          <a:lstStyle/>
+          <a:p/>
+        </p:txBody>
+      </p:sp>
+      <p:sp>
+        <p:nvSpPr>
+          <p:cNvPr id="7" name="TextBox 6"/>
+          <p:cNvSpPr txBox="1"/>
+          <p:nvPr/>
+        </p:nvSpPr>
+        <p:spPr>
+          <a:xfrm>
+            <a:off x="548640" y="1508760"/>
+            <a:ext cx="2011680" cy="457200"/>
+          </a:xfrm>
+          <a:prstGeom prst="rect">
+            <a:avLst/>
+          </a:prstGeom>
+          <a:noFill/>
+        </p:spPr>
+        <p:txBody>
+          <a:bodyPr wrap="square" anchor="ctr" lIns="0" rIns="0" tIns="0" bIns="0"/>
+          <a:lstStyle/>
+          <a:p>
+            <a:pPr algn="ctr"/>
+            <a:r>
+              <a:rPr sz="1400" b="1" i="0">
+                <a:solidFill>
+                  <a:srgbClr val="FFFFFF"/>
+                </a:solidFill>
+                <a:latin typeface="Calibri"/>
+              </a:rPr>
+              <a:t>25 minutes</a:t>
+            </a:r>
+          </a:p>
+        </p:txBody>
+      </p:sp>
+      <p:sp>
+        <p:nvSpPr>
+          <p:cNvPr id="8" name="TextBox 7"/>
+          <p:cNvSpPr txBox="1"/>
+          <p:nvPr/>
+        </p:nvSpPr>
+        <p:spPr>
+          <a:xfrm>
+            <a:off x="2743200" y="1508760"/>
+            <a:ext cx="4754880" cy="457200"/>
+          </a:xfrm>
+          <a:prstGeom prst="rect">
+            <a:avLst/>
+          </a:prstGeom>
+          <a:noFill/>
+        </p:spPr>
+        <p:txBody>
+          <a:bodyPr wrap="square" anchor="ctr" lIns="0" rIns="0" tIns="0" bIns="0"/>
+          <a:lstStyle/>
+          <a:p>
+            <a:pPr algn="l"/>
+            <a:r>
+              <a:rPr sz="1400" b="0" i="1">
+                <a:solidFill>
+                  <a:srgbClr val="54595D"/>
+                </a:solidFill>
+                <a:latin typeface="Calibri"/>
+              </a:rPr>
+              <a:t>Pairs</a:t>
+            </a:r>
+          </a:p>
+        </p:txBody>
+      </p:sp>
+      <p:sp>
+        <p:nvSpPr>
+          <p:cNvPr id="9" name="Oval 8"/>
+          <p:cNvSpPr/>
+          <p:nvPr/>
+        </p:nvSpPr>
+        <p:spPr>
+          <a:xfrm>
+            <a:off x="548640" y="2482596"/>
+            <a:ext cx="384048" cy="384048"/>
+          </a:xfrm>
+          <a:prstGeom prst="ellipse">
+            <a:avLst/>
+          </a:prstGeom>
+          <a:solidFill>
+            <a:srgbClr val="0645AD"/>
+          </a:solidFill>
+          <a:ln>
+            <a:noFill/>
+          </a:ln>
+          <a:effectLst/>
+        </p:spPr>
+        <p:style>
+          <a:lnRef idx="1">
+            <a:schemeClr val="accent1"/>
+          </a:lnRef>
+          <a:fillRef idx="3">
+            <a:schemeClr val="accent1"/>
+          </a:fillRef>
+          <a:effectRef idx="2">
+            <a:schemeClr val="accent1"/>
+          </a:effectRef>
+          <a:fontRef idx="minor">
+            <a:schemeClr val="lt1"/>
+          </a:fontRef>
+        </p:style>
+        <p:txBody>
+          <a:bodyPr rtlCol="0" anchor="ctr" lIns="0" rIns="0" tIns="0" bIns="0"/>
+          <a:lstStyle/>
+          <a:p>
+            <a:pPr algn="ctr"/>
+            <a:r>
+              <a:rPr sz="1300" b="1">
+                <a:solidFill>
+                  <a:srgbClr val="FFFFFF"/>
+                </a:solidFill>
+                <a:latin typeface="Calibri"/>
+              </a:rPr>
+              <a:t>1</a:t>
+            </a:r>
+          </a:p>
+        </p:txBody>
+      </p:sp>
+      <p:sp>
+        <p:nvSpPr>
+          <p:cNvPr id="10" name="TextBox 9"/>
+          <p:cNvSpPr txBox="1"/>
+          <p:nvPr/>
+        </p:nvSpPr>
+        <p:spPr>
+          <a:xfrm>
+            <a:off x="1143000" y="2240280"/>
+            <a:ext cx="5943600" cy="868680"/>
+          </a:xfrm>
+          <a:prstGeom prst="rect">
+            <a:avLst/>
+          </a:prstGeom>
+          <a:noFill/>
+        </p:spPr>
+        <p:txBody>
+          <a:bodyPr wrap="square" anchor="ctr" lIns="0" rIns="0" tIns="0" bIns="0"/>
+          <a:lstStyle/>
+          <a:p>
+            <a:pPr algn="l"/>
+            <a:r>
+              <a:rPr sz="1700" b="0" i="0">
+                <a:solidFill>
+                  <a:srgbClr val="202122"/>
+                </a:solidFill>
+                <a:latin typeface="Calibri"/>
+              </a:rPr>
+              <a:t>Use the material and labour data from your teacher for a steel bracket.</a:t>
+            </a:r>
+          </a:p>
+        </p:txBody>
+      </p:sp>
+      <p:sp>
+        <p:nvSpPr>
+          <p:cNvPr id="11" name="Oval 10"/>
+          <p:cNvSpPr/>
+          <p:nvPr/>
+        </p:nvSpPr>
+        <p:spPr>
+          <a:xfrm>
+            <a:off x="548640" y="3461004"/>
+            <a:ext cx="384048" cy="384048"/>
+          </a:xfrm>
+          <a:prstGeom prst="ellipse">
+            <a:avLst/>
+          </a:prstGeom>
+          <a:solidFill>
+            <a:srgbClr val="0645AD"/>
+          </a:solidFill>
+          <a:ln>
+            <a:noFill/>
+          </a:ln>
+          <a:effectLst/>
+        </p:spPr>
+        <p:style>
+          <a:lnRef idx="1">
+            <a:schemeClr val="accent1"/>
+          </a:lnRef>
+          <a:fillRef idx="3">
+            <a:schemeClr val="accent1"/>
+          </a:fillRef>
+          <a:effectRef idx="2">
+            <a:schemeClr val="accent1"/>
+          </a:effectRef>
+          <a:fontRef idx="minor">
+            <a:schemeClr val="lt1"/>
+          </a:fontRef>
+        </p:style>
+        <p:txBody>
+          <a:bodyPr rtlCol="0" anchor="ctr" lIns="0" rIns="0" tIns="0" bIns="0"/>
+          <a:lstStyle/>
+          <a:p>
+            <a:pPr algn="ctr"/>
+            <a:r>
+              <a:rPr sz="1300" b="1">
+                <a:solidFill>
+                  <a:srgbClr val="FFFFFF"/>
+                </a:solidFill>
+                <a:latin typeface="Calibri"/>
+              </a:rPr>
+              <a:t>2</a:t>
+            </a:r>
+          </a:p>
+        </p:txBody>
+      </p:sp>
+      <p:sp>
+        <p:nvSpPr>
+          <p:cNvPr id="12" name="TextBox 11"/>
+          <p:cNvSpPr txBox="1"/>
+          <p:nvPr/>
+        </p:nvSpPr>
+        <p:spPr>
+          <a:xfrm>
+            <a:off x="1143000" y="3218688"/>
+            <a:ext cx="5943600" cy="868680"/>
+          </a:xfrm>
+          <a:prstGeom prst="rect">
+            <a:avLst/>
+          </a:prstGeom>
+          <a:noFill/>
+        </p:spPr>
+        <p:txBody>
+          <a:bodyPr wrap="square" anchor="ctr" lIns="0" rIns="0" tIns="0" bIns="0"/>
+          <a:lstStyle/>
+          <a:p>
+            <a:pPr algn="l"/>
+            <a:r>
+              <a:rPr sz="1700" b="0" i="0">
+                <a:solidFill>
+                  <a:srgbClr val="202122"/>
+                </a:solidFill>
+                <a:latin typeface="Calibri"/>
+              </a:rPr>
+              <a:t>Calculate the total manufacturing cost per unit.</a:t>
+            </a:r>
+          </a:p>
+        </p:txBody>
+      </p:sp>
+      <p:sp>
+        <p:nvSpPr>
+          <p:cNvPr id="13" name="Oval 12"/>
+          <p:cNvSpPr/>
+          <p:nvPr/>
+        </p:nvSpPr>
+        <p:spPr>
+          <a:xfrm>
+            <a:off x="548640" y="4439412"/>
+            <a:ext cx="384048" cy="384048"/>
+          </a:xfrm>
+          <a:prstGeom prst="ellipse">
+            <a:avLst/>
+          </a:prstGeom>
+          <a:solidFill>
+            <a:srgbClr val="0645AD"/>
+          </a:solidFill>
+          <a:ln>
+            <a:noFill/>
+          </a:ln>
+          <a:effectLst/>
+        </p:spPr>
+        <p:style>
+          <a:lnRef idx="1">
+            <a:schemeClr val="accent1"/>
+          </a:lnRef>
+          <a:fillRef idx="3">
+            <a:schemeClr val="accent1"/>
+          </a:fillRef>
+          <a:effectRef idx="2">
+            <a:schemeClr val="accent1"/>
+          </a:effectRef>
+          <a:fontRef idx="minor">
+            <a:schemeClr val="lt1"/>
+          </a:fontRef>
+        </p:style>
+        <p:txBody>
+          <a:bodyPr rtlCol="0" anchor="ctr" lIns="0" rIns="0" tIns="0" bIns="0"/>
+          <a:lstStyle/>
+          <a:p>
+            <a:pPr algn="ctr"/>
+            <a:r>
+              <a:rPr sz="1300" b="1">
+                <a:solidFill>
+                  <a:srgbClr val="FFFFFF"/>
+                </a:solidFill>
+                <a:latin typeface="Calibri"/>
+              </a:rPr>
+              <a:t>3</a:t>
+            </a:r>
+          </a:p>
+        </p:txBody>
+      </p:sp>
+      <p:sp>
+        <p:nvSpPr>
+          <p:cNvPr id="14" name="TextBox 13"/>
+          <p:cNvSpPr txBox="1"/>
+          <p:nvPr/>
+        </p:nvSpPr>
+        <p:spPr>
+          <a:xfrm>
+            <a:off x="1143000" y="4197096"/>
+            <a:ext cx="5943600" cy="868680"/>
+          </a:xfrm>
+          <a:prstGeom prst="rect">
+            <a:avLst/>
+          </a:prstGeom>
+          <a:noFill/>
+        </p:spPr>
+        <p:txBody>
+          <a:bodyPr wrap="square" anchor="ctr" lIns="0" rIns="0" tIns="0" bIns="0"/>
+          <a:lstStyle/>
+          <a:p>
+            <a:pPr algn="l"/>
+            <a:r>
+              <a:rPr sz="1700" b="0" i="0">
+                <a:solidFill>
+                  <a:srgbClr val="202122"/>
+                </a:solidFill>
+                <a:latin typeface="Calibri"/>
+              </a:rPr>
+              <a:t>Set a selling price for a 25% profit margin.</a:t>
+            </a:r>
+          </a:p>
+        </p:txBody>
+      </p:sp>
+      <p:sp>
+        <p:nvSpPr>
+          <p:cNvPr id="15" name="Oval 14"/>
+          <p:cNvSpPr/>
+          <p:nvPr/>
+        </p:nvSpPr>
+        <p:spPr>
+          <a:xfrm>
+            <a:off x="548640" y="5417820"/>
+            <a:ext cx="384048" cy="384048"/>
+          </a:xfrm>
+          <a:prstGeom prst="ellipse">
+            <a:avLst/>
+          </a:prstGeom>
+          <a:solidFill>
+            <a:srgbClr val="0645AD"/>
+          </a:solidFill>
+          <a:ln>
+            <a:noFill/>
+          </a:ln>
+          <a:effectLst/>
+        </p:spPr>
+        <p:style>
+          <a:lnRef idx="1">
+            <a:schemeClr val="accent1"/>
+          </a:lnRef>
+          <a:fillRef idx="3">
+            <a:schemeClr val="accent1"/>
+          </a:fillRef>
+          <a:effectRef idx="2">
+            <a:schemeClr val="accent1"/>
+          </a:effectRef>
+          <a:fontRef idx="minor">
+            <a:schemeClr val="lt1"/>
+          </a:fontRef>
+        </p:style>
+        <p:txBody>
+          <a:bodyPr rtlCol="0" anchor="ctr" lIns="0" rIns="0" tIns="0" bIns="0"/>
+          <a:lstStyle/>
+          <a:p>
+            <a:pPr algn="ctr"/>
+            <a:r>
+              <a:rPr sz="1300" b="1">
+                <a:solidFill>
+                  <a:srgbClr val="FFFFFF"/>
+                </a:solidFill>
+                <a:latin typeface="Calibri"/>
+              </a:rPr>
+              <a:t>4</a:t>
+            </a:r>
+          </a:p>
+        </p:txBody>
+      </p:sp>
+      <p:sp>
+        <p:nvSpPr>
+          <p:cNvPr id="16" name="TextBox 15"/>
+          <p:cNvSpPr txBox="1"/>
+          <p:nvPr/>
+        </p:nvSpPr>
+        <p:spPr>
+          <a:xfrm>
+            <a:off x="1143000" y="5175504"/>
+            <a:ext cx="5943600" cy="868680"/>
+          </a:xfrm>
+          <a:prstGeom prst="rect">
+            <a:avLst/>
+          </a:prstGeom>
+          <a:noFill/>
+        </p:spPr>
+        <p:txBody>
+          <a:bodyPr wrap="square" anchor="ctr" lIns="0" rIns="0" tIns="0" bIns="0"/>
+          <a:lstStyle/>
+          <a:p>
+            <a:pPr algn="l"/>
+            <a:r>
+              <a:rPr sz="1700" b="0" i="0">
+                <a:solidFill>
+                  <a:srgbClr val="202122"/>
+                </a:solidFill>
+                <a:latin typeface="Calibri"/>
+              </a:rPr>
+              <a:t>Identify one constraint and how to overcome it.</a:t>
+            </a:r>
+          </a:p>
+        </p:txBody>
+      </p:sp>
+      <p:sp>
+        <p:nvSpPr>
+          <p:cNvPr id="17" name="Rounded Rectangle 16"/>
+          <p:cNvSpPr/>
+          <p:nvPr/>
+        </p:nvSpPr>
+        <p:spPr>
+          <a:xfrm>
+            <a:off x="7772400" y="1508760"/>
+            <a:ext cx="3867912" cy="4572000"/>
+          </a:xfrm>
+          <a:prstGeom prst="roundRect">
+            <a:avLst>
+              <a:gd name="adj" fmla="val 8000"/>
+            </a:avLst>
+          </a:prstGeom>
+          <a:solidFill>
+            <a:srgbClr val="EAF3FF"/>
+          </a:solidFill>
+          <a:ln>
+            <a:noFill/>
+          </a:ln>
+          <a:effectLst/>
+        </p:spPr>
+        <p:style>
+          <a:lnRef idx="1">
+            <a:schemeClr val="accent1"/>
+          </a:lnRef>
+          <a:fillRef idx="3">
+            <a:schemeClr val="accent1"/>
+          </a:fillRef>
+          <a:effectRef idx="2">
+            <a:schemeClr val="accent1"/>
+          </a:effectRef>
+          <a:fontRef idx="minor">
+            <a:schemeClr val="lt1"/>
+          </a:fontRef>
+        </p:style>
+        <p:txBody>
+          <a:bodyPr rtlCol="0" anchor="ctr"/>
+          <a:lstStyle/>
+          <a:p/>
+        </p:txBody>
+      </p:sp>
+      <p:sp>
+        <p:nvSpPr>
+          <p:cNvPr id="18" name="TextBox 17"/>
+          <p:cNvSpPr txBox="1"/>
+          <p:nvPr/>
+        </p:nvSpPr>
+        <p:spPr>
+          <a:xfrm>
+            <a:off x="8046720" y="1737360"/>
+            <a:ext cx="3291840" cy="365760"/>
+          </a:xfrm>
+          <a:prstGeom prst="rect">
+            <a:avLst/>
+          </a:prstGeom>
+          <a:noFill/>
+        </p:spPr>
+        <p:txBody>
+          <a:bodyPr wrap="square" anchor="t" lIns="0" rIns="0" tIns="0" bIns="0"/>
+          <a:lstStyle/>
+          <a:p>
+            <a:pPr algn="l"/>
+            <a:r>
+              <a:rPr sz="1300" b="1" i="0">
+                <a:solidFill>
+                  <a:srgbClr val="0645AD"/>
+                </a:solidFill>
+                <a:latin typeface="Calibri"/>
+              </a:rPr>
+              <a:t>SUCCESS CRITERIA</a:t>
+            </a:r>
+          </a:p>
+        </p:txBody>
+      </p:sp>
+      <p:sp>
+        <p:nvSpPr>
+          <p:cNvPr id="19" name="TextBox 18"/>
+          <p:cNvSpPr txBox="1"/>
+          <p:nvPr/>
+        </p:nvSpPr>
+        <p:spPr>
+          <a:xfrm>
+            <a:off x="8046720" y="2240280"/>
+            <a:ext cx="3337560" cy="3657600"/>
+          </a:xfrm>
+          <a:prstGeom prst="rect">
+            <a:avLst/>
+          </a:prstGeom>
+          <a:noFill/>
+        </p:spPr>
+        <p:txBody>
+          <a:bodyPr wrap="square" lIns="0" rIns="0" tIns="0" bIns="0">
+            <a:spAutoFit/>
+          </a:bodyPr>
+          <a:lstStyle/>
+          <a:p>
+            <a:pPr marL="274320" indent="-274320">
+              <a:spcAft>
+                <a:spcPts val="810"/>
+              </a:spcAft>
+              <a:buClr>
+                <a:srgbClr val="0645AD"/>
+              </a:buClr>
+              <a:buFont typeface="Arial"/>
+              <a:buChar char="•"/>
+            </a:pPr>
+            <a:r>
+              <a:rPr sz="1800" b="0">
+                <a:solidFill>
+                  <a:srgbClr val="202122"/>
+                </a:solidFill>
+                <a:latin typeface="Calibri"/>
+              </a:rPr>
+              <a:t>All three cost elements included</a:t>
+            </a:r>
+          </a:p>
+          <a:p>
+            <a:pPr marL="274320" indent="-274320">
+              <a:spcAft>
+                <a:spcPts val="810"/>
+              </a:spcAft>
+              <a:buClr>
+                <a:srgbClr val="0645AD"/>
+              </a:buClr>
+              <a:buFont typeface="Arial"/>
+              <a:buChar char="•"/>
+            </a:pPr>
+            <a:r>
+              <a:rPr sz="1800" b="0">
+                <a:solidFill>
+                  <a:srgbClr val="202122"/>
+                </a:solidFill>
+                <a:latin typeface="Calibri"/>
+              </a:rPr>
+              <a:t>Price calculation correct</a:t>
+            </a:r>
+          </a:p>
+          <a:p>
+            <a:pPr marL="274320" indent="-274320">
+              <a:spcAft>
+                <a:spcPts val="810"/>
+              </a:spcAft>
+              <a:buClr>
+                <a:srgbClr val="0645AD"/>
+              </a:buClr>
+              <a:buFont typeface="Arial"/>
+              <a:buChar char="•"/>
+            </a:pPr>
+            <a:r>
+              <a:rPr sz="1800" b="0">
+                <a:solidFill>
+                  <a:srgbClr val="202122"/>
+                </a:solidFill>
+                <a:latin typeface="Calibri"/>
+              </a:rPr>
+              <a:t>Constraint solution realistic</a:t>
+            </a:r>
+          </a:p>
+        </p:txBody>
+      </p:sp>
+    </p:spTree>
+  </p:cSld>
+  <p:clrMapOvr>
+    <a:masterClrMapping/>
+  </p:clrMapOvr>
+</p:sld>
+</file>
+
+<file path=ppt/slides/slide13.xml><?xml version="1.0" encoding="utf-8"?>
+<p:sld xmlns:a="http://schemas.openxmlformats.org/drawingml/2006/main" xmlns:p="http://schemas.openxmlformats.org/presentationml/2006/main" xmlns:r="http://schemas.openxmlformats.org/officeDocument/2006/relationships">
+  <p:cSld>
+    <p:bg>
+      <p:bgPr>
+        <a:solidFill>
+          <a:srgbClr val="03306E"/>
+        </a:solidFill>
+        <a:effectLst/>
+      </p:bgPr>
+    </p:bg>
+    <p:spTree>
+      <p:nvGrpSpPr>
+        <p:cNvPr id="1" name=""/>
+        <p:cNvGrpSpPr/>
+        <p:nvPr/>
+      </p:nvGrpSpPr>
+      <p:grpSpPr/>
+      <p:sp>
+        <p:nvSpPr>
+          <p:cNvPr id="2" name="TextBox 1"/>
+          <p:cNvSpPr txBox="1"/>
+          <p:nvPr/>
+        </p:nvSpPr>
+        <p:spPr>
+          <a:xfrm>
+            <a:off x="548640" y="320040"/>
+            <a:ext cx="11094415" cy="274320"/>
+          </a:xfrm>
+          <a:prstGeom prst="rect">
+            <a:avLst/>
+          </a:prstGeom>
+          <a:noFill/>
+        </p:spPr>
+        <p:txBody>
+          <a:bodyPr wrap="square" anchor="t" lIns="0" rIns="0" tIns="0" bIns="0"/>
+          <a:lstStyle/>
+          <a:p>
+            <a:pPr algn="l"/>
+            <a:r>
+              <a:rPr sz="1100" b="1" i="0">
+                <a:solidFill>
+                  <a:srgbClr val="A9C8F0"/>
+                </a:solidFill>
+                <a:latin typeface="Calibri"/>
+              </a:rPr>
+              <a:t>MECHANICAL ENGINEERING  ·  Mechanical: Knowledge criteria</a:t>
+            </a:r>
+          </a:p>
+        </p:txBody>
+      </p:sp>
+      <p:sp>
+        <p:nvSpPr>
+          <p:cNvPr id="3" name="TextBox 2"/>
+          <p:cNvSpPr txBox="1"/>
+          <p:nvPr/>
+        </p:nvSpPr>
+        <p:spPr>
+          <a:xfrm>
+            <a:off x="548640" y="566928"/>
+            <a:ext cx="11094415" cy="822960"/>
+          </a:xfrm>
+          <a:prstGeom prst="rect">
+            <a:avLst/>
+          </a:prstGeom>
+          <a:noFill/>
+        </p:spPr>
+        <p:txBody>
+          <a:bodyPr wrap="square" anchor="ctr" lIns="0" rIns="0" tIns="0" bIns="0"/>
+          <a:lstStyle/>
+          <a:p>
+            <a:pPr algn="l"/>
+            <a:r>
+              <a:rPr sz="3200" b="1" i="0">
+                <a:solidFill>
+                  <a:srgbClr val="FFFFFF"/>
+                </a:solidFill>
+                <a:latin typeface="Cambria"/>
+              </a:rPr>
+              <a:t>Exit ticket</a:t>
+            </a:r>
+          </a:p>
+        </p:txBody>
+      </p:sp>
+      <p:sp>
+        <p:nvSpPr>
+          <p:cNvPr id="4" name="Oval 3"/>
+          <p:cNvSpPr/>
+          <p:nvPr/>
+        </p:nvSpPr>
+        <p:spPr>
+          <a:xfrm>
+            <a:off x="548640" y="1737360"/>
+            <a:ext cx="502920" cy="502920"/>
+          </a:xfrm>
+          <a:prstGeom prst="ellipse">
+            <a:avLst/>
+          </a:prstGeom>
+          <a:solidFill>
+            <a:srgbClr val="E0463A"/>
+          </a:solidFill>
+          <a:ln>
+            <a:noFill/>
+          </a:ln>
+          <a:effectLst/>
+        </p:spPr>
+        <p:style>
+          <a:lnRef idx="1">
+            <a:schemeClr val="accent1"/>
+          </a:lnRef>
+          <a:fillRef idx="3">
+            <a:schemeClr val="accent1"/>
+          </a:fillRef>
+          <a:effectRef idx="2">
+            <a:schemeClr val="accent1"/>
+          </a:effectRef>
+          <a:fontRef idx="minor">
+            <a:schemeClr val="lt1"/>
+          </a:fontRef>
+        </p:style>
+        <p:txBody>
+          <a:bodyPr rtlCol="0" anchor="ctr" lIns="0" rIns="0" tIns="0" bIns="0"/>
+          <a:lstStyle/>
+          <a:p>
+            <a:pPr algn="ctr"/>
+            <a:r>
+              <a:rPr sz="1700" b="1">
+                <a:solidFill>
+                  <a:srgbClr val="FFFFFF"/>
+                </a:solidFill>
+                <a:latin typeface="Calibri"/>
+              </a:rPr>
+              <a:t>1</a:t>
+            </a:r>
+          </a:p>
+        </p:txBody>
+      </p:sp>
+      <p:sp>
+        <p:nvSpPr>
+          <p:cNvPr id="5" name="TextBox 4"/>
+          <p:cNvSpPr txBox="1"/>
+          <p:nvPr/>
+        </p:nvSpPr>
+        <p:spPr>
+          <a:xfrm>
+            <a:off x="1325880" y="1645920"/>
+            <a:ext cx="6583680" cy="822960"/>
+          </a:xfrm>
+          <a:prstGeom prst="rect">
+            <a:avLst/>
+          </a:prstGeom>
+          <a:noFill/>
+        </p:spPr>
+        <p:txBody>
+          <a:bodyPr wrap="square" anchor="ctr" lIns="0" rIns="0" tIns="0" bIns="0"/>
+          <a:lstStyle/>
+          <a:p>
+            <a:pPr algn="l"/>
+            <a:r>
+              <a:rPr sz="2000" b="0" i="0">
+                <a:solidFill>
+                  <a:srgbClr val="FFFFFF"/>
+                </a:solidFill>
+                <a:latin typeface="Calibri"/>
+              </a:rPr>
+              <a:t>Give an example of technology push.</a:t>
+            </a:r>
+          </a:p>
+        </p:txBody>
+      </p:sp>
+      <p:sp>
+        <p:nvSpPr>
+          <p:cNvPr id="6" name="Oval 5"/>
+          <p:cNvSpPr/>
+          <p:nvPr/>
+        </p:nvSpPr>
+        <p:spPr>
+          <a:xfrm>
+            <a:off x="548640" y="2697480"/>
+            <a:ext cx="502920" cy="502920"/>
+          </a:xfrm>
+          <a:prstGeom prst="ellipse">
+            <a:avLst/>
+          </a:prstGeom>
+          <a:solidFill>
+            <a:srgbClr val="E0463A"/>
+          </a:solidFill>
+          <a:ln>
+            <a:noFill/>
+          </a:ln>
+          <a:effectLst/>
+        </p:spPr>
+        <p:style>
+          <a:lnRef idx="1">
+            <a:schemeClr val="accent1"/>
+          </a:lnRef>
+          <a:fillRef idx="3">
+            <a:schemeClr val="accent1"/>
+          </a:fillRef>
+          <a:effectRef idx="2">
+            <a:schemeClr val="accent1"/>
+          </a:effectRef>
+          <a:fontRef idx="minor">
+            <a:schemeClr val="lt1"/>
+          </a:fontRef>
+        </p:style>
+        <p:txBody>
+          <a:bodyPr rtlCol="0" anchor="ctr" lIns="0" rIns="0" tIns="0" bIns="0"/>
+          <a:lstStyle/>
+          <a:p>
+            <a:pPr algn="ctr"/>
+            <a:r>
+              <a:rPr sz="1700" b="1">
+                <a:solidFill>
+                  <a:srgbClr val="FFFFFF"/>
+                </a:solidFill>
+                <a:latin typeface="Calibri"/>
+              </a:rPr>
+              <a:t>2</a:t>
+            </a:r>
+          </a:p>
+        </p:txBody>
+      </p:sp>
+      <p:sp>
+        <p:nvSpPr>
+          <p:cNvPr id="7" name="TextBox 6"/>
+          <p:cNvSpPr txBox="1"/>
+          <p:nvPr/>
+        </p:nvSpPr>
+        <p:spPr>
+          <a:xfrm>
+            <a:off x="1325880" y="2606040"/>
+            <a:ext cx="6583680" cy="822960"/>
+          </a:xfrm>
+          <a:prstGeom prst="rect">
+            <a:avLst/>
+          </a:prstGeom>
+          <a:noFill/>
+        </p:spPr>
+        <p:txBody>
+          <a:bodyPr wrap="square" anchor="ctr" lIns="0" rIns="0" tIns="0" bIns="0"/>
+          <a:lstStyle/>
+          <a:p>
+            <a:pPr algn="l"/>
+            <a:r>
+              <a:rPr sz="2000" b="0" i="0">
+                <a:solidFill>
+                  <a:srgbClr val="FFFFFF"/>
+                </a:solidFill>
+                <a:latin typeface="Calibri"/>
+              </a:rPr>
+              <a:t>Why might a company accept a lower profit?</a:t>
+            </a:r>
+          </a:p>
+        </p:txBody>
+      </p:sp>
+      <p:sp>
+        <p:nvSpPr>
+          <p:cNvPr id="8" name="Oval 7"/>
+          <p:cNvSpPr/>
+          <p:nvPr/>
+        </p:nvSpPr>
+        <p:spPr>
+          <a:xfrm>
+            <a:off x="548640" y="3657600"/>
+            <a:ext cx="502920" cy="502920"/>
+          </a:xfrm>
+          <a:prstGeom prst="ellipse">
+            <a:avLst/>
+          </a:prstGeom>
+          <a:solidFill>
+            <a:srgbClr val="E0463A"/>
+          </a:solidFill>
+          <a:ln>
+            <a:noFill/>
+          </a:ln>
+          <a:effectLst/>
+        </p:spPr>
+        <p:style>
+          <a:lnRef idx="1">
+            <a:schemeClr val="accent1"/>
+          </a:lnRef>
+          <a:fillRef idx="3">
+            <a:schemeClr val="accent1"/>
+          </a:fillRef>
+          <a:effectRef idx="2">
+            <a:schemeClr val="accent1"/>
+          </a:effectRef>
+          <a:fontRef idx="minor">
+            <a:schemeClr val="lt1"/>
+          </a:fontRef>
+        </p:style>
+        <p:txBody>
+          <a:bodyPr rtlCol="0" anchor="ctr" lIns="0" rIns="0" tIns="0" bIns="0"/>
+          <a:lstStyle/>
+          <a:p>
+            <a:pPr algn="ctr"/>
+            <a:r>
+              <a:rPr sz="1700" b="1">
+                <a:solidFill>
+                  <a:srgbClr val="FFFFFF"/>
+                </a:solidFill>
+                <a:latin typeface="Calibri"/>
+              </a:rPr>
+              <a:t>3</a:t>
+            </a:r>
+          </a:p>
+        </p:txBody>
+      </p:sp>
+      <p:sp>
+        <p:nvSpPr>
+          <p:cNvPr id="9" name="TextBox 8"/>
+          <p:cNvSpPr txBox="1"/>
+          <p:nvPr/>
+        </p:nvSpPr>
+        <p:spPr>
+          <a:xfrm>
+            <a:off x="1325880" y="3566160"/>
+            <a:ext cx="6583680" cy="822960"/>
+          </a:xfrm>
+          <a:prstGeom prst="rect">
+            <a:avLst/>
+          </a:prstGeom>
+          <a:noFill/>
+        </p:spPr>
+        <p:txBody>
+          <a:bodyPr wrap="square" anchor="ctr" lIns="0" rIns="0" tIns="0" bIns="0"/>
+          <a:lstStyle/>
+          <a:p>
+            <a:pPr algn="l"/>
+            <a:r>
+              <a:rPr sz="2000" b="0" i="0">
+                <a:solidFill>
+                  <a:srgbClr val="FFFFFF"/>
+                </a:solidFill>
+                <a:latin typeface="Calibri"/>
+              </a:rPr>
+              <a:t>How can a constraint be overcome?</a:t>
+            </a:r>
+          </a:p>
+        </p:txBody>
+      </p:sp>
+      <p:sp>
+        <p:nvSpPr>
+          <p:cNvPr id="10" name="Rounded Rectangle 9"/>
+          <p:cNvSpPr/>
+          <p:nvPr/>
+        </p:nvSpPr>
+        <p:spPr>
+          <a:xfrm>
+            <a:off x="8229600" y="1645920"/>
+            <a:ext cx="3410712" cy="2926080"/>
+          </a:xfrm>
+          <a:prstGeom prst="roundRect">
+            <a:avLst>
+              <a:gd name="adj" fmla="val 8000"/>
+            </a:avLst>
+          </a:prstGeom>
+          <a:solidFill>
+            <a:srgbClr val="0645AD"/>
+          </a:solidFill>
+          <a:ln>
+            <a:noFill/>
+          </a:ln>
+          <a:effectLst/>
+        </p:spPr>
+        <p:style>
+          <a:lnRef idx="1">
+            <a:schemeClr val="accent1"/>
+          </a:lnRef>
+          <a:fillRef idx="3">
+            <a:schemeClr val="accent1"/>
+          </a:fillRef>
+          <a:effectRef idx="2">
+            <a:schemeClr val="accent1"/>
+          </a:effectRef>
+          <a:fontRef idx="minor">
+            <a:schemeClr val="lt1"/>
+          </a:fontRef>
+        </p:style>
+        <p:txBody>
+          <a:bodyPr rtlCol="0" anchor="ctr"/>
+          <a:lstStyle/>
+          <a:p/>
+        </p:txBody>
+      </p:sp>
+      <p:sp>
+        <p:nvSpPr>
+          <p:cNvPr id="11" name="TextBox 10"/>
+          <p:cNvSpPr txBox="1"/>
+          <p:nvPr/>
+        </p:nvSpPr>
+        <p:spPr>
+          <a:xfrm>
+            <a:off x="8503920" y="1874519"/>
+            <a:ext cx="2926080" cy="365760"/>
+          </a:xfrm>
+          <a:prstGeom prst="rect">
+            <a:avLst/>
+          </a:prstGeom>
+          <a:noFill/>
+        </p:spPr>
+        <p:txBody>
+          <a:bodyPr wrap="square" anchor="t" lIns="0" rIns="0" tIns="0" bIns="0"/>
+          <a:lstStyle/>
+          <a:p>
+            <a:pPr algn="l"/>
+            <a:r>
+              <a:rPr sz="1300" b="1" i="0">
+                <a:solidFill>
+                  <a:srgbClr val="A9C8F0"/>
+                </a:solidFill>
+                <a:latin typeface="Calibri"/>
+              </a:rPr>
+              <a:t>REVISE THIS TOPIC</a:t>
+            </a:r>
+          </a:p>
+        </p:txBody>
+      </p:sp>
+      <p:sp>
+        <p:nvSpPr>
+          <p:cNvPr id="12" name="TextBox 11"/>
+          <p:cNvSpPr txBox="1"/>
+          <p:nvPr/>
+        </p:nvSpPr>
+        <p:spPr>
+          <a:xfrm>
+            <a:off x="8503920" y="2286000"/>
+            <a:ext cx="2926080" cy="548640"/>
+          </a:xfrm>
+          <a:prstGeom prst="rect">
+            <a:avLst/>
+          </a:prstGeom>
+          <a:noFill/>
+        </p:spPr>
+        <p:txBody>
+          <a:bodyPr wrap="square" anchor="t" lIns="0" rIns="0" tIns="0" bIns="0"/>
+          <a:lstStyle/>
+          <a:p>
+            <a:pPr algn="l"/>
+            <a:r>
+              <a:rPr sz="1400" b="0" i="0">
+                <a:solidFill>
+                  <a:srgbClr val="FFFFFF"/>
+                </a:solidFill>
+                <a:latin typeface="Calibri"/>
+              </a:rPr>
+              <a:t>Revision notes for this lesson are on the study wiki:</a:t>
+            </a:r>
+          </a:p>
+        </p:txBody>
+      </p:sp>
+      <p:sp>
+        <p:nvSpPr>
+          <p:cNvPr id="13" name="TextBox 12"/>
+          <p:cNvSpPr txBox="1"/>
+          <p:nvPr/>
+        </p:nvSpPr>
+        <p:spPr>
+          <a:xfrm>
+            <a:off x="8503920" y="2926080"/>
+            <a:ext cx="2926080" cy="1463040"/>
+          </a:xfrm>
+          <a:prstGeom prst="rect">
+            <a:avLst/>
+          </a:prstGeom>
+          <a:noFill/>
+        </p:spPr>
+        <p:txBody>
+          <a:bodyPr wrap="square" anchor="t" lIns="0" rIns="0" tIns="0" bIns="0"/>
+          <a:lstStyle/>
+          <a:p>
+            <a:pPr algn="l"/>
+            <a:r>
+              <a:rPr sz="2000" b="1" i="0">
+                <a:solidFill>
+                  <a:srgbClr val="FFFFFF"/>
+                </a:solidFill>
+                <a:latin typeface="Cambria"/>
+              </a:rPr>
+              <a:t>Knowledge Criteria</a:t>
+            </a:r>
+          </a:p>
+        </p:txBody>
+      </p:sp>
+      <p:sp>
+        <p:nvSpPr>
+          <p:cNvPr id="14" name="TextBox 13"/>
+          <p:cNvSpPr txBox="1"/>
+          <p:nvPr/>
+        </p:nvSpPr>
+        <p:spPr>
+          <a:xfrm>
+            <a:off x="548640" y="5669280"/>
+            <a:ext cx="11094415" cy="548640"/>
+          </a:xfrm>
+          <a:prstGeom prst="rect">
+            <a:avLst/>
+          </a:prstGeom>
+          <a:noFill/>
+        </p:spPr>
+        <p:txBody>
+          <a:bodyPr wrap="square" anchor="t" lIns="0" rIns="0" tIns="0" bIns="0"/>
+          <a:lstStyle/>
+          <a:p>
+            <a:pPr algn="l"/>
+            <a:r>
+              <a:rPr sz="1200" b="0" i="0">
+                <a:solidFill>
+                  <a:srgbClr val="A9C8F0"/>
+                </a:solidFill>
+                <a:latin typeface="Calibri"/>
+              </a:rPr>
+              <a:t>https://lana6478.github.io/T-level-Design-Development-Engineering-Manufacturing/#/02-occupational-specialism/01-knowledge-criteria.md</a:t>
+            </a:r>
+          </a:p>
+        </p:txBody>
+      </p:sp>
+    </p:spTree>
+  </p:cSld>
+  <p:clrMapOvr>
+    <a:masterClrMapping/>
+  </p:clrMapOvr>
+</p:sld>
+</file>
+
 <file path=ppt/slides/slide2.xml><?xml version="1.0" encoding="utf-8"?>
 <p:sld xmlns:a="http://schemas.openxmlformats.org/drawingml/2006/main" xmlns:p="http://schemas.openxmlformats.org/presentationml/2006/main" xmlns:r="http://schemas.openxmlformats.org/officeDocument/2006/relationships">
   <p:cSld>
@@ -4842,18 +7365,89 @@
       </p:sp>
       <p:sp>
         <p:nvSpPr>
-          <p:cNvPr id="6" name="Rounded Rectangle 5"/>
+          <p:cNvPr id="6" name="TextBox 5"/>
+          <p:cNvSpPr txBox="1"/>
+          <p:nvPr/>
+        </p:nvSpPr>
+        <p:spPr>
+          <a:xfrm>
+            <a:off x="548640" y="1554480"/>
+            <a:ext cx="6720840" cy="4617720"/>
+          </a:xfrm>
+          <a:prstGeom prst="rect">
+            <a:avLst/>
+          </a:prstGeom>
+          <a:noFill/>
+        </p:spPr>
+        <p:txBody>
+          <a:bodyPr wrap="square" lIns="0" rIns="0" tIns="0" bIns="0">
+            <a:spAutoFit/>
+          </a:bodyPr>
+          <a:lstStyle/>
+          <a:p>
+            <a:pPr>
+              <a:spcAft>
+                <a:spcPts val="1320"/>
+              </a:spcAft>
+            </a:pPr>
+            <a:r>
+              <a:rPr sz="2200" b="0">
+                <a:solidFill>
+                  <a:srgbClr val="202122"/>
+                </a:solidFill>
+                <a:latin typeface="Calibri"/>
+              </a:rPr>
+              <a:t>Market pull happens when customers create demand and designers respond to a known need, such as a lighter cordless drill.</a:t>
+            </a:r>
+          </a:p>
+          <a:p>
+            <a:pPr>
+              <a:spcAft>
+                <a:spcPts val="1320"/>
+              </a:spcAft>
+            </a:pPr>
+            <a:r>
+              <a:rPr sz="2200" b="0">
+                <a:solidFill>
+                  <a:srgbClr val="202122"/>
+                </a:solidFill>
+                <a:latin typeface="Calibri"/>
+              </a:rPr>
+              <a:t>Technology push happens when a new technology creates an opportunity and designers find a market for it, such as early 3D printers.</a:t>
+            </a:r>
+          </a:p>
+          <a:p>
+            <a:pPr>
+              <a:spcAft>
+                <a:spcPts val="1320"/>
+              </a:spcAft>
+            </a:pPr>
+            <a:r>
+              <a:rPr sz="2200" b="0">
+                <a:solidFill>
+                  <a:srgbClr val="202122"/>
+                </a:solidFill>
+                <a:latin typeface="Calibri"/>
+              </a:rPr>
+              <a:t>Context also includes commercial advantage, designing for reuse, planned obsolescence and sustainability. Constraints come from commercial factors (competition, profit), operational factors (tools, materials, process capability, skills), legal requirements and design for manufacture.</a:t>
+            </a:r>
+          </a:p>
+        </p:txBody>
+      </p:sp>
+      <p:sp>
+        <p:nvSpPr>
+          <p:cNvPr id="7" name="Rounded Rectangle 6"/>
           <p:cNvSpPr/>
           <p:nvPr/>
         </p:nvSpPr>
         <p:spPr>
           <a:xfrm>
-            <a:off x="548640" y="1600200"/>
-            <a:ext cx="5364327" cy="640080"/>
+            <a:off x="7772400" y="1554480"/>
+            <a:ext cx="3867912" cy="4526280"/>
           </a:xfrm>
           <a:prstGeom prst="roundRect">
             <a:avLst>
-              <a:gd name="adj" fmla="val 15000"/>
+              <a:gd name="adj" fmla="val 8000"/>
             </a:avLst>
           </a:prstGeom>
           <a:solidFill>
@@ -4886,55 +7480,20 @@
       </p:sp>
       <p:sp>
         <p:nvSpPr>
-          <p:cNvPr id="7" name="TextBox 6"/>
-          <p:cNvSpPr txBox="1"/>
-          <p:nvPr/>
-        </p:nvSpPr>
-        <p:spPr>
-          <a:xfrm>
-            <a:off x="777240" y="1600200"/>
-            <a:ext cx="4907127" cy="640080"/>
-          </a:xfrm>
-          <a:prstGeom prst="rect">
-            <a:avLst/>
-          </a:prstGeom>
-          <a:noFill/>
-        </p:spPr>
-        <p:txBody>
-          <a:bodyPr wrap="square" anchor="ctr" lIns="0" rIns="0" tIns="0" bIns="0"/>
-          <a:lstStyle/>
-          <a:p>
-            <a:pPr algn="l"/>
-            <a:r>
-              <a:rPr sz="2000" b="1" i="0">
-                <a:solidFill>
-                  <a:srgbClr val="FFFFFF"/>
-                </a:solidFill>
-                <a:latin typeface="Calibri"/>
-              </a:rPr>
-              <a:t>Market pull</a:t>
-            </a:r>
-          </a:p>
-        </p:txBody>
-      </p:sp>
-      <p:sp>
-        <p:nvSpPr>
-          <p:cNvPr id="8" name="Rounded Rectangle 7"/>
+          <p:cNvPr id="8" name="Oval 7"/>
           <p:cNvSpPr/>
           <p:nvPr/>
         </p:nvSpPr>
         <p:spPr>
           <a:xfrm>
-            <a:off x="548640" y="2377440"/>
-            <a:ext cx="5364327" cy="3794760"/>
-          </a:xfrm>
-          <a:prstGeom prst="roundRect">
-            <a:avLst>
-              <a:gd name="adj" fmla="val 4000"/>
-            </a:avLst>
+            <a:off x="8046720" y="1828800"/>
+            <a:ext cx="548640" cy="548640"/>
+          </a:xfrm>
+          <a:prstGeom prst="ellipse">
+            <a:avLst/>
           </a:prstGeom>
           <a:solidFill>
-            <a:srgbClr val="EAF3FF"/>
+            <a:srgbClr val="E0463A"/>
           </a:solidFill>
           <a:ln>
             <a:noFill/>
@@ -4956,9 +7515,20 @@
           </a:fontRef>
         </p:style>
         <p:txBody>
-          <a:bodyPr rtlCol="0" anchor="ctr"/>
-          <a:lstStyle/>
-          <a:p/>
+          <a:bodyPr rtlCol="0" anchor="ctr" lIns="0" rIns="0" tIns="0" bIns="0"/>
+          <a:lstStyle/>
+          <a:p>
+            <a:pPr algn="ctr"/>
+            <a:r>
+              <a:rPr sz="1300" b="1">
+                <a:solidFill>
+                  <a:srgbClr val="FFFFFF"/>
+                </a:solidFill>
+                <a:latin typeface="Calibri"/>
+              </a:rPr>
+              <a:t>e.g.</a:t>
+            </a:r>
+          </a:p>
         </p:txBody>
       </p:sp>
       <p:sp>
@@ -4969,8 +7539,8 @@
         </p:nvSpPr>
         <p:spPr>
           <a:xfrm>
-            <a:off x="822959" y="2606040"/>
-            <a:ext cx="4815687" cy="3337560"/>
+            <a:off x="8046720" y="2560320"/>
+            <a:ext cx="3291840" cy="365760"/>
           </a:xfrm>
           <a:prstGeom prst="rect">
             <a:avLst/>
@@ -4978,129 +7548,32 @@
           <a:noFill/>
         </p:spPr>
         <p:txBody>
-          <a:bodyPr wrap="square" lIns="0" rIns="0" tIns="0" bIns="0">
-            <a:spAutoFit/>
-          </a:bodyPr>
-          <a:lstStyle/>
-          <a:p>
-            <a:pPr marL="274320" indent="-274320">
-              <a:spcAft>
-                <a:spcPts val="990"/>
-              </a:spcAft>
-              <a:buClr>
-                <a:srgbClr val="0645AD"/>
-              </a:buClr>
-              <a:buFont typeface="Arial"/>
-              <a:buChar char="•"/>
-            </a:pPr>
-            <a:r>
-              <a:rPr sz="2200" b="0">
-                <a:solidFill>
-                  <a:srgbClr val="202122"/>
-                </a:solidFill>
-                <a:latin typeface="Calibri"/>
-              </a:rPr>
-              <a:t>Customers create demand</a:t>
-            </a:r>
-          </a:p>
-          <a:p>
-            <a:pPr marL="274320" indent="-274320">
-              <a:spcAft>
-                <a:spcPts val="990"/>
-              </a:spcAft>
-              <a:buClr>
-                <a:srgbClr val="0645AD"/>
-              </a:buClr>
-              <a:buFont typeface="Arial"/>
-              <a:buChar char="•"/>
-            </a:pPr>
-            <a:r>
-              <a:rPr sz="2200" b="0">
-                <a:solidFill>
-                  <a:srgbClr val="202122"/>
-                </a:solidFill>
-                <a:latin typeface="Calibri"/>
-              </a:rPr>
-              <a:t>Designs respond to a known need</a:t>
-            </a:r>
-          </a:p>
-          <a:p>
-            <a:pPr marL="274320" indent="-274320">
-              <a:spcAft>
-                <a:spcPts val="990"/>
-              </a:spcAft>
-              <a:buClr>
-                <a:srgbClr val="0645AD"/>
-              </a:buClr>
-              <a:buFont typeface="Arial"/>
-              <a:buChar char="•"/>
-            </a:pPr>
-            <a:r>
-              <a:rPr sz="2200" b="0">
-                <a:solidFill>
-                  <a:srgbClr val="202122"/>
-                </a:solidFill>
-                <a:latin typeface="Calibri"/>
-              </a:rPr>
-              <a:t>e.g. a lighter power tool</a:t>
-            </a:r>
-          </a:p>
-        </p:txBody>
-      </p:sp>
-      <p:sp>
-        <p:nvSpPr>
-          <p:cNvPr id="10" name="Rounded Rectangle 9"/>
-          <p:cNvSpPr/>
-          <p:nvPr/>
-        </p:nvSpPr>
-        <p:spPr>
-          <a:xfrm>
-            <a:off x="6278727" y="1600200"/>
-            <a:ext cx="5364327" cy="640080"/>
-          </a:xfrm>
-          <a:prstGeom prst="roundRect">
-            <a:avLst>
-              <a:gd name="adj" fmla="val 15000"/>
-            </a:avLst>
-          </a:prstGeom>
-          <a:solidFill>
-            <a:srgbClr val="0645AD"/>
-          </a:solidFill>
-          <a:ln>
-            <a:noFill/>
-          </a:ln>
-          <a:effectLst/>
-        </p:spPr>
-        <p:style>
-          <a:lnRef idx="1">
-            <a:schemeClr val="accent1"/>
-          </a:lnRef>
-          <a:fillRef idx="3">
-            <a:schemeClr val="accent1"/>
-          </a:fillRef>
-          <a:effectRef idx="2">
-            <a:schemeClr val="accent1"/>
-          </a:effectRef>
-          <a:fontRef idx="minor">
-            <a:schemeClr val="lt1"/>
-          </a:fontRef>
-        </p:style>
-        <p:txBody>
-          <a:bodyPr rtlCol="0" anchor="ctr"/>
-          <a:lstStyle/>
-          <a:p/>
-        </p:txBody>
-      </p:sp>
-      <p:sp>
-        <p:nvSpPr>
-          <p:cNvPr id="11" name="TextBox 10"/>
+          <a:bodyPr wrap="square" anchor="t" lIns="0" rIns="0" tIns="0" bIns="0"/>
+          <a:lstStyle/>
+          <a:p>
+            <a:pPr algn="l"/>
+            <a:r>
+              <a:rPr sz="1300" b="1" i="0">
+                <a:solidFill>
+                  <a:srgbClr val="A9C8F0"/>
+                </a:solidFill>
+                <a:latin typeface="Calibri"/>
+              </a:rPr>
+              <a:t>EXAMPLE</a:t>
+            </a:r>
+          </a:p>
+        </p:txBody>
+      </p:sp>
+      <p:sp>
+        <p:nvSpPr>
+          <p:cNvPr id="10" name="TextBox 9"/>
           <p:cNvSpPr txBox="1"/>
           <p:nvPr/>
         </p:nvSpPr>
         <p:spPr>
           <a:xfrm>
-            <a:off x="6507327" y="1600200"/>
-            <a:ext cx="4907127" cy="640080"/>
+            <a:off x="8046720" y="2971800"/>
+            <a:ext cx="3291840" cy="2971800"/>
           </a:xfrm>
           <a:prstGeom prst="rect">
             <a:avLst/>
@@ -5108,148 +7581,18 @@
           <a:noFill/>
         </p:spPr>
         <p:txBody>
-          <a:bodyPr wrap="square" anchor="ctr" lIns="0" rIns="0" tIns="0" bIns="0"/>
+          <a:bodyPr wrap="square" anchor="t" lIns="0" rIns="0" tIns="0" bIns="0"/>
           <a:lstStyle/>
           <a:p>
             <a:pPr algn="l"/>
             <a:r>
-              <a:rPr sz="2000" b="1" i="0">
+              <a:rPr sz="1900" b="0" i="0">
                 <a:solidFill>
                   <a:srgbClr val="FFFFFF"/>
                 </a:solidFill>
-                <a:latin typeface="Calibri"/>
-              </a:rPr>
-              <a:t>Technology push</a:t>
-            </a:r>
-          </a:p>
-        </p:txBody>
-      </p:sp>
-      <p:sp>
-        <p:nvSpPr>
-          <p:cNvPr id="12" name="Rounded Rectangle 11"/>
-          <p:cNvSpPr/>
-          <p:nvPr/>
-        </p:nvSpPr>
-        <p:spPr>
-          <a:xfrm>
-            <a:off x="6278727" y="2377440"/>
-            <a:ext cx="5364327" cy="3794760"/>
-          </a:xfrm>
-          <a:prstGeom prst="roundRect">
-            <a:avLst>
-              <a:gd name="adj" fmla="val 4000"/>
-            </a:avLst>
-          </a:prstGeom>
-          <a:solidFill>
-            <a:srgbClr val="EAF3FF"/>
-          </a:solidFill>
-          <a:ln>
-            <a:noFill/>
-          </a:ln>
-          <a:effectLst/>
-        </p:spPr>
-        <p:style>
-          <a:lnRef idx="1">
-            <a:schemeClr val="accent1"/>
-          </a:lnRef>
-          <a:fillRef idx="3">
-            <a:schemeClr val="accent1"/>
-          </a:fillRef>
-          <a:effectRef idx="2">
-            <a:schemeClr val="accent1"/>
-          </a:effectRef>
-          <a:fontRef idx="minor">
-            <a:schemeClr val="lt1"/>
-          </a:fontRef>
-        </p:style>
-        <p:txBody>
-          <a:bodyPr rtlCol="0" anchor="ctr"/>
-          <a:lstStyle/>
-          <a:p/>
-        </p:txBody>
-      </p:sp>
-      <p:sp>
-        <p:nvSpPr>
-          <p:cNvPr id="13" name="TextBox 12"/>
-          <p:cNvSpPr txBox="1"/>
-          <p:nvPr/>
-        </p:nvSpPr>
-        <p:spPr>
-          <a:xfrm>
-            <a:off x="6553047" y="2606040"/>
-            <a:ext cx="4815687" cy="3337560"/>
-          </a:xfrm>
-          <a:prstGeom prst="rect">
-            <a:avLst/>
-          </a:prstGeom>
-          <a:noFill/>
-        </p:spPr>
-        <p:txBody>
-          <a:bodyPr wrap="square" lIns="0" rIns="0" tIns="0" bIns="0">
-            <a:spAutoFit/>
-          </a:bodyPr>
-          <a:lstStyle/>
-          <a:p>
-            <a:pPr marL="274320" indent="-274320">
-              <a:spcAft>
-                <a:spcPts val="990"/>
-              </a:spcAft>
-              <a:buClr>
-                <a:srgbClr val="0645AD"/>
-              </a:buClr>
-              <a:buFont typeface="Arial"/>
-              <a:buChar char="•"/>
-            </a:pPr>
-            <a:r>
-              <a:rPr sz="2200" b="0">
-                <a:solidFill>
-                  <a:srgbClr val="202122"/>
-                </a:solidFill>
-                <a:latin typeface="Calibri"/>
-              </a:rPr>
-              <a:t>New technology creates the opportunity</a:t>
-            </a:r>
-          </a:p>
-          <a:p>
-            <a:pPr marL="274320" indent="-274320">
-              <a:spcAft>
-                <a:spcPts val="990"/>
-              </a:spcAft>
-              <a:buClr>
-                <a:srgbClr val="0645AD"/>
-              </a:buClr>
-              <a:buFont typeface="Arial"/>
-              <a:buChar char="•"/>
-            </a:pPr>
-            <a:r>
-              <a:rPr sz="2200" b="0">
-                <a:solidFill>
-                  <a:srgbClr val="202122"/>
-                </a:solidFill>
-                <a:latin typeface="Calibri"/>
-              </a:rPr>
-              <a:t>Designs find a market for it</a:t>
-            </a:r>
-          </a:p>
-          <a:p>
-            <a:pPr marL="274320" indent="-274320">
-              <a:spcAft>
-                <a:spcPts val="990"/>
-              </a:spcAft>
-              <a:buClr>
-                <a:srgbClr val="0645AD"/>
-              </a:buClr>
-              <a:buFont typeface="Arial"/>
-              <a:buChar char="•"/>
-            </a:pPr>
-            <a:r>
-              <a:rPr sz="2200" b="0">
-                <a:solidFill>
-                  <a:srgbClr val="202122"/>
-                </a:solidFill>
-                <a:latin typeface="Calibri"/>
-              </a:rPr>
-              <a:t>e.g. the first 3D printers</a:t>
+                <a:latin typeface="Cambria"/>
+              </a:rPr>
+              <a:t>Customers wanted longer battery life (market pull); lithium-ion technology made it possible (technology push).</a:t>
             </a:r>
           </a:p>
         </p:txBody>
@@ -5341,7 +7684,7 @@
                 </a:solidFill>
                 <a:latin typeface="Cambria"/>
               </a:rPr>
-              <a:t>Constraints</a:t>
+              <a:t>Context</a:t>
             </a:r>
           </a:p>
         </p:txBody>
@@ -5421,11 +7764,88 @@
         <p:spPr>
           <a:xfrm>
             <a:off x="548640" y="1600200"/>
-            <a:ext cx="5410047" cy="2148840"/>
+            <a:ext cx="5364327" cy="640080"/>
           </a:xfrm>
           <a:prstGeom prst="roundRect">
             <a:avLst>
-              <a:gd name="adj" fmla="val 6000"/>
+              <a:gd name="adj" fmla="val 15000"/>
+            </a:avLst>
+          </a:prstGeom>
+          <a:solidFill>
+            <a:srgbClr val="03306E"/>
+          </a:solidFill>
+          <a:ln>
+            <a:noFill/>
+          </a:ln>
+          <a:effectLst/>
+        </p:spPr>
+        <p:style>
+          <a:lnRef idx="1">
+            <a:schemeClr val="accent1"/>
+          </a:lnRef>
+          <a:fillRef idx="3">
+            <a:schemeClr val="accent1"/>
+          </a:fillRef>
+          <a:effectRef idx="2">
+            <a:schemeClr val="accent1"/>
+          </a:effectRef>
+          <a:fontRef idx="minor">
+            <a:schemeClr val="lt1"/>
+          </a:fontRef>
+        </p:style>
+        <p:txBody>
+          <a:bodyPr rtlCol="0" anchor="ctr"/>
+          <a:lstStyle/>
+          <a:p/>
+        </p:txBody>
+      </p:sp>
+      <p:sp>
+        <p:nvSpPr>
+          <p:cNvPr id="7" name="TextBox 6"/>
+          <p:cNvSpPr txBox="1"/>
+          <p:nvPr/>
+        </p:nvSpPr>
+        <p:spPr>
+          <a:xfrm>
+            <a:off x="777240" y="1600200"/>
+            <a:ext cx="4907127" cy="640080"/>
+          </a:xfrm>
+          <a:prstGeom prst="rect">
+            <a:avLst/>
+          </a:prstGeom>
+          <a:noFill/>
+        </p:spPr>
+        <p:txBody>
+          <a:bodyPr wrap="square" anchor="ctr" lIns="0" rIns="0" tIns="0" bIns="0"/>
+          <a:lstStyle/>
+          <a:p>
+            <a:pPr algn="l"/>
+            <a:r>
+              <a:rPr sz="2000" b="1" i="0">
+                <a:solidFill>
+                  <a:srgbClr val="FFFFFF"/>
+                </a:solidFill>
+                <a:latin typeface="Calibri"/>
+              </a:rPr>
+              <a:t>Market pull</a:t>
+            </a:r>
+          </a:p>
+        </p:txBody>
+      </p:sp>
+      <p:sp>
+        <p:nvSpPr>
+          <p:cNvPr id="8" name="Rounded Rectangle 7"/>
+          <p:cNvSpPr/>
+          <p:nvPr/>
+        </p:nvSpPr>
+        <p:spPr>
+          <a:xfrm>
+            <a:off x="548640" y="2377440"/>
+            <a:ext cx="5364327" cy="3794760"/>
+          </a:xfrm>
+          <a:prstGeom prst="roundRect">
+            <a:avLst>
+              <a:gd name="adj" fmla="val 4000"/>
             </a:avLst>
           </a:prstGeom>
           <a:solidFill>
@@ -5458,20 +7878,108 @@
       </p:sp>
       <p:sp>
         <p:nvSpPr>
-          <p:cNvPr id="7" name="Oval 6"/>
+          <p:cNvPr id="9" name="TextBox 8"/>
+          <p:cNvSpPr txBox="1"/>
+          <p:nvPr/>
+        </p:nvSpPr>
+        <p:spPr>
+          <a:xfrm>
+            <a:off x="822959" y="2606040"/>
+            <a:ext cx="4815687" cy="3337560"/>
+          </a:xfrm>
+          <a:prstGeom prst="rect">
+            <a:avLst/>
+          </a:prstGeom>
+          <a:noFill/>
+        </p:spPr>
+        <p:txBody>
+          <a:bodyPr wrap="square" lIns="0" rIns="0" tIns="0" bIns="0">
+            <a:spAutoFit/>
+          </a:bodyPr>
+          <a:lstStyle/>
+          <a:p>
+            <a:pPr marL="274320" indent="-274320">
+              <a:spcAft>
+                <a:spcPts val="990"/>
+              </a:spcAft>
+              <a:buClr>
+                <a:srgbClr val="0645AD"/>
+              </a:buClr>
+              <a:buFont typeface="Arial"/>
+              <a:buChar char="•"/>
+            </a:pPr>
+            <a:r>
+              <a:rPr sz="2200" b="0">
+                <a:solidFill>
+                  <a:srgbClr val="202122"/>
+                </a:solidFill>
+                <a:latin typeface="Calibri"/>
+              </a:rPr>
+              <a:t>Customers create demand</a:t>
+            </a:r>
+          </a:p>
+          <a:p>
+            <a:pPr marL="274320" indent="-274320">
+              <a:spcAft>
+                <a:spcPts val="990"/>
+              </a:spcAft>
+              <a:buClr>
+                <a:srgbClr val="0645AD"/>
+              </a:buClr>
+              <a:buFont typeface="Arial"/>
+              <a:buChar char="•"/>
+            </a:pPr>
+            <a:r>
+              <a:rPr sz="2200" b="0">
+                <a:solidFill>
+                  <a:srgbClr val="202122"/>
+                </a:solidFill>
+                <a:latin typeface="Calibri"/>
+              </a:rPr>
+              <a:t>Designs respond to a known need</a:t>
+            </a:r>
+          </a:p>
+          <a:p>
+            <a:pPr marL="274320" indent="-274320">
+              <a:spcAft>
+                <a:spcPts val="990"/>
+              </a:spcAft>
+              <a:buClr>
+                <a:srgbClr val="0645AD"/>
+              </a:buClr>
+              <a:buFont typeface="Arial"/>
+              <a:buChar char="•"/>
+            </a:pPr>
+            <a:r>
+              <a:rPr sz="2200" b="0">
+                <a:solidFill>
+                  <a:srgbClr val="202122"/>
+                </a:solidFill>
+                <a:latin typeface="Calibri"/>
+              </a:rPr>
+              <a:t>e.g. a lighter power tool</a:t>
+            </a:r>
+          </a:p>
+        </p:txBody>
+      </p:sp>
+      <p:sp>
+        <p:nvSpPr>
+          <p:cNvPr id="10" name="Rounded Rectangle 9"/>
           <p:cNvSpPr/>
           <p:nvPr/>
         </p:nvSpPr>
         <p:spPr>
           <a:xfrm>
-            <a:off x="777240" y="1828800"/>
-            <a:ext cx="457200" cy="457200"/>
-          </a:xfrm>
-          <a:prstGeom prst="ellipse">
-            <a:avLst/>
+            <a:off x="6278727" y="1600200"/>
+            <a:ext cx="5364327" cy="640080"/>
+          </a:xfrm>
+          <a:prstGeom prst="roundRect">
+            <a:avLst>
+              <a:gd name="adj" fmla="val 15000"/>
+            </a:avLst>
           </a:prstGeom>
           <a:solidFill>
-            <a:srgbClr val="E0463A"/>
+            <a:srgbClr val="0645AD"/>
           </a:solidFill>
           <a:ln>
             <a:noFill/>
@@ -5493,102 +8001,58 @@
           </a:fontRef>
         </p:style>
         <p:txBody>
-          <a:bodyPr rtlCol="0" anchor="ctr" lIns="0" rIns="0" tIns="0" bIns="0"/>
-          <a:lstStyle/>
-          <a:p>
-            <a:pPr algn="ctr"/>
-            <a:r>
-              <a:rPr sz="1500" b="1">
+          <a:bodyPr rtlCol="0" anchor="ctr"/>
+          <a:lstStyle/>
+          <a:p/>
+        </p:txBody>
+      </p:sp>
+      <p:sp>
+        <p:nvSpPr>
+          <p:cNvPr id="11" name="TextBox 10"/>
+          <p:cNvSpPr txBox="1"/>
+          <p:nvPr/>
+        </p:nvSpPr>
+        <p:spPr>
+          <a:xfrm>
+            <a:off x="6507327" y="1600200"/>
+            <a:ext cx="4907127" cy="640080"/>
+          </a:xfrm>
+          <a:prstGeom prst="rect">
+            <a:avLst/>
+          </a:prstGeom>
+          <a:noFill/>
+        </p:spPr>
+        <p:txBody>
+          <a:bodyPr wrap="square" anchor="ctr" lIns="0" rIns="0" tIns="0" bIns="0"/>
+          <a:lstStyle/>
+          <a:p>
+            <a:pPr algn="l"/>
+            <a:r>
+              <a:rPr sz="2000" b="1" i="0">
                 <a:solidFill>
                   <a:srgbClr val="FFFFFF"/>
                 </a:solidFill>
                 <a:latin typeface="Calibri"/>
               </a:rPr>
-              <a:t>1</a:t>
-            </a:r>
-          </a:p>
-        </p:txBody>
-      </p:sp>
-      <p:sp>
-        <p:nvSpPr>
-          <p:cNvPr id="8" name="TextBox 7"/>
-          <p:cNvSpPr txBox="1"/>
-          <p:nvPr/>
-        </p:nvSpPr>
-        <p:spPr>
-          <a:xfrm>
-            <a:off x="1371600" y="1801368"/>
-            <a:ext cx="4404207" cy="512064"/>
-          </a:xfrm>
-          <a:prstGeom prst="rect">
-            <a:avLst/>
-          </a:prstGeom>
-          <a:noFill/>
-        </p:spPr>
-        <p:txBody>
-          <a:bodyPr wrap="square" anchor="ctr" lIns="0" rIns="0" tIns="0" bIns="0"/>
-          <a:lstStyle/>
-          <a:p>
-            <a:pPr algn="l"/>
-            <a:r>
-              <a:rPr sz="1900" b="1" i="0">
-                <a:solidFill>
-                  <a:srgbClr val="03306E"/>
-                </a:solidFill>
-                <a:latin typeface="Calibri"/>
-              </a:rPr>
-              <a:t>Commercial</a:t>
-            </a:r>
-          </a:p>
-        </p:txBody>
-      </p:sp>
-      <p:sp>
-        <p:nvSpPr>
-          <p:cNvPr id="9" name="TextBox 8"/>
-          <p:cNvSpPr txBox="1"/>
-          <p:nvPr/>
-        </p:nvSpPr>
-        <p:spPr>
-          <a:xfrm>
-            <a:off x="777240" y="2468880"/>
-            <a:ext cx="4952847" cy="1143000"/>
-          </a:xfrm>
-          <a:prstGeom prst="rect">
-            <a:avLst/>
-          </a:prstGeom>
-          <a:noFill/>
-        </p:spPr>
-        <p:txBody>
-          <a:bodyPr wrap="square" anchor="t" lIns="0" rIns="0" tIns="0" bIns="0"/>
-          <a:lstStyle/>
-          <a:p>
-            <a:pPr algn="l"/>
-            <a:r>
-              <a:rPr sz="2000" b="0" i="0">
-                <a:solidFill>
-                  <a:srgbClr val="202122"/>
-                </a:solidFill>
-                <a:latin typeface="Calibri"/>
-              </a:rPr>
-              <a:t>Competition and profitability.</a:t>
-            </a:r>
-          </a:p>
-        </p:txBody>
-      </p:sp>
-      <p:sp>
-        <p:nvSpPr>
-          <p:cNvPr id="10" name="Rounded Rectangle 9"/>
+              <a:t>Technology push</a:t>
+            </a:r>
+          </a:p>
+        </p:txBody>
+      </p:sp>
+      <p:sp>
+        <p:nvSpPr>
+          <p:cNvPr id="12" name="Rounded Rectangle 11"/>
           <p:cNvSpPr/>
           <p:nvPr/>
         </p:nvSpPr>
         <p:spPr>
           <a:xfrm>
-            <a:off x="6233007" y="1600200"/>
-            <a:ext cx="5410047" cy="2148840"/>
+            <a:off x="6278727" y="2377440"/>
+            <a:ext cx="5364327" cy="3794760"/>
           </a:xfrm>
           <a:prstGeom prst="roundRect">
             <a:avLst>
-              <a:gd name="adj" fmla="val 6000"/>
+              <a:gd name="adj" fmla="val 4000"/>
             </a:avLst>
           </a:prstGeom>
           <a:solidFill>
@@ -5621,100 +8085,14 @@
       </p:sp>
       <p:sp>
         <p:nvSpPr>
-          <p:cNvPr id="11" name="Oval 10"/>
-          <p:cNvSpPr/>
-          <p:nvPr/>
-        </p:nvSpPr>
-        <p:spPr>
-          <a:xfrm>
-            <a:off x="6461607" y="1828800"/>
-            <a:ext cx="457200" cy="457200"/>
-          </a:xfrm>
-          <a:prstGeom prst="ellipse">
-            <a:avLst/>
-          </a:prstGeom>
-          <a:solidFill>
-            <a:srgbClr val="E0463A"/>
-          </a:solidFill>
-          <a:ln>
-            <a:noFill/>
-          </a:ln>
-          <a:effectLst/>
-        </p:spPr>
-        <p:style>
-          <a:lnRef idx="1">
-            <a:schemeClr val="accent1"/>
-          </a:lnRef>
-          <a:fillRef idx="3">
-            <a:schemeClr val="accent1"/>
-          </a:fillRef>
-          <a:effectRef idx="2">
-            <a:schemeClr val="accent1"/>
-          </a:effectRef>
-          <a:fontRef idx="minor">
-            <a:schemeClr val="lt1"/>
-          </a:fontRef>
-        </p:style>
-        <p:txBody>
-          <a:bodyPr rtlCol="0" anchor="ctr" lIns="0" rIns="0" tIns="0" bIns="0"/>
-          <a:lstStyle/>
-          <a:p>
-            <a:pPr algn="ctr"/>
-            <a:r>
-              <a:rPr sz="1500" b="1">
-                <a:solidFill>
-                  <a:srgbClr val="FFFFFF"/>
-                </a:solidFill>
-                <a:latin typeface="Calibri"/>
-              </a:rPr>
-              <a:t>2</a:t>
-            </a:r>
-          </a:p>
-        </p:txBody>
-      </p:sp>
-      <p:sp>
-        <p:nvSpPr>
-          <p:cNvPr id="12" name="TextBox 11"/>
-          <p:cNvSpPr txBox="1"/>
-          <p:nvPr/>
-        </p:nvSpPr>
-        <p:spPr>
-          <a:xfrm>
-            <a:off x="7055967" y="1801368"/>
-            <a:ext cx="4404207" cy="512064"/>
-          </a:xfrm>
-          <a:prstGeom prst="rect">
-            <a:avLst/>
-          </a:prstGeom>
-          <a:noFill/>
-        </p:spPr>
-        <p:txBody>
-          <a:bodyPr wrap="square" anchor="ctr" lIns="0" rIns="0" tIns="0" bIns="0"/>
-          <a:lstStyle/>
-          <a:p>
-            <a:pPr algn="l"/>
-            <a:r>
-              <a:rPr sz="1900" b="1" i="0">
-                <a:solidFill>
-                  <a:srgbClr val="03306E"/>
-                </a:solidFill>
-                <a:latin typeface="Calibri"/>
-              </a:rPr>
-              <a:t>Operational</a:t>
-            </a:r>
-          </a:p>
-        </p:txBody>
-      </p:sp>
-      <p:sp>
-        <p:nvSpPr>
           <p:cNvPr id="13" name="TextBox 12"/>
           <p:cNvSpPr txBox="1"/>
           <p:nvPr/>
         </p:nvSpPr>
         <p:spPr>
           <a:xfrm>
-            <a:off x="6461607" y="2468880"/>
-            <a:ext cx="4952847" cy="1143000"/>
+            <a:off x="6553047" y="2606040"/>
+            <a:ext cx="4815687" cy="3337560"/>
           </a:xfrm>
           <a:prstGeom prst="rect">
             <a:avLst/>
@@ -5722,344 +8100,71 @@
           <a:noFill/>
         </p:spPr>
         <p:txBody>
-          <a:bodyPr wrap="square" anchor="t" lIns="0" rIns="0" tIns="0" bIns="0"/>
-          <a:lstStyle/>
-          <a:p>
-            <a:pPr algn="l"/>
-            <a:r>
-              <a:rPr sz="2000" b="0" i="0">
+          <a:bodyPr wrap="square" lIns="0" rIns="0" tIns="0" bIns="0">
+            <a:spAutoFit/>
+          </a:bodyPr>
+          <a:lstStyle/>
+          <a:p>
+            <a:pPr marL="274320" indent="-274320">
+              <a:spcAft>
+                <a:spcPts val="990"/>
+              </a:spcAft>
+              <a:buClr>
+                <a:srgbClr val="0645AD"/>
+              </a:buClr>
+              <a:buFont typeface="Arial"/>
+              <a:buChar char="•"/>
+            </a:pPr>
+            <a:r>
+              <a:rPr sz="2200" b="0">
                 <a:solidFill>
                   <a:srgbClr val="202122"/>
                 </a:solidFill>
                 <a:latin typeface="Calibri"/>
               </a:rPr>
-              <a:t>Tools, equipment, materials, process capability, people and training.</a:t>
-            </a:r>
-          </a:p>
-        </p:txBody>
-      </p:sp>
-      <p:sp>
-        <p:nvSpPr>
-          <p:cNvPr id="14" name="Rounded Rectangle 13"/>
-          <p:cNvSpPr/>
-          <p:nvPr/>
-        </p:nvSpPr>
-        <p:spPr>
-          <a:xfrm>
-            <a:off x="548640" y="4023360"/>
-            <a:ext cx="5410047" cy="2148840"/>
-          </a:xfrm>
-          <a:prstGeom prst="roundRect">
-            <a:avLst>
-              <a:gd name="adj" fmla="val 6000"/>
-            </a:avLst>
-          </a:prstGeom>
-          <a:solidFill>
-            <a:srgbClr val="EAF3FF"/>
-          </a:solidFill>
-          <a:ln>
-            <a:noFill/>
-          </a:ln>
-          <a:effectLst/>
-        </p:spPr>
-        <p:style>
-          <a:lnRef idx="1">
-            <a:schemeClr val="accent1"/>
-          </a:lnRef>
-          <a:fillRef idx="3">
-            <a:schemeClr val="accent1"/>
-          </a:fillRef>
-          <a:effectRef idx="2">
-            <a:schemeClr val="accent1"/>
-          </a:effectRef>
-          <a:fontRef idx="minor">
-            <a:schemeClr val="lt1"/>
-          </a:fontRef>
-        </p:style>
-        <p:txBody>
-          <a:bodyPr rtlCol="0" anchor="ctr"/>
-          <a:lstStyle/>
-          <a:p/>
-        </p:txBody>
-      </p:sp>
-      <p:sp>
-        <p:nvSpPr>
-          <p:cNvPr id="15" name="Oval 14"/>
-          <p:cNvSpPr/>
-          <p:nvPr/>
-        </p:nvSpPr>
-        <p:spPr>
-          <a:xfrm>
-            <a:off x="777240" y="4251960"/>
-            <a:ext cx="457200" cy="457200"/>
-          </a:xfrm>
-          <a:prstGeom prst="ellipse">
-            <a:avLst/>
-          </a:prstGeom>
-          <a:solidFill>
-            <a:srgbClr val="E0463A"/>
-          </a:solidFill>
-          <a:ln>
-            <a:noFill/>
-          </a:ln>
-          <a:effectLst/>
-        </p:spPr>
-        <p:style>
-          <a:lnRef idx="1">
-            <a:schemeClr val="accent1"/>
-          </a:lnRef>
-          <a:fillRef idx="3">
-            <a:schemeClr val="accent1"/>
-          </a:fillRef>
-          <a:effectRef idx="2">
-            <a:schemeClr val="accent1"/>
-          </a:effectRef>
-          <a:fontRef idx="minor">
-            <a:schemeClr val="lt1"/>
-          </a:fontRef>
-        </p:style>
-        <p:txBody>
-          <a:bodyPr rtlCol="0" anchor="ctr" lIns="0" rIns="0" tIns="0" bIns="0"/>
-          <a:lstStyle/>
-          <a:p>
-            <a:pPr algn="ctr"/>
-            <a:r>
-              <a:rPr sz="1500" b="1">
-                <a:solidFill>
-                  <a:srgbClr val="FFFFFF"/>
-                </a:solidFill>
-                <a:latin typeface="Calibri"/>
-              </a:rPr>
-              <a:t>3</a:t>
-            </a:r>
-          </a:p>
-        </p:txBody>
-      </p:sp>
-      <p:sp>
-        <p:nvSpPr>
-          <p:cNvPr id="16" name="TextBox 15"/>
-          <p:cNvSpPr txBox="1"/>
-          <p:nvPr/>
-        </p:nvSpPr>
-        <p:spPr>
-          <a:xfrm>
-            <a:off x="1371600" y="4224528"/>
-            <a:ext cx="4404207" cy="512064"/>
-          </a:xfrm>
-          <a:prstGeom prst="rect">
-            <a:avLst/>
-          </a:prstGeom>
-          <a:noFill/>
-        </p:spPr>
-        <p:txBody>
-          <a:bodyPr wrap="square" anchor="ctr" lIns="0" rIns="0" tIns="0" bIns="0"/>
-          <a:lstStyle/>
-          <a:p>
-            <a:pPr algn="l"/>
-            <a:r>
-              <a:rPr sz="1900" b="1" i="0">
-                <a:solidFill>
-                  <a:srgbClr val="03306E"/>
-                </a:solidFill>
-                <a:latin typeface="Calibri"/>
-              </a:rPr>
-              <a:t>Legal</a:t>
-            </a:r>
-          </a:p>
-        </p:txBody>
-      </p:sp>
-      <p:sp>
-        <p:nvSpPr>
-          <p:cNvPr id="17" name="TextBox 16"/>
-          <p:cNvSpPr txBox="1"/>
-          <p:nvPr/>
-        </p:nvSpPr>
-        <p:spPr>
-          <a:xfrm>
-            <a:off x="777240" y="4892040"/>
-            <a:ext cx="4952847" cy="1143000"/>
-          </a:xfrm>
-          <a:prstGeom prst="rect">
-            <a:avLst/>
-          </a:prstGeom>
-          <a:noFill/>
-        </p:spPr>
-        <p:txBody>
-          <a:bodyPr wrap="square" anchor="t" lIns="0" rIns="0" tIns="0" bIns="0"/>
-          <a:lstStyle/>
-          <a:p>
-            <a:pPr algn="l"/>
-            <a:r>
-              <a:rPr sz="2000" b="0" i="0">
+              <a:t>New technology creates the opportunity</a:t>
+            </a:r>
+          </a:p>
+          <a:p>
+            <a:pPr marL="274320" indent="-274320">
+              <a:spcAft>
+                <a:spcPts val="990"/>
+              </a:spcAft>
+              <a:buClr>
+                <a:srgbClr val="0645AD"/>
+              </a:buClr>
+              <a:buFont typeface="Arial"/>
+              <a:buChar char="•"/>
+            </a:pPr>
+            <a:r>
+              <a:rPr sz="2200" b="0">
                 <a:solidFill>
                   <a:srgbClr val="202122"/>
                 </a:solidFill>
                 <a:latin typeface="Calibri"/>
               </a:rPr>
-              <a:t>Regulations and confidentiality.</a:t>
-            </a:r>
-          </a:p>
-        </p:txBody>
-      </p:sp>
-      <p:sp>
-        <p:nvSpPr>
-          <p:cNvPr id="18" name="Rounded Rectangle 17"/>
-          <p:cNvSpPr/>
-          <p:nvPr/>
-        </p:nvSpPr>
-        <p:spPr>
-          <a:xfrm>
-            <a:off x="6233007" y="4023360"/>
-            <a:ext cx="5410047" cy="2148840"/>
-          </a:xfrm>
-          <a:prstGeom prst="roundRect">
-            <a:avLst>
-              <a:gd name="adj" fmla="val 6000"/>
-            </a:avLst>
-          </a:prstGeom>
-          <a:solidFill>
-            <a:srgbClr val="EAF3FF"/>
-          </a:solidFill>
-          <a:ln>
-            <a:noFill/>
-          </a:ln>
-          <a:effectLst/>
-        </p:spPr>
-        <p:style>
-          <a:lnRef idx="1">
-            <a:schemeClr val="accent1"/>
-          </a:lnRef>
-          <a:fillRef idx="3">
-            <a:schemeClr val="accent1"/>
-          </a:fillRef>
-          <a:effectRef idx="2">
-            <a:schemeClr val="accent1"/>
-          </a:effectRef>
-          <a:fontRef idx="minor">
-            <a:schemeClr val="lt1"/>
-          </a:fontRef>
-        </p:style>
-        <p:txBody>
-          <a:bodyPr rtlCol="0" anchor="ctr"/>
-          <a:lstStyle/>
-          <a:p/>
-        </p:txBody>
-      </p:sp>
-      <p:sp>
-        <p:nvSpPr>
-          <p:cNvPr id="19" name="Oval 18"/>
-          <p:cNvSpPr/>
-          <p:nvPr/>
-        </p:nvSpPr>
-        <p:spPr>
-          <a:xfrm>
-            <a:off x="6461607" y="4251960"/>
-            <a:ext cx="457200" cy="457200"/>
-          </a:xfrm>
-          <a:prstGeom prst="ellipse">
-            <a:avLst/>
-          </a:prstGeom>
-          <a:solidFill>
-            <a:srgbClr val="E0463A"/>
-          </a:solidFill>
-          <a:ln>
-            <a:noFill/>
-          </a:ln>
-          <a:effectLst/>
-        </p:spPr>
-        <p:style>
-          <a:lnRef idx="1">
-            <a:schemeClr val="accent1"/>
-          </a:lnRef>
-          <a:fillRef idx="3">
-            <a:schemeClr val="accent1"/>
-          </a:fillRef>
-          <a:effectRef idx="2">
-            <a:schemeClr val="accent1"/>
-          </a:effectRef>
-          <a:fontRef idx="minor">
-            <a:schemeClr val="lt1"/>
-          </a:fontRef>
-        </p:style>
-        <p:txBody>
-          <a:bodyPr rtlCol="0" anchor="ctr" lIns="0" rIns="0" tIns="0" bIns="0"/>
-          <a:lstStyle/>
-          <a:p>
-            <a:pPr algn="ctr"/>
-            <a:r>
-              <a:rPr sz="1500" b="1">
-                <a:solidFill>
-                  <a:srgbClr val="FFFFFF"/>
-                </a:solidFill>
-                <a:latin typeface="Calibri"/>
-              </a:rPr>
-              <a:t>4</a:t>
-            </a:r>
-          </a:p>
-        </p:txBody>
-      </p:sp>
-      <p:sp>
-        <p:nvSpPr>
-          <p:cNvPr id="20" name="TextBox 19"/>
-          <p:cNvSpPr txBox="1"/>
-          <p:nvPr/>
-        </p:nvSpPr>
-        <p:spPr>
-          <a:xfrm>
-            <a:off x="7055967" y="4224528"/>
-            <a:ext cx="4404207" cy="512064"/>
-          </a:xfrm>
-          <a:prstGeom prst="rect">
-            <a:avLst/>
-          </a:prstGeom>
-          <a:noFill/>
-        </p:spPr>
-        <p:txBody>
-          <a:bodyPr wrap="square" anchor="ctr" lIns="0" rIns="0" tIns="0" bIns="0"/>
-          <a:lstStyle/>
-          <a:p>
-            <a:pPr algn="l"/>
-            <a:r>
-              <a:rPr sz="1900" b="1" i="0">
-                <a:solidFill>
-                  <a:srgbClr val="03306E"/>
-                </a:solidFill>
-                <a:latin typeface="Calibri"/>
-              </a:rPr>
-              <a:t>Manufacture</a:t>
-            </a:r>
-          </a:p>
-        </p:txBody>
-      </p:sp>
-      <p:sp>
-        <p:nvSpPr>
-          <p:cNvPr id="21" name="TextBox 20"/>
-          <p:cNvSpPr txBox="1"/>
-          <p:nvPr/>
-        </p:nvSpPr>
-        <p:spPr>
-          <a:xfrm>
-            <a:off x="6461607" y="4892040"/>
-            <a:ext cx="4952847" cy="1143000"/>
-          </a:xfrm>
-          <a:prstGeom prst="rect">
-            <a:avLst/>
-          </a:prstGeom>
-          <a:noFill/>
-        </p:spPr>
-        <p:txBody>
-          <a:bodyPr wrap="square" anchor="t" lIns="0" rIns="0" tIns="0" bIns="0"/>
-          <a:lstStyle/>
-          <a:p>
-            <a:pPr algn="l"/>
-            <a:r>
-              <a:rPr sz="2000" b="0" i="0">
+              <a:t>Designs find a market for it</a:t>
+            </a:r>
+          </a:p>
+          <a:p>
+            <a:pPr marL="274320" indent="-274320">
+              <a:spcAft>
+                <a:spcPts val="990"/>
+              </a:spcAft>
+              <a:buClr>
+                <a:srgbClr val="0645AD"/>
+              </a:buClr>
+              <a:buFont typeface="Arial"/>
+              <a:buChar char="•"/>
+            </a:pPr>
+            <a:r>
+              <a:rPr sz="2200" b="0">
                 <a:solidFill>
                   <a:srgbClr val="202122"/>
                 </a:solidFill>
                 <a:latin typeface="Calibri"/>
               </a:rPr>
-              <a:t>Design for manufacture.</a:t>
+              <a:t>e.g. the first 3D printers</a:t>
             </a:r>
           </a:p>
         </p:txBody>
@@ -6151,7 +8256,7 @@
                 </a:solidFill>
                 <a:latin typeface="Cambria"/>
               </a:rPr>
-              <a:t>Cost and profit</a:t>
+              <a:t>Quick check: Context</a:t>
             </a:r>
           </a:p>
         </p:txBody>
@@ -6218,6 +8323,1673 @@
                 <a:latin typeface="Calibri"/>
               </a:rPr>
               <a:t>5</a:t>
+            </a:r>
+          </a:p>
+        </p:txBody>
+      </p:sp>
+      <p:sp>
+        <p:nvSpPr>
+          <p:cNvPr id="6" name="Oval 5"/>
+          <p:cNvSpPr/>
+          <p:nvPr/>
+        </p:nvSpPr>
+        <p:spPr>
+          <a:xfrm>
+            <a:off x="548640" y="1691640"/>
+            <a:ext cx="502920" cy="502920"/>
+          </a:xfrm>
+          <a:prstGeom prst="ellipse">
+            <a:avLst/>
+          </a:prstGeom>
+          <a:solidFill>
+            <a:srgbClr val="E0463A"/>
+          </a:solidFill>
+          <a:ln>
+            <a:noFill/>
+          </a:ln>
+          <a:effectLst/>
+        </p:spPr>
+        <p:style>
+          <a:lnRef idx="1">
+            <a:schemeClr val="accent1"/>
+          </a:lnRef>
+          <a:fillRef idx="3">
+            <a:schemeClr val="accent1"/>
+          </a:fillRef>
+          <a:effectRef idx="2">
+            <a:schemeClr val="accent1"/>
+          </a:effectRef>
+          <a:fontRef idx="minor">
+            <a:schemeClr val="lt1"/>
+          </a:fontRef>
+        </p:style>
+        <p:txBody>
+          <a:bodyPr rtlCol="0" anchor="ctr" lIns="0" rIns="0" tIns="0" bIns="0"/>
+          <a:lstStyle/>
+          <a:p>
+            <a:pPr algn="ctr"/>
+            <a:r>
+              <a:rPr sz="1600" b="1">
+                <a:solidFill>
+                  <a:srgbClr val="FFFFFF"/>
+                </a:solidFill>
+                <a:latin typeface="Calibri"/>
+              </a:rPr>
+              <a:t>1</a:t>
+            </a:r>
+          </a:p>
+        </p:txBody>
+      </p:sp>
+      <p:sp>
+        <p:nvSpPr>
+          <p:cNvPr id="7" name="TextBox 6"/>
+          <p:cNvSpPr txBox="1"/>
+          <p:nvPr/>
+        </p:nvSpPr>
+        <p:spPr>
+          <a:xfrm>
+            <a:off x="1371600" y="1645920"/>
+            <a:ext cx="10271455" cy="1188720"/>
+          </a:xfrm>
+          <a:prstGeom prst="rect">
+            <a:avLst/>
+          </a:prstGeom>
+          <a:noFill/>
+        </p:spPr>
+        <p:txBody>
+          <a:bodyPr wrap="square" anchor="t" lIns="0" rIns="0" tIns="0" bIns="0"/>
+          <a:lstStyle/>
+          <a:p>
+            <a:pPr algn="l"/>
+            <a:r>
+              <a:rPr sz="2400" b="0" i="0">
+                <a:solidFill>
+                  <a:srgbClr val="202122"/>
+                </a:solidFill>
+                <a:latin typeface="Calibri"/>
+              </a:rPr>
+              <a:t>What is market pull?</a:t>
+            </a:r>
+          </a:p>
+        </p:txBody>
+      </p:sp>
+      <p:sp>
+        <p:nvSpPr>
+          <p:cNvPr id="8" name="Oval 7"/>
+          <p:cNvSpPr/>
+          <p:nvPr/>
+        </p:nvSpPr>
+        <p:spPr>
+          <a:xfrm>
+            <a:off x="548640" y="3108960"/>
+            <a:ext cx="502920" cy="502920"/>
+          </a:xfrm>
+          <a:prstGeom prst="ellipse">
+            <a:avLst/>
+          </a:prstGeom>
+          <a:solidFill>
+            <a:srgbClr val="E0463A"/>
+          </a:solidFill>
+          <a:ln>
+            <a:noFill/>
+          </a:ln>
+          <a:effectLst/>
+        </p:spPr>
+        <p:style>
+          <a:lnRef idx="1">
+            <a:schemeClr val="accent1"/>
+          </a:lnRef>
+          <a:fillRef idx="3">
+            <a:schemeClr val="accent1"/>
+          </a:fillRef>
+          <a:effectRef idx="2">
+            <a:schemeClr val="accent1"/>
+          </a:effectRef>
+          <a:fontRef idx="minor">
+            <a:schemeClr val="lt1"/>
+          </a:fontRef>
+        </p:style>
+        <p:txBody>
+          <a:bodyPr rtlCol="0" anchor="ctr" lIns="0" rIns="0" tIns="0" bIns="0"/>
+          <a:lstStyle/>
+          <a:p>
+            <a:pPr algn="ctr"/>
+            <a:r>
+              <a:rPr sz="1600" b="1">
+                <a:solidFill>
+                  <a:srgbClr val="FFFFFF"/>
+                </a:solidFill>
+                <a:latin typeface="Calibri"/>
+              </a:rPr>
+              <a:t>2</a:t>
+            </a:r>
+          </a:p>
+        </p:txBody>
+      </p:sp>
+      <p:sp>
+        <p:nvSpPr>
+          <p:cNvPr id="9" name="TextBox 8"/>
+          <p:cNvSpPr txBox="1"/>
+          <p:nvPr/>
+        </p:nvSpPr>
+        <p:spPr>
+          <a:xfrm>
+            <a:off x="1371600" y="3063240"/>
+            <a:ext cx="10271455" cy="1188720"/>
+          </a:xfrm>
+          <a:prstGeom prst="rect">
+            <a:avLst/>
+          </a:prstGeom>
+          <a:noFill/>
+        </p:spPr>
+        <p:txBody>
+          <a:bodyPr wrap="square" anchor="t" lIns="0" rIns="0" tIns="0" bIns="0"/>
+          <a:lstStyle/>
+          <a:p>
+            <a:pPr algn="l"/>
+            <a:r>
+              <a:rPr sz="2400" b="0" i="0">
+                <a:solidFill>
+                  <a:srgbClr val="202122"/>
+                </a:solidFill>
+                <a:latin typeface="Calibri"/>
+              </a:rPr>
+              <a:t>What is technology push?</a:t>
+            </a:r>
+          </a:p>
+        </p:txBody>
+      </p:sp>
+      <p:sp>
+        <p:nvSpPr>
+          <p:cNvPr id="10" name="Oval 9"/>
+          <p:cNvSpPr/>
+          <p:nvPr/>
+        </p:nvSpPr>
+        <p:spPr>
+          <a:xfrm>
+            <a:off x="548640" y="4526280"/>
+            <a:ext cx="502920" cy="502920"/>
+          </a:xfrm>
+          <a:prstGeom prst="ellipse">
+            <a:avLst/>
+          </a:prstGeom>
+          <a:solidFill>
+            <a:srgbClr val="E0463A"/>
+          </a:solidFill>
+          <a:ln>
+            <a:noFill/>
+          </a:ln>
+          <a:effectLst/>
+        </p:spPr>
+        <p:style>
+          <a:lnRef idx="1">
+            <a:schemeClr val="accent1"/>
+          </a:lnRef>
+          <a:fillRef idx="3">
+            <a:schemeClr val="accent1"/>
+          </a:fillRef>
+          <a:effectRef idx="2">
+            <a:schemeClr val="accent1"/>
+          </a:effectRef>
+          <a:fontRef idx="minor">
+            <a:schemeClr val="lt1"/>
+          </a:fontRef>
+        </p:style>
+        <p:txBody>
+          <a:bodyPr rtlCol="0" anchor="ctr" lIns="0" rIns="0" tIns="0" bIns="0"/>
+          <a:lstStyle/>
+          <a:p>
+            <a:pPr algn="ctr"/>
+            <a:r>
+              <a:rPr sz="1600" b="1">
+                <a:solidFill>
+                  <a:srgbClr val="FFFFFF"/>
+                </a:solidFill>
+                <a:latin typeface="Calibri"/>
+              </a:rPr>
+              <a:t>3</a:t>
+            </a:r>
+          </a:p>
+        </p:txBody>
+      </p:sp>
+      <p:sp>
+        <p:nvSpPr>
+          <p:cNvPr id="11" name="TextBox 10"/>
+          <p:cNvSpPr txBox="1"/>
+          <p:nvPr/>
+        </p:nvSpPr>
+        <p:spPr>
+          <a:xfrm>
+            <a:off x="1371600" y="4480560"/>
+            <a:ext cx="10271455" cy="1188720"/>
+          </a:xfrm>
+          <a:prstGeom prst="rect">
+            <a:avLst/>
+          </a:prstGeom>
+          <a:noFill/>
+        </p:spPr>
+        <p:txBody>
+          <a:bodyPr wrap="square" anchor="t" lIns="0" rIns="0" tIns="0" bIns="0"/>
+          <a:lstStyle/>
+          <a:p>
+            <a:pPr algn="l"/>
+            <a:r>
+              <a:rPr sz="2400" b="0" i="0">
+                <a:solidFill>
+                  <a:srgbClr val="202122"/>
+                </a:solidFill>
+                <a:latin typeface="Calibri"/>
+              </a:rPr>
+              <a:t>Give an operational constraint.</a:t>
+            </a:r>
+          </a:p>
+        </p:txBody>
+      </p:sp>
+      <p:sp>
+        <p:nvSpPr>
+          <p:cNvPr id="12" name="TextBox 11"/>
+          <p:cNvSpPr txBox="1"/>
+          <p:nvPr/>
+        </p:nvSpPr>
+        <p:spPr>
+          <a:xfrm>
+            <a:off x="548640" y="5852160"/>
+            <a:ext cx="11094415" cy="365760"/>
+          </a:xfrm>
+          <a:prstGeom prst="rect">
+            <a:avLst/>
+          </a:prstGeom>
+          <a:noFill/>
+        </p:spPr>
+        <p:txBody>
+          <a:bodyPr wrap="square" anchor="t" lIns="0" rIns="0" tIns="0" bIns="0"/>
+          <a:lstStyle/>
+          <a:p>
+            <a:pPr algn="l"/>
+            <a:r>
+              <a:rPr sz="1300" b="0" i="1">
+                <a:solidFill>
+                  <a:srgbClr val="54595D"/>
+                </a:solidFill>
+                <a:latin typeface="Calibri"/>
+              </a:rPr>
+              <a:t>Answer on mini whiteboards or in your book. Answers are in the speaker notes.</a:t>
+            </a:r>
+          </a:p>
+        </p:txBody>
+      </p:sp>
+    </p:spTree>
+  </p:cSld>
+  <p:clrMapOvr>
+    <a:masterClrMapping/>
+  </p:clrMapOvr>
+</p:sld>
+</file>
+
+<file path=ppt/slides/slide6.xml><?xml version="1.0" encoding="utf-8"?>
+<p:sld xmlns:a="http://schemas.openxmlformats.org/drawingml/2006/main" xmlns:p="http://schemas.openxmlformats.org/presentationml/2006/main" xmlns:r="http://schemas.openxmlformats.org/officeDocument/2006/relationships">
+  <p:cSld>
+    <p:bg>
+      <p:bgPr>
+        <a:solidFill>
+          <a:srgbClr val="FFFFFF"/>
+        </a:solidFill>
+        <a:effectLst/>
+      </p:bgPr>
+    </p:bg>
+    <p:spTree>
+      <p:nvGrpSpPr>
+        <p:cNvPr id="1" name=""/>
+        <p:cNvGrpSpPr/>
+        <p:nvPr/>
+      </p:nvGrpSpPr>
+      <p:grpSpPr/>
+      <p:sp>
+        <p:nvSpPr>
+          <p:cNvPr id="2" name="TextBox 1"/>
+          <p:cNvSpPr txBox="1"/>
+          <p:nvPr/>
+        </p:nvSpPr>
+        <p:spPr>
+          <a:xfrm>
+            <a:off x="548640" y="320040"/>
+            <a:ext cx="11094415" cy="274320"/>
+          </a:xfrm>
+          <a:prstGeom prst="rect">
+            <a:avLst/>
+          </a:prstGeom>
+          <a:noFill/>
+        </p:spPr>
+        <p:txBody>
+          <a:bodyPr wrap="square" anchor="t" lIns="0" rIns="0" tIns="0" bIns="0"/>
+          <a:lstStyle/>
+          <a:p>
+            <a:pPr algn="l"/>
+            <a:r>
+              <a:rPr sz="1100" b="1" i="0">
+                <a:solidFill>
+                  <a:srgbClr val="54595D"/>
+                </a:solidFill>
+                <a:latin typeface="Calibri"/>
+              </a:rPr>
+              <a:t>MECHANICAL ENGINEERING  ·  Mechanical: Knowledge criteria</a:t>
+            </a:r>
+          </a:p>
+        </p:txBody>
+      </p:sp>
+      <p:sp>
+        <p:nvSpPr>
+          <p:cNvPr id="3" name="TextBox 2"/>
+          <p:cNvSpPr txBox="1"/>
+          <p:nvPr/>
+        </p:nvSpPr>
+        <p:spPr>
+          <a:xfrm>
+            <a:off x="548640" y="566928"/>
+            <a:ext cx="11094415" cy="822960"/>
+          </a:xfrm>
+          <a:prstGeom prst="rect">
+            <a:avLst/>
+          </a:prstGeom>
+          <a:noFill/>
+        </p:spPr>
+        <p:txBody>
+          <a:bodyPr wrap="square" anchor="ctr" lIns="0" rIns="0" tIns="0" bIns="0"/>
+          <a:lstStyle/>
+          <a:p>
+            <a:pPr algn="l"/>
+            <a:r>
+              <a:rPr sz="3200" b="1" i="0">
+                <a:solidFill>
+                  <a:srgbClr val="03306E"/>
+                </a:solidFill>
+                <a:latin typeface="Cambria"/>
+              </a:rPr>
+              <a:t>Constraints</a:t>
+            </a:r>
+          </a:p>
+        </p:txBody>
+      </p:sp>
+      <p:sp>
+        <p:nvSpPr>
+          <p:cNvPr id="4" name="TextBox 3"/>
+          <p:cNvSpPr txBox="1"/>
+          <p:nvPr/>
+        </p:nvSpPr>
+        <p:spPr>
+          <a:xfrm>
+            <a:off x="548640" y="6446520"/>
+            <a:ext cx="8229600" cy="274320"/>
+          </a:xfrm>
+          <a:prstGeom prst="rect">
+            <a:avLst/>
+          </a:prstGeom>
+          <a:noFill/>
+        </p:spPr>
+        <p:txBody>
+          <a:bodyPr wrap="square" anchor="t" lIns="0" rIns="0" tIns="0" bIns="0"/>
+          <a:lstStyle/>
+          <a:p>
+            <a:pPr algn="l"/>
+            <a:r>
+              <a:rPr sz="1000" b="0" i="0">
+                <a:solidFill>
+                  <a:srgbClr val="54595D"/>
+                </a:solidFill>
+                <a:latin typeface="Calibri"/>
+              </a:rPr>
+              <a:t>Design and Development for Engineering and Manufacturing T Level  ·  Business Context, Constraints and Metrics in Design</a:t>
+            </a:r>
+          </a:p>
+        </p:txBody>
+      </p:sp>
+      <p:sp>
+        <p:nvSpPr>
+          <p:cNvPr id="5" name="TextBox 4"/>
+          <p:cNvSpPr txBox="1"/>
+          <p:nvPr/>
+        </p:nvSpPr>
+        <p:spPr>
+          <a:xfrm>
+            <a:off x="10728655" y="6446520"/>
+            <a:ext cx="914400" cy="274320"/>
+          </a:xfrm>
+          <a:prstGeom prst="rect">
+            <a:avLst/>
+          </a:prstGeom>
+          <a:noFill/>
+        </p:spPr>
+        <p:txBody>
+          <a:bodyPr wrap="square" anchor="t" lIns="0" rIns="0" tIns="0" bIns="0"/>
+          <a:lstStyle/>
+          <a:p>
+            <a:pPr algn="r"/>
+            <a:r>
+              <a:rPr sz="1000" b="0" i="0">
+                <a:solidFill>
+                  <a:srgbClr val="54595D"/>
+                </a:solidFill>
+                <a:latin typeface="Calibri"/>
+              </a:rPr>
+              <a:t>6</a:t>
+            </a:r>
+          </a:p>
+        </p:txBody>
+      </p:sp>
+      <p:sp>
+        <p:nvSpPr>
+          <p:cNvPr id="6" name="Rounded Rectangle 5"/>
+          <p:cNvSpPr/>
+          <p:nvPr/>
+        </p:nvSpPr>
+        <p:spPr>
+          <a:xfrm>
+            <a:off x="548640" y="1600200"/>
+            <a:ext cx="5410047" cy="2148840"/>
+          </a:xfrm>
+          <a:prstGeom prst="roundRect">
+            <a:avLst>
+              <a:gd name="adj" fmla="val 6000"/>
+            </a:avLst>
+          </a:prstGeom>
+          <a:solidFill>
+            <a:srgbClr val="EAF3FF"/>
+          </a:solidFill>
+          <a:ln>
+            <a:noFill/>
+          </a:ln>
+          <a:effectLst/>
+        </p:spPr>
+        <p:style>
+          <a:lnRef idx="1">
+            <a:schemeClr val="accent1"/>
+          </a:lnRef>
+          <a:fillRef idx="3">
+            <a:schemeClr val="accent1"/>
+          </a:fillRef>
+          <a:effectRef idx="2">
+            <a:schemeClr val="accent1"/>
+          </a:effectRef>
+          <a:fontRef idx="minor">
+            <a:schemeClr val="lt1"/>
+          </a:fontRef>
+        </p:style>
+        <p:txBody>
+          <a:bodyPr rtlCol="0" anchor="ctr"/>
+          <a:lstStyle/>
+          <a:p/>
+        </p:txBody>
+      </p:sp>
+      <p:sp>
+        <p:nvSpPr>
+          <p:cNvPr id="7" name="Oval 6"/>
+          <p:cNvSpPr/>
+          <p:nvPr/>
+        </p:nvSpPr>
+        <p:spPr>
+          <a:xfrm>
+            <a:off x="777240" y="1828800"/>
+            <a:ext cx="457200" cy="457200"/>
+          </a:xfrm>
+          <a:prstGeom prst="ellipse">
+            <a:avLst/>
+          </a:prstGeom>
+          <a:solidFill>
+            <a:srgbClr val="E0463A"/>
+          </a:solidFill>
+          <a:ln>
+            <a:noFill/>
+          </a:ln>
+          <a:effectLst/>
+        </p:spPr>
+        <p:style>
+          <a:lnRef idx="1">
+            <a:schemeClr val="accent1"/>
+          </a:lnRef>
+          <a:fillRef idx="3">
+            <a:schemeClr val="accent1"/>
+          </a:fillRef>
+          <a:effectRef idx="2">
+            <a:schemeClr val="accent1"/>
+          </a:effectRef>
+          <a:fontRef idx="minor">
+            <a:schemeClr val="lt1"/>
+          </a:fontRef>
+        </p:style>
+        <p:txBody>
+          <a:bodyPr rtlCol="0" anchor="ctr" lIns="0" rIns="0" tIns="0" bIns="0"/>
+          <a:lstStyle/>
+          <a:p>
+            <a:pPr algn="ctr"/>
+            <a:r>
+              <a:rPr sz="1500" b="1">
+                <a:solidFill>
+                  <a:srgbClr val="FFFFFF"/>
+                </a:solidFill>
+                <a:latin typeface="Calibri"/>
+              </a:rPr>
+              <a:t>1</a:t>
+            </a:r>
+          </a:p>
+        </p:txBody>
+      </p:sp>
+      <p:sp>
+        <p:nvSpPr>
+          <p:cNvPr id="8" name="TextBox 7"/>
+          <p:cNvSpPr txBox="1"/>
+          <p:nvPr/>
+        </p:nvSpPr>
+        <p:spPr>
+          <a:xfrm>
+            <a:off x="1371600" y="1801368"/>
+            <a:ext cx="4404207" cy="512064"/>
+          </a:xfrm>
+          <a:prstGeom prst="rect">
+            <a:avLst/>
+          </a:prstGeom>
+          <a:noFill/>
+        </p:spPr>
+        <p:txBody>
+          <a:bodyPr wrap="square" anchor="ctr" lIns="0" rIns="0" tIns="0" bIns="0"/>
+          <a:lstStyle/>
+          <a:p>
+            <a:pPr algn="l"/>
+            <a:r>
+              <a:rPr sz="1900" b="1" i="0">
+                <a:solidFill>
+                  <a:srgbClr val="03306E"/>
+                </a:solidFill>
+                <a:latin typeface="Calibri"/>
+              </a:rPr>
+              <a:t>Commercial</a:t>
+            </a:r>
+          </a:p>
+        </p:txBody>
+      </p:sp>
+      <p:sp>
+        <p:nvSpPr>
+          <p:cNvPr id="9" name="TextBox 8"/>
+          <p:cNvSpPr txBox="1"/>
+          <p:nvPr/>
+        </p:nvSpPr>
+        <p:spPr>
+          <a:xfrm>
+            <a:off x="777240" y="2468880"/>
+            <a:ext cx="4952847" cy="1143000"/>
+          </a:xfrm>
+          <a:prstGeom prst="rect">
+            <a:avLst/>
+          </a:prstGeom>
+          <a:noFill/>
+        </p:spPr>
+        <p:txBody>
+          <a:bodyPr wrap="square" anchor="t" lIns="0" rIns="0" tIns="0" bIns="0"/>
+          <a:lstStyle/>
+          <a:p>
+            <a:pPr algn="l"/>
+            <a:r>
+              <a:rPr sz="2000" b="0" i="0">
+                <a:solidFill>
+                  <a:srgbClr val="202122"/>
+                </a:solidFill>
+                <a:latin typeface="Calibri"/>
+              </a:rPr>
+              <a:t>Competition and profitability.</a:t>
+            </a:r>
+          </a:p>
+        </p:txBody>
+      </p:sp>
+      <p:sp>
+        <p:nvSpPr>
+          <p:cNvPr id="10" name="Rounded Rectangle 9"/>
+          <p:cNvSpPr/>
+          <p:nvPr/>
+        </p:nvSpPr>
+        <p:spPr>
+          <a:xfrm>
+            <a:off x="6233007" y="1600200"/>
+            <a:ext cx="5410047" cy="2148840"/>
+          </a:xfrm>
+          <a:prstGeom prst="roundRect">
+            <a:avLst>
+              <a:gd name="adj" fmla="val 6000"/>
+            </a:avLst>
+          </a:prstGeom>
+          <a:solidFill>
+            <a:srgbClr val="EAF3FF"/>
+          </a:solidFill>
+          <a:ln>
+            <a:noFill/>
+          </a:ln>
+          <a:effectLst/>
+        </p:spPr>
+        <p:style>
+          <a:lnRef idx="1">
+            <a:schemeClr val="accent1"/>
+          </a:lnRef>
+          <a:fillRef idx="3">
+            <a:schemeClr val="accent1"/>
+          </a:fillRef>
+          <a:effectRef idx="2">
+            <a:schemeClr val="accent1"/>
+          </a:effectRef>
+          <a:fontRef idx="minor">
+            <a:schemeClr val="lt1"/>
+          </a:fontRef>
+        </p:style>
+        <p:txBody>
+          <a:bodyPr rtlCol="0" anchor="ctr"/>
+          <a:lstStyle/>
+          <a:p/>
+        </p:txBody>
+      </p:sp>
+      <p:sp>
+        <p:nvSpPr>
+          <p:cNvPr id="11" name="Oval 10"/>
+          <p:cNvSpPr/>
+          <p:nvPr/>
+        </p:nvSpPr>
+        <p:spPr>
+          <a:xfrm>
+            <a:off x="6461607" y="1828800"/>
+            <a:ext cx="457200" cy="457200"/>
+          </a:xfrm>
+          <a:prstGeom prst="ellipse">
+            <a:avLst/>
+          </a:prstGeom>
+          <a:solidFill>
+            <a:srgbClr val="E0463A"/>
+          </a:solidFill>
+          <a:ln>
+            <a:noFill/>
+          </a:ln>
+          <a:effectLst/>
+        </p:spPr>
+        <p:style>
+          <a:lnRef idx="1">
+            <a:schemeClr val="accent1"/>
+          </a:lnRef>
+          <a:fillRef idx="3">
+            <a:schemeClr val="accent1"/>
+          </a:fillRef>
+          <a:effectRef idx="2">
+            <a:schemeClr val="accent1"/>
+          </a:effectRef>
+          <a:fontRef idx="minor">
+            <a:schemeClr val="lt1"/>
+          </a:fontRef>
+        </p:style>
+        <p:txBody>
+          <a:bodyPr rtlCol="0" anchor="ctr" lIns="0" rIns="0" tIns="0" bIns="0"/>
+          <a:lstStyle/>
+          <a:p>
+            <a:pPr algn="ctr"/>
+            <a:r>
+              <a:rPr sz="1500" b="1">
+                <a:solidFill>
+                  <a:srgbClr val="FFFFFF"/>
+                </a:solidFill>
+                <a:latin typeface="Calibri"/>
+              </a:rPr>
+              <a:t>2</a:t>
+            </a:r>
+          </a:p>
+        </p:txBody>
+      </p:sp>
+      <p:sp>
+        <p:nvSpPr>
+          <p:cNvPr id="12" name="TextBox 11"/>
+          <p:cNvSpPr txBox="1"/>
+          <p:nvPr/>
+        </p:nvSpPr>
+        <p:spPr>
+          <a:xfrm>
+            <a:off x="7055967" y="1801368"/>
+            <a:ext cx="4404207" cy="512064"/>
+          </a:xfrm>
+          <a:prstGeom prst="rect">
+            <a:avLst/>
+          </a:prstGeom>
+          <a:noFill/>
+        </p:spPr>
+        <p:txBody>
+          <a:bodyPr wrap="square" anchor="ctr" lIns="0" rIns="0" tIns="0" bIns="0"/>
+          <a:lstStyle/>
+          <a:p>
+            <a:pPr algn="l"/>
+            <a:r>
+              <a:rPr sz="1900" b="1" i="0">
+                <a:solidFill>
+                  <a:srgbClr val="03306E"/>
+                </a:solidFill>
+                <a:latin typeface="Calibri"/>
+              </a:rPr>
+              <a:t>Operational</a:t>
+            </a:r>
+          </a:p>
+        </p:txBody>
+      </p:sp>
+      <p:sp>
+        <p:nvSpPr>
+          <p:cNvPr id="13" name="TextBox 12"/>
+          <p:cNvSpPr txBox="1"/>
+          <p:nvPr/>
+        </p:nvSpPr>
+        <p:spPr>
+          <a:xfrm>
+            <a:off x="6461607" y="2468880"/>
+            <a:ext cx="4952847" cy="1143000"/>
+          </a:xfrm>
+          <a:prstGeom prst="rect">
+            <a:avLst/>
+          </a:prstGeom>
+          <a:noFill/>
+        </p:spPr>
+        <p:txBody>
+          <a:bodyPr wrap="square" anchor="t" lIns="0" rIns="0" tIns="0" bIns="0"/>
+          <a:lstStyle/>
+          <a:p>
+            <a:pPr algn="l"/>
+            <a:r>
+              <a:rPr sz="2000" b="0" i="0">
+                <a:solidFill>
+                  <a:srgbClr val="202122"/>
+                </a:solidFill>
+                <a:latin typeface="Calibri"/>
+              </a:rPr>
+              <a:t>Tools, equipment, materials, process capability, people and training.</a:t>
+            </a:r>
+          </a:p>
+        </p:txBody>
+      </p:sp>
+      <p:sp>
+        <p:nvSpPr>
+          <p:cNvPr id="14" name="Rounded Rectangle 13"/>
+          <p:cNvSpPr/>
+          <p:nvPr/>
+        </p:nvSpPr>
+        <p:spPr>
+          <a:xfrm>
+            <a:off x="548640" y="4023360"/>
+            <a:ext cx="5410047" cy="2148840"/>
+          </a:xfrm>
+          <a:prstGeom prst="roundRect">
+            <a:avLst>
+              <a:gd name="adj" fmla="val 6000"/>
+            </a:avLst>
+          </a:prstGeom>
+          <a:solidFill>
+            <a:srgbClr val="EAF3FF"/>
+          </a:solidFill>
+          <a:ln>
+            <a:noFill/>
+          </a:ln>
+          <a:effectLst/>
+        </p:spPr>
+        <p:style>
+          <a:lnRef idx="1">
+            <a:schemeClr val="accent1"/>
+          </a:lnRef>
+          <a:fillRef idx="3">
+            <a:schemeClr val="accent1"/>
+          </a:fillRef>
+          <a:effectRef idx="2">
+            <a:schemeClr val="accent1"/>
+          </a:effectRef>
+          <a:fontRef idx="minor">
+            <a:schemeClr val="lt1"/>
+          </a:fontRef>
+        </p:style>
+        <p:txBody>
+          <a:bodyPr rtlCol="0" anchor="ctr"/>
+          <a:lstStyle/>
+          <a:p/>
+        </p:txBody>
+      </p:sp>
+      <p:sp>
+        <p:nvSpPr>
+          <p:cNvPr id="15" name="Oval 14"/>
+          <p:cNvSpPr/>
+          <p:nvPr/>
+        </p:nvSpPr>
+        <p:spPr>
+          <a:xfrm>
+            <a:off x="777240" y="4251960"/>
+            <a:ext cx="457200" cy="457200"/>
+          </a:xfrm>
+          <a:prstGeom prst="ellipse">
+            <a:avLst/>
+          </a:prstGeom>
+          <a:solidFill>
+            <a:srgbClr val="E0463A"/>
+          </a:solidFill>
+          <a:ln>
+            <a:noFill/>
+          </a:ln>
+          <a:effectLst/>
+        </p:spPr>
+        <p:style>
+          <a:lnRef idx="1">
+            <a:schemeClr val="accent1"/>
+          </a:lnRef>
+          <a:fillRef idx="3">
+            <a:schemeClr val="accent1"/>
+          </a:fillRef>
+          <a:effectRef idx="2">
+            <a:schemeClr val="accent1"/>
+          </a:effectRef>
+          <a:fontRef idx="minor">
+            <a:schemeClr val="lt1"/>
+          </a:fontRef>
+        </p:style>
+        <p:txBody>
+          <a:bodyPr rtlCol="0" anchor="ctr" lIns="0" rIns="0" tIns="0" bIns="0"/>
+          <a:lstStyle/>
+          <a:p>
+            <a:pPr algn="ctr"/>
+            <a:r>
+              <a:rPr sz="1500" b="1">
+                <a:solidFill>
+                  <a:srgbClr val="FFFFFF"/>
+                </a:solidFill>
+                <a:latin typeface="Calibri"/>
+              </a:rPr>
+              <a:t>3</a:t>
+            </a:r>
+          </a:p>
+        </p:txBody>
+      </p:sp>
+      <p:sp>
+        <p:nvSpPr>
+          <p:cNvPr id="16" name="TextBox 15"/>
+          <p:cNvSpPr txBox="1"/>
+          <p:nvPr/>
+        </p:nvSpPr>
+        <p:spPr>
+          <a:xfrm>
+            <a:off x="1371600" y="4224528"/>
+            <a:ext cx="4404207" cy="512064"/>
+          </a:xfrm>
+          <a:prstGeom prst="rect">
+            <a:avLst/>
+          </a:prstGeom>
+          <a:noFill/>
+        </p:spPr>
+        <p:txBody>
+          <a:bodyPr wrap="square" anchor="ctr" lIns="0" rIns="0" tIns="0" bIns="0"/>
+          <a:lstStyle/>
+          <a:p>
+            <a:pPr algn="l"/>
+            <a:r>
+              <a:rPr sz="1900" b="1" i="0">
+                <a:solidFill>
+                  <a:srgbClr val="03306E"/>
+                </a:solidFill>
+                <a:latin typeface="Calibri"/>
+              </a:rPr>
+              <a:t>Legal</a:t>
+            </a:r>
+          </a:p>
+        </p:txBody>
+      </p:sp>
+      <p:sp>
+        <p:nvSpPr>
+          <p:cNvPr id="17" name="TextBox 16"/>
+          <p:cNvSpPr txBox="1"/>
+          <p:nvPr/>
+        </p:nvSpPr>
+        <p:spPr>
+          <a:xfrm>
+            <a:off x="777240" y="4892040"/>
+            <a:ext cx="4952847" cy="1143000"/>
+          </a:xfrm>
+          <a:prstGeom prst="rect">
+            <a:avLst/>
+          </a:prstGeom>
+          <a:noFill/>
+        </p:spPr>
+        <p:txBody>
+          <a:bodyPr wrap="square" anchor="t" lIns="0" rIns="0" tIns="0" bIns="0"/>
+          <a:lstStyle/>
+          <a:p>
+            <a:pPr algn="l"/>
+            <a:r>
+              <a:rPr sz="2000" b="0" i="0">
+                <a:solidFill>
+                  <a:srgbClr val="202122"/>
+                </a:solidFill>
+                <a:latin typeface="Calibri"/>
+              </a:rPr>
+              <a:t>Regulations and confidentiality.</a:t>
+            </a:r>
+          </a:p>
+        </p:txBody>
+      </p:sp>
+      <p:sp>
+        <p:nvSpPr>
+          <p:cNvPr id="18" name="Rounded Rectangle 17"/>
+          <p:cNvSpPr/>
+          <p:nvPr/>
+        </p:nvSpPr>
+        <p:spPr>
+          <a:xfrm>
+            <a:off x="6233007" y="4023360"/>
+            <a:ext cx="5410047" cy="2148840"/>
+          </a:xfrm>
+          <a:prstGeom prst="roundRect">
+            <a:avLst>
+              <a:gd name="adj" fmla="val 6000"/>
+            </a:avLst>
+          </a:prstGeom>
+          <a:solidFill>
+            <a:srgbClr val="EAF3FF"/>
+          </a:solidFill>
+          <a:ln>
+            <a:noFill/>
+          </a:ln>
+          <a:effectLst/>
+        </p:spPr>
+        <p:style>
+          <a:lnRef idx="1">
+            <a:schemeClr val="accent1"/>
+          </a:lnRef>
+          <a:fillRef idx="3">
+            <a:schemeClr val="accent1"/>
+          </a:fillRef>
+          <a:effectRef idx="2">
+            <a:schemeClr val="accent1"/>
+          </a:effectRef>
+          <a:fontRef idx="minor">
+            <a:schemeClr val="lt1"/>
+          </a:fontRef>
+        </p:style>
+        <p:txBody>
+          <a:bodyPr rtlCol="0" anchor="ctr"/>
+          <a:lstStyle/>
+          <a:p/>
+        </p:txBody>
+      </p:sp>
+      <p:sp>
+        <p:nvSpPr>
+          <p:cNvPr id="19" name="Oval 18"/>
+          <p:cNvSpPr/>
+          <p:nvPr/>
+        </p:nvSpPr>
+        <p:spPr>
+          <a:xfrm>
+            <a:off x="6461607" y="4251960"/>
+            <a:ext cx="457200" cy="457200"/>
+          </a:xfrm>
+          <a:prstGeom prst="ellipse">
+            <a:avLst/>
+          </a:prstGeom>
+          <a:solidFill>
+            <a:srgbClr val="E0463A"/>
+          </a:solidFill>
+          <a:ln>
+            <a:noFill/>
+          </a:ln>
+          <a:effectLst/>
+        </p:spPr>
+        <p:style>
+          <a:lnRef idx="1">
+            <a:schemeClr val="accent1"/>
+          </a:lnRef>
+          <a:fillRef idx="3">
+            <a:schemeClr val="accent1"/>
+          </a:fillRef>
+          <a:effectRef idx="2">
+            <a:schemeClr val="accent1"/>
+          </a:effectRef>
+          <a:fontRef idx="minor">
+            <a:schemeClr val="lt1"/>
+          </a:fontRef>
+        </p:style>
+        <p:txBody>
+          <a:bodyPr rtlCol="0" anchor="ctr" lIns="0" rIns="0" tIns="0" bIns="0"/>
+          <a:lstStyle/>
+          <a:p>
+            <a:pPr algn="ctr"/>
+            <a:r>
+              <a:rPr sz="1500" b="1">
+                <a:solidFill>
+                  <a:srgbClr val="FFFFFF"/>
+                </a:solidFill>
+                <a:latin typeface="Calibri"/>
+              </a:rPr>
+              <a:t>4</a:t>
+            </a:r>
+          </a:p>
+        </p:txBody>
+      </p:sp>
+      <p:sp>
+        <p:nvSpPr>
+          <p:cNvPr id="20" name="TextBox 19"/>
+          <p:cNvSpPr txBox="1"/>
+          <p:nvPr/>
+        </p:nvSpPr>
+        <p:spPr>
+          <a:xfrm>
+            <a:off x="7055967" y="4224528"/>
+            <a:ext cx="4404207" cy="512064"/>
+          </a:xfrm>
+          <a:prstGeom prst="rect">
+            <a:avLst/>
+          </a:prstGeom>
+          <a:noFill/>
+        </p:spPr>
+        <p:txBody>
+          <a:bodyPr wrap="square" anchor="ctr" lIns="0" rIns="0" tIns="0" bIns="0"/>
+          <a:lstStyle/>
+          <a:p>
+            <a:pPr algn="l"/>
+            <a:r>
+              <a:rPr sz="1900" b="1" i="0">
+                <a:solidFill>
+                  <a:srgbClr val="03306E"/>
+                </a:solidFill>
+                <a:latin typeface="Calibri"/>
+              </a:rPr>
+              <a:t>Manufacture</a:t>
+            </a:r>
+          </a:p>
+        </p:txBody>
+      </p:sp>
+      <p:sp>
+        <p:nvSpPr>
+          <p:cNvPr id="21" name="TextBox 20"/>
+          <p:cNvSpPr txBox="1"/>
+          <p:nvPr/>
+        </p:nvSpPr>
+        <p:spPr>
+          <a:xfrm>
+            <a:off x="6461607" y="4892040"/>
+            <a:ext cx="4952847" cy="1143000"/>
+          </a:xfrm>
+          <a:prstGeom prst="rect">
+            <a:avLst/>
+          </a:prstGeom>
+          <a:noFill/>
+        </p:spPr>
+        <p:txBody>
+          <a:bodyPr wrap="square" anchor="t" lIns="0" rIns="0" tIns="0" bIns="0"/>
+          <a:lstStyle/>
+          <a:p>
+            <a:pPr algn="l"/>
+            <a:r>
+              <a:rPr sz="2000" b="0" i="0">
+                <a:solidFill>
+                  <a:srgbClr val="202122"/>
+                </a:solidFill>
+                <a:latin typeface="Calibri"/>
+              </a:rPr>
+              <a:t>Design for manufacture.</a:t>
+            </a:r>
+          </a:p>
+        </p:txBody>
+      </p:sp>
+    </p:spTree>
+  </p:cSld>
+  <p:clrMapOvr>
+    <a:masterClrMapping/>
+  </p:clrMapOvr>
+</p:sld>
+</file>
+
+<file path=ppt/slides/slide7.xml><?xml version="1.0" encoding="utf-8"?>
+<p:sld xmlns:a="http://schemas.openxmlformats.org/drawingml/2006/main" xmlns:p="http://schemas.openxmlformats.org/presentationml/2006/main" xmlns:r="http://schemas.openxmlformats.org/officeDocument/2006/relationships">
+  <p:cSld>
+    <p:bg>
+      <p:bgPr>
+        <a:solidFill>
+          <a:srgbClr val="FFFFFF"/>
+        </a:solidFill>
+        <a:effectLst/>
+      </p:bgPr>
+    </p:bg>
+    <p:spTree>
+      <p:nvGrpSpPr>
+        <p:cNvPr id="1" name=""/>
+        <p:cNvGrpSpPr/>
+        <p:nvPr/>
+      </p:nvGrpSpPr>
+      <p:grpSpPr/>
+      <p:sp>
+        <p:nvSpPr>
+          <p:cNvPr id="2" name="TextBox 1"/>
+          <p:cNvSpPr txBox="1"/>
+          <p:nvPr/>
+        </p:nvSpPr>
+        <p:spPr>
+          <a:xfrm>
+            <a:off x="548640" y="320040"/>
+            <a:ext cx="11094415" cy="274320"/>
+          </a:xfrm>
+          <a:prstGeom prst="rect">
+            <a:avLst/>
+          </a:prstGeom>
+          <a:noFill/>
+        </p:spPr>
+        <p:txBody>
+          <a:bodyPr wrap="square" anchor="t" lIns="0" rIns="0" tIns="0" bIns="0"/>
+          <a:lstStyle/>
+          <a:p>
+            <a:pPr algn="l"/>
+            <a:r>
+              <a:rPr sz="1100" b="1" i="0">
+                <a:solidFill>
+                  <a:srgbClr val="54595D"/>
+                </a:solidFill>
+                <a:latin typeface="Calibri"/>
+              </a:rPr>
+              <a:t>MECHANICAL ENGINEERING  ·  Mechanical: Knowledge criteria</a:t>
+            </a:r>
+          </a:p>
+        </p:txBody>
+      </p:sp>
+      <p:sp>
+        <p:nvSpPr>
+          <p:cNvPr id="3" name="TextBox 2"/>
+          <p:cNvSpPr txBox="1"/>
+          <p:nvPr/>
+        </p:nvSpPr>
+        <p:spPr>
+          <a:xfrm>
+            <a:off x="548640" y="566928"/>
+            <a:ext cx="11094415" cy="822960"/>
+          </a:xfrm>
+          <a:prstGeom prst="rect">
+            <a:avLst/>
+          </a:prstGeom>
+          <a:noFill/>
+        </p:spPr>
+        <p:txBody>
+          <a:bodyPr wrap="square" anchor="ctr" lIns="0" rIns="0" tIns="0" bIns="0"/>
+          <a:lstStyle/>
+          <a:p>
+            <a:pPr algn="l"/>
+            <a:r>
+              <a:rPr sz="3200" b="1" i="0">
+                <a:solidFill>
+                  <a:srgbClr val="03306E"/>
+                </a:solidFill>
+                <a:latin typeface="Cambria"/>
+              </a:rPr>
+              <a:t>Cost and profit</a:t>
+            </a:r>
+          </a:p>
+        </p:txBody>
+      </p:sp>
+      <p:sp>
+        <p:nvSpPr>
+          <p:cNvPr id="4" name="TextBox 3"/>
+          <p:cNvSpPr txBox="1"/>
+          <p:nvPr/>
+        </p:nvSpPr>
+        <p:spPr>
+          <a:xfrm>
+            <a:off x="548640" y="6446520"/>
+            <a:ext cx="8229600" cy="274320"/>
+          </a:xfrm>
+          <a:prstGeom prst="rect">
+            <a:avLst/>
+          </a:prstGeom>
+          <a:noFill/>
+        </p:spPr>
+        <p:txBody>
+          <a:bodyPr wrap="square" anchor="t" lIns="0" rIns="0" tIns="0" bIns="0"/>
+          <a:lstStyle/>
+          <a:p>
+            <a:pPr algn="l"/>
+            <a:r>
+              <a:rPr sz="1000" b="0" i="0">
+                <a:solidFill>
+                  <a:srgbClr val="54595D"/>
+                </a:solidFill>
+                <a:latin typeface="Calibri"/>
+              </a:rPr>
+              <a:t>Design and Development for Engineering and Manufacturing T Level  ·  Business Context, Constraints and Metrics in Design</a:t>
+            </a:r>
+          </a:p>
+        </p:txBody>
+      </p:sp>
+      <p:sp>
+        <p:nvSpPr>
+          <p:cNvPr id="5" name="TextBox 4"/>
+          <p:cNvSpPr txBox="1"/>
+          <p:nvPr/>
+        </p:nvSpPr>
+        <p:spPr>
+          <a:xfrm>
+            <a:off x="10728655" y="6446520"/>
+            <a:ext cx="914400" cy="274320"/>
+          </a:xfrm>
+          <a:prstGeom prst="rect">
+            <a:avLst/>
+          </a:prstGeom>
+          <a:noFill/>
+        </p:spPr>
+        <p:txBody>
+          <a:bodyPr wrap="square" anchor="t" lIns="0" rIns="0" tIns="0" bIns="0"/>
+          <a:lstStyle/>
+          <a:p>
+            <a:pPr algn="r"/>
+            <a:r>
+              <a:rPr sz="1000" b="0" i="0">
+                <a:solidFill>
+                  <a:srgbClr val="54595D"/>
+                </a:solidFill>
+                <a:latin typeface="Calibri"/>
+              </a:rPr>
+              <a:t>7</a:t>
+            </a:r>
+          </a:p>
+        </p:txBody>
+      </p:sp>
+      <p:sp>
+        <p:nvSpPr>
+          <p:cNvPr id="6" name="TextBox 5"/>
+          <p:cNvSpPr txBox="1"/>
+          <p:nvPr/>
+        </p:nvSpPr>
+        <p:spPr>
+          <a:xfrm>
+            <a:off x="548640" y="1554480"/>
+            <a:ext cx="6720840" cy="4617720"/>
+          </a:xfrm>
+          <a:prstGeom prst="rect">
+            <a:avLst/>
+          </a:prstGeom>
+          <a:noFill/>
+        </p:spPr>
+        <p:txBody>
+          <a:bodyPr wrap="square" lIns="0" rIns="0" tIns="0" bIns="0">
+            <a:spAutoFit/>
+          </a:bodyPr>
+          <a:lstStyle/>
+          <a:p>
+            <a:pPr>
+              <a:spcAft>
+                <a:spcPts val="1320"/>
+              </a:spcAft>
+            </a:pPr>
+            <a:r>
+              <a:rPr sz="2200" b="0">
+                <a:solidFill>
+                  <a:srgbClr val="202122"/>
+                </a:solidFill>
+                <a:latin typeface="Calibri"/>
+              </a:rPr>
+              <a:t>Manufacturing cost per unit = materials + labour + overheads.</a:t>
+            </a:r>
+          </a:p>
+          <a:p>
+            <a:pPr>
+              <a:spcAft>
+                <a:spcPts val="1320"/>
+              </a:spcAft>
+            </a:pPr>
+            <a:r>
+              <a:rPr sz="2200" b="0">
+                <a:solidFill>
+                  <a:srgbClr val="202122"/>
+                </a:solidFill>
+                <a:latin typeface="Calibri"/>
+              </a:rPr>
+              <a:t>Materials are the raw stock and bought-in parts. Labour is the workers' time. Overheads are the running costs of the business (rent, energy, admin) shared across the products.</a:t>
+            </a:r>
+          </a:p>
+          <a:p>
+            <a:pPr>
+              <a:spcAft>
+                <a:spcPts val="1320"/>
+              </a:spcAft>
+            </a:pPr>
+            <a:r>
+              <a:rPr sz="2200" b="0">
+                <a:solidFill>
+                  <a:srgbClr val="202122"/>
+                </a:solidFill>
+                <a:latin typeface="Calibri"/>
+              </a:rPr>
+              <a:t>Profit per unit = selling price - manufacturing cost.</a:t>
+            </a:r>
+          </a:p>
+          <a:p>
+            <a:pPr>
+              <a:spcAft>
+                <a:spcPts val="1320"/>
+              </a:spcAft>
+            </a:pPr>
+            <a:r>
+              <a:rPr sz="2200" b="0">
+                <a:solidFill>
+                  <a:srgbClr val="202122"/>
+                </a:solidFill>
+                <a:latin typeface="Calibri"/>
+              </a:rPr>
+              <a:t>Design decisions, such as choice of material, number of parts and process, drive most of a product's cost, so commercial risk analysis is part of every design review.</a:t>
+            </a:r>
+          </a:p>
+        </p:txBody>
+      </p:sp>
+      <p:sp>
+        <p:nvSpPr>
+          <p:cNvPr id="7" name="Rounded Rectangle 6"/>
+          <p:cNvSpPr/>
+          <p:nvPr/>
+        </p:nvSpPr>
+        <p:spPr>
+          <a:xfrm>
+            <a:off x="7772400" y="1554480"/>
+            <a:ext cx="3867912" cy="4526280"/>
+          </a:xfrm>
+          <a:prstGeom prst="roundRect">
+            <a:avLst>
+              <a:gd name="adj" fmla="val 8000"/>
+            </a:avLst>
+          </a:prstGeom>
+          <a:solidFill>
+            <a:srgbClr val="03306E"/>
+          </a:solidFill>
+          <a:ln>
+            <a:noFill/>
+          </a:ln>
+          <a:effectLst/>
+        </p:spPr>
+        <p:style>
+          <a:lnRef idx="1">
+            <a:schemeClr val="accent1"/>
+          </a:lnRef>
+          <a:fillRef idx="3">
+            <a:schemeClr val="accent1"/>
+          </a:fillRef>
+          <a:effectRef idx="2">
+            <a:schemeClr val="accent1"/>
+          </a:effectRef>
+          <a:fontRef idx="minor">
+            <a:schemeClr val="lt1"/>
+          </a:fontRef>
+        </p:style>
+        <p:txBody>
+          <a:bodyPr rtlCol="0" anchor="ctr"/>
+          <a:lstStyle/>
+          <a:p/>
+        </p:txBody>
+      </p:sp>
+      <p:sp>
+        <p:nvSpPr>
+          <p:cNvPr id="8" name="Oval 7"/>
+          <p:cNvSpPr/>
+          <p:nvPr/>
+        </p:nvSpPr>
+        <p:spPr>
+          <a:xfrm>
+            <a:off x="8046720" y="1828800"/>
+            <a:ext cx="548640" cy="548640"/>
+          </a:xfrm>
+          <a:prstGeom prst="ellipse">
+            <a:avLst/>
+          </a:prstGeom>
+          <a:solidFill>
+            <a:srgbClr val="E0463A"/>
+          </a:solidFill>
+          <a:ln>
+            <a:noFill/>
+          </a:ln>
+          <a:effectLst/>
+        </p:spPr>
+        <p:style>
+          <a:lnRef idx="1">
+            <a:schemeClr val="accent1"/>
+          </a:lnRef>
+          <a:fillRef idx="3">
+            <a:schemeClr val="accent1"/>
+          </a:fillRef>
+          <a:effectRef idx="2">
+            <a:schemeClr val="accent1"/>
+          </a:effectRef>
+          <a:fontRef idx="minor">
+            <a:schemeClr val="lt1"/>
+          </a:fontRef>
+        </p:style>
+        <p:txBody>
+          <a:bodyPr rtlCol="0" anchor="ctr" lIns="0" rIns="0" tIns="0" bIns="0"/>
+          <a:lstStyle/>
+          <a:p>
+            <a:pPr algn="ctr"/>
+            <a:r>
+              <a:rPr sz="1300" b="1">
+                <a:solidFill>
+                  <a:srgbClr val="FFFFFF"/>
+                </a:solidFill>
+                <a:latin typeface="Calibri"/>
+              </a:rPr>
+              <a:t>e.g.</a:t>
+            </a:r>
+          </a:p>
+        </p:txBody>
+      </p:sp>
+      <p:sp>
+        <p:nvSpPr>
+          <p:cNvPr id="9" name="TextBox 8"/>
+          <p:cNvSpPr txBox="1"/>
+          <p:nvPr/>
+        </p:nvSpPr>
+        <p:spPr>
+          <a:xfrm>
+            <a:off x="8046720" y="2560320"/>
+            <a:ext cx="3291840" cy="365760"/>
+          </a:xfrm>
+          <a:prstGeom prst="rect">
+            <a:avLst/>
+          </a:prstGeom>
+          <a:noFill/>
+        </p:spPr>
+        <p:txBody>
+          <a:bodyPr wrap="square" anchor="t" lIns="0" rIns="0" tIns="0" bIns="0"/>
+          <a:lstStyle/>
+          <a:p>
+            <a:pPr algn="l"/>
+            <a:r>
+              <a:rPr sz="1300" b="1" i="0">
+                <a:solidFill>
+                  <a:srgbClr val="A9C8F0"/>
+                </a:solidFill>
+                <a:latin typeface="Calibri"/>
+              </a:rPr>
+              <a:t>EXAMPLE</a:t>
+            </a:r>
+          </a:p>
+        </p:txBody>
+      </p:sp>
+      <p:sp>
+        <p:nvSpPr>
+          <p:cNvPr id="10" name="TextBox 9"/>
+          <p:cNvSpPr txBox="1"/>
+          <p:nvPr/>
+        </p:nvSpPr>
+        <p:spPr>
+          <a:xfrm>
+            <a:off x="8046720" y="2971800"/>
+            <a:ext cx="3291840" cy="2971800"/>
+          </a:xfrm>
+          <a:prstGeom prst="rect">
+            <a:avLst/>
+          </a:prstGeom>
+          <a:noFill/>
+        </p:spPr>
+        <p:txBody>
+          <a:bodyPr wrap="square" anchor="t" lIns="0" rIns="0" tIns="0" bIns="0"/>
+          <a:lstStyle/>
+          <a:p>
+            <a:pPr algn="l"/>
+            <a:r>
+              <a:rPr sz="1900" b="0" i="0">
+                <a:solidFill>
+                  <a:srgbClr val="FFFFFF"/>
+                </a:solidFill>
+                <a:latin typeface="Cambria"/>
+              </a:rPr>
+              <a:t>Materials 3 pounds + labour 4.50 + overheads 2.50 = 10 pounds. Selling at 14 pounds gives 4 pounds profit, a 40% margin on cost.</a:t>
+            </a:r>
+          </a:p>
+        </p:txBody>
+      </p:sp>
+    </p:spTree>
+  </p:cSld>
+  <p:clrMapOvr>
+    <a:masterClrMapping/>
+  </p:clrMapOvr>
+</p:sld>
+</file>
+
+<file path=ppt/slides/slide8.xml><?xml version="1.0" encoding="utf-8"?>
+<p:sld xmlns:a="http://schemas.openxmlformats.org/drawingml/2006/main" xmlns:p="http://schemas.openxmlformats.org/presentationml/2006/main" xmlns:r="http://schemas.openxmlformats.org/officeDocument/2006/relationships">
+  <p:cSld>
+    <p:bg>
+      <p:bgPr>
+        <a:solidFill>
+          <a:srgbClr val="FFFFFF"/>
+        </a:solidFill>
+        <a:effectLst/>
+      </p:bgPr>
+    </p:bg>
+    <p:spTree>
+      <p:nvGrpSpPr>
+        <p:cNvPr id="1" name=""/>
+        <p:cNvGrpSpPr/>
+        <p:nvPr/>
+      </p:nvGrpSpPr>
+      <p:grpSpPr/>
+      <p:sp>
+        <p:nvSpPr>
+          <p:cNvPr id="2" name="TextBox 1"/>
+          <p:cNvSpPr txBox="1"/>
+          <p:nvPr/>
+        </p:nvSpPr>
+        <p:spPr>
+          <a:xfrm>
+            <a:off x="548640" y="320040"/>
+            <a:ext cx="11094415" cy="274320"/>
+          </a:xfrm>
+          <a:prstGeom prst="rect">
+            <a:avLst/>
+          </a:prstGeom>
+          <a:noFill/>
+        </p:spPr>
+        <p:txBody>
+          <a:bodyPr wrap="square" anchor="t" lIns="0" rIns="0" tIns="0" bIns="0"/>
+          <a:lstStyle/>
+          <a:p>
+            <a:pPr algn="l"/>
+            <a:r>
+              <a:rPr sz="1100" b="1" i="0">
+                <a:solidFill>
+                  <a:srgbClr val="54595D"/>
+                </a:solidFill>
+                <a:latin typeface="Calibri"/>
+              </a:rPr>
+              <a:t>MECHANICAL ENGINEERING  ·  Mechanical: Knowledge criteria</a:t>
+            </a:r>
+          </a:p>
+        </p:txBody>
+      </p:sp>
+      <p:sp>
+        <p:nvSpPr>
+          <p:cNvPr id="3" name="TextBox 2"/>
+          <p:cNvSpPr txBox="1"/>
+          <p:nvPr/>
+        </p:nvSpPr>
+        <p:spPr>
+          <a:xfrm>
+            <a:off x="548640" y="566928"/>
+            <a:ext cx="11094415" cy="822960"/>
+          </a:xfrm>
+          <a:prstGeom prst="rect">
+            <a:avLst/>
+          </a:prstGeom>
+          <a:noFill/>
+        </p:spPr>
+        <p:txBody>
+          <a:bodyPr wrap="square" anchor="ctr" lIns="0" rIns="0" tIns="0" bIns="0"/>
+          <a:lstStyle/>
+          <a:p>
+            <a:pPr algn="l"/>
+            <a:r>
+              <a:rPr sz="3200" b="1" i="0">
+                <a:solidFill>
+                  <a:srgbClr val="03306E"/>
+                </a:solidFill>
+                <a:latin typeface="Cambria"/>
+              </a:rPr>
+              <a:t>Cost and profit</a:t>
+            </a:r>
+          </a:p>
+        </p:txBody>
+      </p:sp>
+      <p:sp>
+        <p:nvSpPr>
+          <p:cNvPr id="4" name="TextBox 3"/>
+          <p:cNvSpPr txBox="1"/>
+          <p:nvPr/>
+        </p:nvSpPr>
+        <p:spPr>
+          <a:xfrm>
+            <a:off x="548640" y="6446520"/>
+            <a:ext cx="8229600" cy="274320"/>
+          </a:xfrm>
+          <a:prstGeom prst="rect">
+            <a:avLst/>
+          </a:prstGeom>
+          <a:noFill/>
+        </p:spPr>
+        <p:txBody>
+          <a:bodyPr wrap="square" anchor="t" lIns="0" rIns="0" tIns="0" bIns="0"/>
+          <a:lstStyle/>
+          <a:p>
+            <a:pPr algn="l"/>
+            <a:r>
+              <a:rPr sz="1000" b="0" i="0">
+                <a:solidFill>
+                  <a:srgbClr val="54595D"/>
+                </a:solidFill>
+                <a:latin typeface="Calibri"/>
+              </a:rPr>
+              <a:t>Design and Development for Engineering and Manufacturing T Level  ·  Business Context, Constraints and Metrics in Design</a:t>
+            </a:r>
+          </a:p>
+        </p:txBody>
+      </p:sp>
+      <p:sp>
+        <p:nvSpPr>
+          <p:cNvPr id="5" name="TextBox 4"/>
+          <p:cNvSpPr txBox="1"/>
+          <p:nvPr/>
+        </p:nvSpPr>
+        <p:spPr>
+          <a:xfrm>
+            <a:off x="10728655" y="6446520"/>
+            <a:ext cx="914400" cy="274320"/>
+          </a:xfrm>
+          <a:prstGeom prst="rect">
+            <a:avLst/>
+          </a:prstGeom>
+          <a:noFill/>
+        </p:spPr>
+        <p:txBody>
+          <a:bodyPr wrap="square" anchor="t" lIns="0" rIns="0" tIns="0" bIns="0"/>
+          <a:lstStyle/>
+          <a:p>
+            <a:pPr algn="r"/>
+            <a:r>
+              <a:rPr sz="1000" b="0" i="0">
+                <a:solidFill>
+                  <a:srgbClr val="54595D"/>
+                </a:solidFill>
+                <a:latin typeface="Calibri"/>
+              </a:rPr>
+              <a:t>8</a:t>
             </a:r>
           </a:p>
         </p:txBody>
@@ -6611,7 +10383,7 @@
 </p:sld>
 </file>
 
-<file path=ppt/slides/slide6.xml><?xml version="1.0" encoding="utf-8"?>
+<file path=ppt/slides/slide9.xml><?xml version="1.0" encoding="utf-8"?>
 <p:sld xmlns:a="http://schemas.openxmlformats.org/drawingml/2006/main" xmlns:p="http://schemas.openxmlformats.org/presentationml/2006/main" xmlns:r="http://schemas.openxmlformats.org/officeDocument/2006/relationships">
   <p:cSld>
     <p:bg>
@@ -6690,7 +10462,7 @@
                 </a:solidFill>
                 <a:latin typeface="Cambria"/>
               </a:rPr>
-              <a:t>Check your understanding</a:t>
+              <a:t>Quick check: Cost and profit</a:t>
             </a:r>
           </a:p>
         </p:txBody>
@@ -6756,7 +10528,7 @@
                 </a:solidFill>
                 <a:latin typeface="Calibri"/>
               </a:rPr>
-              <a:t>6</a:t>
+              <a:t>9</a:t>
             </a:r>
           </a:p>
         </p:txBody>
@@ -6769,8 +10541,8 @@
         </p:nvSpPr>
         <p:spPr>
           <a:xfrm>
-            <a:off x="548640" y="1618488"/>
-            <a:ext cx="411480" cy="411480"/>
+            <a:off x="548640" y="1691640"/>
+            <a:ext cx="502920" cy="502920"/>
           </a:xfrm>
           <a:prstGeom prst="ellipse">
             <a:avLst/>
@@ -6803,7 +10575,7 @@
           <a:p>
             <a:pPr algn="ctr"/>
             <a:r>
-              <a:rPr sz="1400" b="1">
+              <a:rPr sz="1600" b="1">
                 <a:solidFill>
                   <a:srgbClr val="FFFFFF"/>
                 </a:solidFill>
@@ -6822,8 +10594,8 @@
         </p:nvSpPr>
         <p:spPr>
           <a:xfrm>
-            <a:off x="1234440" y="1600200"/>
-            <a:ext cx="10408615" cy="1030986"/>
+            <a:off x="1371600" y="1645920"/>
+            <a:ext cx="10271455" cy="1188720"/>
           </a:xfrm>
           <a:prstGeom prst="rect">
             <a:avLst/>
@@ -6836,13 +10608,13 @@
           <a:p>
             <a:pPr algn="l"/>
             <a:r>
-              <a:rPr sz="2200" b="0" i="0">
+              <a:rPr sz="2400" b="0" i="0">
                 <a:solidFill>
                   <a:srgbClr val="202122"/>
                 </a:solidFill>
                 <a:latin typeface="Calibri"/>
               </a:rPr>
-              <a:t>Is a customer-requested feature market pull or technology push?</a:t>
+              <a:t>Name the three parts of manufacturing cost.</a:t>
             </a:r>
           </a:p>
         </p:txBody>
@@ -6855,8 +10627,8 @@
         </p:nvSpPr>
         <p:spPr>
           <a:xfrm>
-            <a:off x="548640" y="2814066"/>
-            <a:ext cx="411480" cy="411480"/>
+            <a:off x="548640" y="3108960"/>
+            <a:ext cx="502920" cy="502920"/>
           </a:xfrm>
           <a:prstGeom prst="ellipse">
             <a:avLst/>
@@ -6889,7 +10661,7 @@
           <a:p>
             <a:pPr algn="ctr"/>
             <a:r>
-              <a:rPr sz="1400" b="1">
+              <a:rPr sz="1600" b="1">
                 <a:solidFill>
                   <a:srgbClr val="FFFFFF"/>
                 </a:solidFill>
@@ -6908,8 +10680,8 @@
         </p:nvSpPr>
         <p:spPr>
           <a:xfrm>
-            <a:off x="1234440" y="2795778"/>
-            <a:ext cx="10408615" cy="1030986"/>
+            <a:off x="1371600" y="3063240"/>
+            <a:ext cx="10271455" cy="1188720"/>
           </a:xfrm>
           <a:prstGeom prst="rect">
             <a:avLst/>
@@ -6922,13 +10694,13 @@
           <a:p>
             <a:pPr algn="l"/>
             <a:r>
-              <a:rPr sz="2200" b="0" i="0">
+              <a:rPr sz="2400" b="0" i="0">
                 <a:solidFill>
                   <a:srgbClr val="202122"/>
                 </a:solidFill>
                 <a:latin typeface="Calibri"/>
               </a:rPr>
-              <a:t>Name the three parts of manufacturing cost.</a:t>
+              <a:t>Cost 12 pounds, price 15 pounds. Profit per unit?</a:t>
             </a:r>
           </a:p>
         </p:txBody>
@@ -6941,8 +10713,8 @@
         </p:nvSpPr>
         <p:spPr>
           <a:xfrm>
-            <a:off x="548640" y="4009644"/>
-            <a:ext cx="411480" cy="411480"/>
+            <a:off x="548640" y="4526280"/>
+            <a:ext cx="502920" cy="502920"/>
           </a:xfrm>
           <a:prstGeom prst="ellipse">
             <a:avLst/>
@@ -6975,7 +10747,7 @@
           <a:p>
             <a:pPr algn="ctr"/>
             <a:r>
-              <a:rPr sz="1400" b="1">
+              <a:rPr sz="1600" b="1">
                 <a:solidFill>
                   <a:srgbClr val="FFFFFF"/>
                 </a:solidFill>
@@ -6994,8 +10766,8 @@
         </p:nvSpPr>
         <p:spPr>
           <a:xfrm>
-            <a:off x="1234440" y="3991356"/>
-            <a:ext cx="10408615" cy="1030986"/>
+            <a:off x="1371600" y="4480560"/>
+            <a:ext cx="10271455" cy="1188720"/>
           </a:xfrm>
           <a:prstGeom prst="rect">
             <a:avLst/>
@@ -7008,1052 +10780,13 @@
           <a:p>
             <a:pPr algn="l"/>
             <a:r>
-              <a:rPr sz="2200" b="0" i="0">
+              <a:rPr sz="2400" b="0" i="0">
                 <a:solidFill>
                   <a:srgbClr val="202122"/>
                 </a:solidFill>
                 <a:latin typeface="Calibri"/>
               </a:rPr>
-              <a:t>A part costs 8 pounds to make and sells for 11. Profit per unit?</a:t>
-            </a:r>
-          </a:p>
-        </p:txBody>
-      </p:sp>
-      <p:sp>
-        <p:nvSpPr>
-          <p:cNvPr id="12" name="Oval 11"/>
-          <p:cNvSpPr/>
-          <p:nvPr/>
-        </p:nvSpPr>
-        <p:spPr>
-          <a:xfrm>
-            <a:off x="548640" y="5205221"/>
-            <a:ext cx="411480" cy="411480"/>
-          </a:xfrm>
-          <a:prstGeom prst="ellipse">
-            <a:avLst/>
-          </a:prstGeom>
-          <a:solidFill>
-            <a:srgbClr val="E0463A"/>
-          </a:solidFill>
-          <a:ln>
-            <a:noFill/>
-          </a:ln>
-          <a:effectLst/>
-        </p:spPr>
-        <p:style>
-          <a:lnRef idx="1">
-            <a:schemeClr val="accent1"/>
-          </a:lnRef>
-          <a:fillRef idx="3">
-            <a:schemeClr val="accent1"/>
-          </a:fillRef>
-          <a:effectRef idx="2">
-            <a:schemeClr val="accent1"/>
-          </a:effectRef>
-          <a:fontRef idx="minor">
-            <a:schemeClr val="lt1"/>
-          </a:fontRef>
-        </p:style>
-        <p:txBody>
-          <a:bodyPr rtlCol="0" anchor="ctr" lIns="0" rIns="0" tIns="0" bIns="0"/>
-          <a:lstStyle/>
-          <a:p>
-            <a:pPr algn="ctr"/>
-            <a:r>
-              <a:rPr sz="1400" b="1">
-                <a:solidFill>
-                  <a:srgbClr val="FFFFFF"/>
-                </a:solidFill>
-                <a:latin typeface="Calibri"/>
-              </a:rPr>
-              <a:t>4</a:t>
-            </a:r>
-          </a:p>
-        </p:txBody>
-      </p:sp>
-      <p:sp>
-        <p:nvSpPr>
-          <p:cNvPr id="13" name="TextBox 12"/>
-          <p:cNvSpPr txBox="1"/>
-          <p:nvPr/>
-        </p:nvSpPr>
-        <p:spPr>
-          <a:xfrm>
-            <a:off x="1234440" y="5186933"/>
-            <a:ext cx="10408615" cy="1030986"/>
-          </a:xfrm>
-          <a:prstGeom prst="rect">
-            <a:avLst/>
-          </a:prstGeom>
-          <a:noFill/>
-        </p:spPr>
-        <p:txBody>
-          <a:bodyPr wrap="square" anchor="t" lIns="0" rIns="0" tIns="0" bIns="0"/>
-          <a:lstStyle/>
-          <a:p>
-            <a:pPr algn="l"/>
-            <a:r>
-              <a:rPr sz="2200" b="0" i="0">
-                <a:solidFill>
-                  <a:srgbClr val="202122"/>
-                </a:solidFill>
-                <a:latin typeface="Calibri"/>
-              </a:rPr>
-              <a:t>Give one operational constraint.</a:t>
-            </a:r>
-          </a:p>
-        </p:txBody>
-      </p:sp>
-    </p:spTree>
-  </p:cSld>
-  <p:clrMapOvr>
-    <a:masterClrMapping/>
-  </p:clrMapOvr>
-</p:sld>
-</file>
-
-<file path=ppt/slides/slide7.xml><?xml version="1.0" encoding="utf-8"?>
-<p:sld xmlns:a="http://schemas.openxmlformats.org/drawingml/2006/main" xmlns:p="http://schemas.openxmlformats.org/presentationml/2006/main" xmlns:r="http://schemas.openxmlformats.org/officeDocument/2006/relationships">
-  <p:cSld>
-    <p:bg>
-      <p:bgPr>
-        <a:solidFill>
-          <a:srgbClr val="FFFFFF"/>
-        </a:solidFill>
-        <a:effectLst/>
-      </p:bgPr>
-    </p:bg>
-    <p:spTree>
-      <p:nvGrpSpPr>
-        <p:cNvPr id="1" name=""/>
-        <p:cNvGrpSpPr/>
-        <p:nvPr/>
-      </p:nvGrpSpPr>
-      <p:grpSpPr/>
-      <p:sp>
-        <p:nvSpPr>
-          <p:cNvPr id="2" name="TextBox 1"/>
-          <p:cNvSpPr txBox="1"/>
-          <p:nvPr/>
-        </p:nvSpPr>
-        <p:spPr>
-          <a:xfrm>
-            <a:off x="548640" y="320040"/>
-            <a:ext cx="11094415" cy="274320"/>
-          </a:xfrm>
-          <a:prstGeom prst="rect">
-            <a:avLst/>
-          </a:prstGeom>
-          <a:noFill/>
-        </p:spPr>
-        <p:txBody>
-          <a:bodyPr wrap="square" anchor="t" lIns="0" rIns="0" tIns="0" bIns="0"/>
-          <a:lstStyle/>
-          <a:p>
-            <a:pPr algn="l"/>
-            <a:r>
-              <a:rPr sz="1100" b="1" i="0">
-                <a:solidFill>
-                  <a:srgbClr val="54595D"/>
-                </a:solidFill>
-                <a:latin typeface="Calibri"/>
-              </a:rPr>
-              <a:t>MECHANICAL ENGINEERING  ·  Mechanical: Knowledge criteria</a:t>
-            </a:r>
-          </a:p>
-        </p:txBody>
-      </p:sp>
-      <p:sp>
-        <p:nvSpPr>
-          <p:cNvPr id="3" name="TextBox 2"/>
-          <p:cNvSpPr txBox="1"/>
-          <p:nvPr/>
-        </p:nvSpPr>
-        <p:spPr>
-          <a:xfrm>
-            <a:off x="548640" y="566928"/>
-            <a:ext cx="11094415" cy="822960"/>
-          </a:xfrm>
-          <a:prstGeom prst="rect">
-            <a:avLst/>
-          </a:prstGeom>
-          <a:noFill/>
-        </p:spPr>
-        <p:txBody>
-          <a:bodyPr wrap="square" anchor="ctr" lIns="0" rIns="0" tIns="0" bIns="0"/>
-          <a:lstStyle/>
-          <a:p>
-            <a:pPr algn="l"/>
-            <a:r>
-              <a:rPr sz="3200" b="1" i="0">
-                <a:solidFill>
-                  <a:srgbClr val="03306E"/>
-                </a:solidFill>
-                <a:latin typeface="Cambria"/>
-              </a:rPr>
-              <a:t>Answers</a:t>
-            </a:r>
-          </a:p>
-        </p:txBody>
-      </p:sp>
-      <p:sp>
-        <p:nvSpPr>
-          <p:cNvPr id="4" name="TextBox 3"/>
-          <p:cNvSpPr txBox="1"/>
-          <p:nvPr/>
-        </p:nvSpPr>
-        <p:spPr>
-          <a:xfrm>
-            <a:off x="548640" y="6446520"/>
-            <a:ext cx="8229600" cy="274320"/>
-          </a:xfrm>
-          <a:prstGeom prst="rect">
-            <a:avLst/>
-          </a:prstGeom>
-          <a:noFill/>
-        </p:spPr>
-        <p:txBody>
-          <a:bodyPr wrap="square" anchor="t" lIns="0" rIns="0" tIns="0" bIns="0"/>
-          <a:lstStyle/>
-          <a:p>
-            <a:pPr algn="l"/>
-            <a:r>
-              <a:rPr sz="1000" b="0" i="0">
-                <a:solidFill>
-                  <a:srgbClr val="54595D"/>
-                </a:solidFill>
-                <a:latin typeface="Calibri"/>
-              </a:rPr>
-              <a:t>Design and Development for Engineering and Manufacturing T Level  ·  Business Context, Constraints and Metrics in Design</a:t>
-            </a:r>
-          </a:p>
-        </p:txBody>
-      </p:sp>
-      <p:sp>
-        <p:nvSpPr>
-          <p:cNvPr id="5" name="TextBox 4"/>
-          <p:cNvSpPr txBox="1"/>
-          <p:nvPr/>
-        </p:nvSpPr>
-        <p:spPr>
-          <a:xfrm>
-            <a:off x="10728655" y="6446520"/>
-            <a:ext cx="914400" cy="274320"/>
-          </a:xfrm>
-          <a:prstGeom prst="rect">
-            <a:avLst/>
-          </a:prstGeom>
-          <a:noFill/>
-        </p:spPr>
-        <p:txBody>
-          <a:bodyPr wrap="square" anchor="t" lIns="0" rIns="0" tIns="0" bIns="0"/>
-          <a:lstStyle/>
-          <a:p>
-            <a:pPr algn="r"/>
-            <a:r>
-              <a:rPr sz="1000" b="0" i="0">
-                <a:solidFill>
-                  <a:srgbClr val="54595D"/>
-                </a:solidFill>
-                <a:latin typeface="Calibri"/>
-              </a:rPr>
-              <a:t>7</a:t>
-            </a:r>
-          </a:p>
-        </p:txBody>
-      </p:sp>
-      <p:sp>
-        <p:nvSpPr>
-          <p:cNvPr id="6" name="Oval 5"/>
-          <p:cNvSpPr/>
-          <p:nvPr/>
-        </p:nvSpPr>
-        <p:spPr>
-          <a:xfrm>
-            <a:off x="548640" y="1618488"/>
-            <a:ext cx="411480" cy="411480"/>
-          </a:xfrm>
-          <a:prstGeom prst="ellipse">
-            <a:avLst/>
-          </a:prstGeom>
-          <a:solidFill>
-            <a:srgbClr val="E0463A"/>
-          </a:solidFill>
-          <a:ln>
-            <a:noFill/>
-          </a:ln>
-          <a:effectLst/>
-        </p:spPr>
-        <p:style>
-          <a:lnRef idx="1">
-            <a:schemeClr val="accent1"/>
-          </a:lnRef>
-          <a:fillRef idx="3">
-            <a:schemeClr val="accent1"/>
-          </a:fillRef>
-          <a:effectRef idx="2">
-            <a:schemeClr val="accent1"/>
-          </a:effectRef>
-          <a:fontRef idx="minor">
-            <a:schemeClr val="lt1"/>
-          </a:fontRef>
-        </p:style>
-        <p:txBody>
-          <a:bodyPr rtlCol="0" anchor="ctr" lIns="0" rIns="0" tIns="0" bIns="0"/>
-          <a:lstStyle/>
-          <a:p>
-            <a:pPr algn="ctr"/>
-            <a:r>
-              <a:rPr sz="1400" b="1">
-                <a:solidFill>
-                  <a:srgbClr val="FFFFFF"/>
-                </a:solidFill>
-                <a:latin typeface="Calibri"/>
-              </a:rPr>
-              <a:t>1</a:t>
-            </a:r>
-          </a:p>
-        </p:txBody>
-      </p:sp>
-      <p:sp>
-        <p:nvSpPr>
-          <p:cNvPr id="7" name="TextBox 6"/>
-          <p:cNvSpPr txBox="1"/>
-          <p:nvPr/>
-        </p:nvSpPr>
-        <p:spPr>
-          <a:xfrm>
-            <a:off x="1234440" y="1600200"/>
-            <a:ext cx="10408615" cy="1030986"/>
-          </a:xfrm>
-          <a:prstGeom prst="rect">
-            <a:avLst/>
-          </a:prstGeom>
-          <a:noFill/>
-        </p:spPr>
-        <p:txBody>
-          <a:bodyPr wrap="square" anchor="t" lIns="0" rIns="0" tIns="0" bIns="0"/>
-          <a:lstStyle/>
-          <a:p>
-            <a:pPr algn="l"/>
-            <a:r>
-              <a:rPr sz="1800" b="0" i="0">
-                <a:solidFill>
-                  <a:srgbClr val="54595D"/>
-                </a:solidFill>
-                <a:latin typeface="Calibri"/>
-              </a:rPr>
-              <a:t>Is a customer-requested feature market pull or technology push?</a:t>
-            </a:r>
-          </a:p>
-          <a:p>
-            <a:r>
-              <a:rPr sz="1800" b="1">
-                <a:solidFill>
-                  <a:srgbClr val="03306E"/>
-                </a:solidFill>
-                <a:latin typeface="Calibri"/>
-              </a:rPr>
-              <a:t>Market pull.</a:t>
-            </a:r>
-          </a:p>
-        </p:txBody>
-      </p:sp>
-      <p:sp>
-        <p:nvSpPr>
-          <p:cNvPr id="8" name="Oval 7"/>
-          <p:cNvSpPr/>
-          <p:nvPr/>
-        </p:nvSpPr>
-        <p:spPr>
-          <a:xfrm>
-            <a:off x="548640" y="2814066"/>
-            <a:ext cx="411480" cy="411480"/>
-          </a:xfrm>
-          <a:prstGeom prst="ellipse">
-            <a:avLst/>
-          </a:prstGeom>
-          <a:solidFill>
-            <a:srgbClr val="E0463A"/>
-          </a:solidFill>
-          <a:ln>
-            <a:noFill/>
-          </a:ln>
-          <a:effectLst/>
-        </p:spPr>
-        <p:style>
-          <a:lnRef idx="1">
-            <a:schemeClr val="accent1"/>
-          </a:lnRef>
-          <a:fillRef idx="3">
-            <a:schemeClr val="accent1"/>
-          </a:fillRef>
-          <a:effectRef idx="2">
-            <a:schemeClr val="accent1"/>
-          </a:effectRef>
-          <a:fontRef idx="minor">
-            <a:schemeClr val="lt1"/>
-          </a:fontRef>
-        </p:style>
-        <p:txBody>
-          <a:bodyPr rtlCol="0" anchor="ctr" lIns="0" rIns="0" tIns="0" bIns="0"/>
-          <a:lstStyle/>
-          <a:p>
-            <a:pPr algn="ctr"/>
-            <a:r>
-              <a:rPr sz="1400" b="1">
-                <a:solidFill>
-                  <a:srgbClr val="FFFFFF"/>
-                </a:solidFill>
-                <a:latin typeface="Calibri"/>
-              </a:rPr>
-              <a:t>2</a:t>
-            </a:r>
-          </a:p>
-        </p:txBody>
-      </p:sp>
-      <p:sp>
-        <p:nvSpPr>
-          <p:cNvPr id="9" name="TextBox 8"/>
-          <p:cNvSpPr txBox="1"/>
-          <p:nvPr/>
-        </p:nvSpPr>
-        <p:spPr>
-          <a:xfrm>
-            <a:off x="1234440" y="2795778"/>
-            <a:ext cx="10408615" cy="1030986"/>
-          </a:xfrm>
-          <a:prstGeom prst="rect">
-            <a:avLst/>
-          </a:prstGeom>
-          <a:noFill/>
-        </p:spPr>
-        <p:txBody>
-          <a:bodyPr wrap="square" anchor="t" lIns="0" rIns="0" tIns="0" bIns="0"/>
-          <a:lstStyle/>
-          <a:p>
-            <a:pPr algn="l"/>
-            <a:r>
-              <a:rPr sz="1800" b="0" i="0">
-                <a:solidFill>
-                  <a:srgbClr val="54595D"/>
-                </a:solidFill>
-                <a:latin typeface="Calibri"/>
-              </a:rPr>
-              <a:t>Name the three parts of manufacturing cost.</a:t>
-            </a:r>
-          </a:p>
-          <a:p>
-            <a:r>
-              <a:rPr sz="1800" b="1">
-                <a:solidFill>
-                  <a:srgbClr val="03306E"/>
-                </a:solidFill>
-                <a:latin typeface="Calibri"/>
-              </a:rPr>
-              <a:t>Materials, labour, overheads.</a:t>
-            </a:r>
-          </a:p>
-        </p:txBody>
-      </p:sp>
-      <p:sp>
-        <p:nvSpPr>
-          <p:cNvPr id="10" name="Oval 9"/>
-          <p:cNvSpPr/>
-          <p:nvPr/>
-        </p:nvSpPr>
-        <p:spPr>
-          <a:xfrm>
-            <a:off x="548640" y="4009644"/>
-            <a:ext cx="411480" cy="411480"/>
-          </a:xfrm>
-          <a:prstGeom prst="ellipse">
-            <a:avLst/>
-          </a:prstGeom>
-          <a:solidFill>
-            <a:srgbClr val="E0463A"/>
-          </a:solidFill>
-          <a:ln>
-            <a:noFill/>
-          </a:ln>
-          <a:effectLst/>
-        </p:spPr>
-        <p:style>
-          <a:lnRef idx="1">
-            <a:schemeClr val="accent1"/>
-          </a:lnRef>
-          <a:fillRef idx="3">
-            <a:schemeClr val="accent1"/>
-          </a:fillRef>
-          <a:effectRef idx="2">
-            <a:schemeClr val="accent1"/>
-          </a:effectRef>
-          <a:fontRef idx="minor">
-            <a:schemeClr val="lt1"/>
-          </a:fontRef>
-        </p:style>
-        <p:txBody>
-          <a:bodyPr rtlCol="0" anchor="ctr" lIns="0" rIns="0" tIns="0" bIns="0"/>
-          <a:lstStyle/>
-          <a:p>
-            <a:pPr algn="ctr"/>
-            <a:r>
-              <a:rPr sz="1400" b="1">
-                <a:solidFill>
-                  <a:srgbClr val="FFFFFF"/>
-                </a:solidFill>
-                <a:latin typeface="Calibri"/>
-              </a:rPr>
-              <a:t>3</a:t>
-            </a:r>
-          </a:p>
-        </p:txBody>
-      </p:sp>
-      <p:sp>
-        <p:nvSpPr>
-          <p:cNvPr id="11" name="TextBox 10"/>
-          <p:cNvSpPr txBox="1"/>
-          <p:nvPr/>
-        </p:nvSpPr>
-        <p:spPr>
-          <a:xfrm>
-            <a:off x="1234440" y="3991356"/>
-            <a:ext cx="10408615" cy="1030986"/>
-          </a:xfrm>
-          <a:prstGeom prst="rect">
-            <a:avLst/>
-          </a:prstGeom>
-          <a:noFill/>
-        </p:spPr>
-        <p:txBody>
-          <a:bodyPr wrap="square" anchor="t" lIns="0" rIns="0" tIns="0" bIns="0"/>
-          <a:lstStyle/>
-          <a:p>
-            <a:pPr algn="l"/>
-            <a:r>
-              <a:rPr sz="1800" b="0" i="0">
-                <a:solidFill>
-                  <a:srgbClr val="54595D"/>
-                </a:solidFill>
-                <a:latin typeface="Calibri"/>
-              </a:rPr>
-              <a:t>A part costs 8 pounds to make and sells for 11. Profit per unit?</a:t>
-            </a:r>
-          </a:p>
-          <a:p>
-            <a:r>
-              <a:rPr sz="1800" b="1">
-                <a:solidFill>
-                  <a:srgbClr val="03306E"/>
-                </a:solidFill>
-                <a:latin typeface="Calibri"/>
-              </a:rPr>
-              <a:t>3 pounds.</a:t>
-            </a:r>
-          </a:p>
-        </p:txBody>
-      </p:sp>
-      <p:sp>
-        <p:nvSpPr>
-          <p:cNvPr id="12" name="Oval 11"/>
-          <p:cNvSpPr/>
-          <p:nvPr/>
-        </p:nvSpPr>
-        <p:spPr>
-          <a:xfrm>
-            <a:off x="548640" y="5205221"/>
-            <a:ext cx="411480" cy="411480"/>
-          </a:xfrm>
-          <a:prstGeom prst="ellipse">
-            <a:avLst/>
-          </a:prstGeom>
-          <a:solidFill>
-            <a:srgbClr val="E0463A"/>
-          </a:solidFill>
-          <a:ln>
-            <a:noFill/>
-          </a:ln>
-          <a:effectLst/>
-        </p:spPr>
-        <p:style>
-          <a:lnRef idx="1">
-            <a:schemeClr val="accent1"/>
-          </a:lnRef>
-          <a:fillRef idx="3">
-            <a:schemeClr val="accent1"/>
-          </a:fillRef>
-          <a:effectRef idx="2">
-            <a:schemeClr val="accent1"/>
-          </a:effectRef>
-          <a:fontRef idx="minor">
-            <a:schemeClr val="lt1"/>
-          </a:fontRef>
-        </p:style>
-        <p:txBody>
-          <a:bodyPr rtlCol="0" anchor="ctr" lIns="0" rIns="0" tIns="0" bIns="0"/>
-          <a:lstStyle/>
-          <a:p>
-            <a:pPr algn="ctr"/>
-            <a:r>
-              <a:rPr sz="1400" b="1">
-                <a:solidFill>
-                  <a:srgbClr val="FFFFFF"/>
-                </a:solidFill>
-                <a:latin typeface="Calibri"/>
-              </a:rPr>
-              <a:t>4</a:t>
-            </a:r>
-          </a:p>
-        </p:txBody>
-      </p:sp>
-      <p:sp>
-        <p:nvSpPr>
-          <p:cNvPr id="13" name="TextBox 12"/>
-          <p:cNvSpPr txBox="1"/>
-          <p:nvPr/>
-        </p:nvSpPr>
-        <p:spPr>
-          <a:xfrm>
-            <a:off x="1234440" y="5186933"/>
-            <a:ext cx="10408615" cy="1030986"/>
-          </a:xfrm>
-          <a:prstGeom prst="rect">
-            <a:avLst/>
-          </a:prstGeom>
-          <a:noFill/>
-        </p:spPr>
-        <p:txBody>
-          <a:bodyPr wrap="square" anchor="t" lIns="0" rIns="0" tIns="0" bIns="0"/>
-          <a:lstStyle/>
-          <a:p>
-            <a:pPr algn="l"/>
-            <a:r>
-              <a:rPr sz="1800" b="0" i="0">
-                <a:solidFill>
-                  <a:srgbClr val="54595D"/>
-                </a:solidFill>
-                <a:latin typeface="Calibri"/>
-              </a:rPr>
-              <a:t>Give one operational constraint.</a:t>
-            </a:r>
-          </a:p>
-          <a:p>
-            <a:r>
-              <a:rPr sz="1800" b="1">
-                <a:solidFill>
-                  <a:srgbClr val="03306E"/>
-                </a:solidFill>
-                <a:latin typeface="Calibri"/>
-              </a:rPr>
-              <a:t>E.g. tools, equipment, process capability, training.</a:t>
-            </a:r>
-          </a:p>
-        </p:txBody>
-      </p:sp>
-    </p:spTree>
-  </p:cSld>
-  <p:clrMapOvr>
-    <a:masterClrMapping/>
-  </p:clrMapOvr>
-</p:sld>
-</file>
-
-<file path=ppt/slides/slide8.xml><?xml version="1.0" encoding="utf-8"?>
-<p:sld xmlns:a="http://schemas.openxmlformats.org/drawingml/2006/main" xmlns:p="http://schemas.openxmlformats.org/presentationml/2006/main" xmlns:r="http://schemas.openxmlformats.org/officeDocument/2006/relationships">
-  <p:cSld>
-    <p:bg>
-      <p:bgPr>
-        <a:solidFill>
-          <a:srgbClr val="FFFFFF"/>
-        </a:solidFill>
-        <a:effectLst/>
-      </p:bgPr>
-    </p:bg>
-    <p:spTree>
-      <p:nvGrpSpPr>
-        <p:cNvPr id="1" name=""/>
-        <p:cNvGrpSpPr/>
-        <p:nvPr/>
-      </p:nvGrpSpPr>
-      <p:grpSpPr/>
-      <p:sp>
-        <p:nvSpPr>
-          <p:cNvPr id="2" name="TextBox 1"/>
-          <p:cNvSpPr txBox="1"/>
-          <p:nvPr/>
-        </p:nvSpPr>
-        <p:spPr>
-          <a:xfrm>
-            <a:off x="548640" y="320040"/>
-            <a:ext cx="11094415" cy="274320"/>
-          </a:xfrm>
-          <a:prstGeom prst="rect">
-            <a:avLst/>
-          </a:prstGeom>
-          <a:noFill/>
-        </p:spPr>
-        <p:txBody>
-          <a:bodyPr wrap="square" anchor="t" lIns="0" rIns="0" tIns="0" bIns="0"/>
-          <a:lstStyle/>
-          <a:p>
-            <a:pPr algn="l"/>
-            <a:r>
-              <a:rPr sz="1100" b="1" i="0">
-                <a:solidFill>
-                  <a:srgbClr val="54595D"/>
-                </a:solidFill>
-                <a:latin typeface="Calibri"/>
-              </a:rPr>
-              <a:t>MECHANICAL ENGINEERING  ·  Mechanical: Knowledge criteria</a:t>
-            </a:r>
-          </a:p>
-        </p:txBody>
-      </p:sp>
-      <p:sp>
-        <p:nvSpPr>
-          <p:cNvPr id="3" name="TextBox 2"/>
-          <p:cNvSpPr txBox="1"/>
-          <p:nvPr/>
-        </p:nvSpPr>
-        <p:spPr>
-          <a:xfrm>
-            <a:off x="548640" y="566928"/>
-            <a:ext cx="11094415" cy="822960"/>
-          </a:xfrm>
-          <a:prstGeom prst="rect">
-            <a:avLst/>
-          </a:prstGeom>
-          <a:noFill/>
-        </p:spPr>
-        <p:txBody>
-          <a:bodyPr wrap="square" anchor="ctr" lIns="0" rIns="0" tIns="0" bIns="0"/>
-          <a:lstStyle/>
-          <a:p>
-            <a:pPr algn="l"/>
-            <a:r>
-              <a:rPr sz="3200" b="1" i="0">
-                <a:solidFill>
-                  <a:srgbClr val="03306E"/>
-                </a:solidFill>
-                <a:latin typeface="Cambria"/>
-              </a:rPr>
-              <a:t>Activity: Cost a design</a:t>
-            </a:r>
-          </a:p>
-        </p:txBody>
-      </p:sp>
-      <p:sp>
-        <p:nvSpPr>
-          <p:cNvPr id="4" name="TextBox 3"/>
-          <p:cNvSpPr txBox="1"/>
-          <p:nvPr/>
-        </p:nvSpPr>
-        <p:spPr>
-          <a:xfrm>
-            <a:off x="548640" y="6446520"/>
-            <a:ext cx="8229600" cy="274320"/>
-          </a:xfrm>
-          <a:prstGeom prst="rect">
-            <a:avLst/>
-          </a:prstGeom>
-          <a:noFill/>
-        </p:spPr>
-        <p:txBody>
-          <a:bodyPr wrap="square" anchor="t" lIns="0" rIns="0" tIns="0" bIns="0"/>
-          <a:lstStyle/>
-          <a:p>
-            <a:pPr algn="l"/>
-            <a:r>
-              <a:rPr sz="1000" b="0" i="0">
-                <a:solidFill>
-                  <a:srgbClr val="54595D"/>
-                </a:solidFill>
-                <a:latin typeface="Calibri"/>
-              </a:rPr>
-              <a:t>Design and Development for Engineering and Manufacturing T Level  ·  Business Context, Constraints and Metrics in Design</a:t>
-            </a:r>
-          </a:p>
-        </p:txBody>
-      </p:sp>
-      <p:sp>
-        <p:nvSpPr>
-          <p:cNvPr id="5" name="TextBox 4"/>
-          <p:cNvSpPr txBox="1"/>
-          <p:nvPr/>
-        </p:nvSpPr>
-        <p:spPr>
-          <a:xfrm>
-            <a:off x="10728655" y="6446520"/>
-            <a:ext cx="914400" cy="274320"/>
-          </a:xfrm>
-          <a:prstGeom prst="rect">
-            <a:avLst/>
-          </a:prstGeom>
-          <a:noFill/>
-        </p:spPr>
-        <p:txBody>
-          <a:bodyPr wrap="square" anchor="t" lIns="0" rIns="0" tIns="0" bIns="0"/>
-          <a:lstStyle/>
-          <a:p>
-            <a:pPr algn="r"/>
-            <a:r>
-              <a:rPr sz="1000" b="0" i="0">
-                <a:solidFill>
-                  <a:srgbClr val="54595D"/>
-                </a:solidFill>
-                <a:latin typeface="Calibri"/>
-              </a:rPr>
-              <a:t>8</a:t>
-            </a:r>
-          </a:p>
-        </p:txBody>
-      </p:sp>
-      <p:sp>
-        <p:nvSpPr>
-          <p:cNvPr id="6" name="Rounded Rectangle 5"/>
-          <p:cNvSpPr/>
-          <p:nvPr/>
-        </p:nvSpPr>
-        <p:spPr>
-          <a:xfrm>
-            <a:off x="548640" y="1508760"/>
-            <a:ext cx="2011680" cy="457200"/>
-          </a:xfrm>
-          <a:prstGeom prst="roundRect">
-            <a:avLst>
-              <a:gd name="adj" fmla="val 50000"/>
-            </a:avLst>
-          </a:prstGeom>
-          <a:solidFill>
-            <a:srgbClr val="E0463A"/>
-          </a:solidFill>
-          <a:ln>
-            <a:noFill/>
-          </a:ln>
-          <a:effectLst/>
-        </p:spPr>
-        <p:style>
-          <a:lnRef idx="1">
-            <a:schemeClr val="accent1"/>
-          </a:lnRef>
-          <a:fillRef idx="3">
-            <a:schemeClr val="accent1"/>
-          </a:fillRef>
-          <a:effectRef idx="2">
-            <a:schemeClr val="accent1"/>
-          </a:effectRef>
-          <a:fontRef idx="minor">
-            <a:schemeClr val="lt1"/>
-          </a:fontRef>
-        </p:style>
-        <p:txBody>
-          <a:bodyPr rtlCol="0" anchor="ctr"/>
-          <a:lstStyle/>
-          <a:p/>
-        </p:txBody>
-      </p:sp>
-      <p:sp>
-        <p:nvSpPr>
-          <p:cNvPr id="7" name="TextBox 6"/>
-          <p:cNvSpPr txBox="1"/>
-          <p:nvPr/>
-        </p:nvSpPr>
-        <p:spPr>
-          <a:xfrm>
-            <a:off x="548640" y="1508760"/>
-            <a:ext cx="2011680" cy="457200"/>
-          </a:xfrm>
-          <a:prstGeom prst="rect">
-            <a:avLst/>
-          </a:prstGeom>
-          <a:noFill/>
-        </p:spPr>
-        <p:txBody>
-          <a:bodyPr wrap="square" anchor="ctr" lIns="0" rIns="0" tIns="0" bIns="0"/>
-          <a:lstStyle/>
-          <a:p>
-            <a:pPr algn="ctr"/>
-            <a:r>
-              <a:rPr sz="1400" b="1" i="0">
-                <a:solidFill>
-                  <a:srgbClr val="FFFFFF"/>
-                </a:solidFill>
-                <a:latin typeface="Calibri"/>
-              </a:rPr>
-              <a:t>25 minutes</a:t>
-            </a:r>
-          </a:p>
-        </p:txBody>
-      </p:sp>
-      <p:sp>
-        <p:nvSpPr>
-          <p:cNvPr id="8" name="TextBox 7"/>
-          <p:cNvSpPr txBox="1"/>
-          <p:nvPr/>
-        </p:nvSpPr>
-        <p:spPr>
-          <a:xfrm>
-            <a:off x="2743200" y="1508760"/>
-            <a:ext cx="4754880" cy="457200"/>
-          </a:xfrm>
-          <a:prstGeom prst="rect">
-            <a:avLst/>
-          </a:prstGeom>
-          <a:noFill/>
-        </p:spPr>
-        <p:txBody>
-          <a:bodyPr wrap="square" anchor="ctr" lIns="0" rIns="0" tIns="0" bIns="0"/>
-          <a:lstStyle/>
-          <a:p>
-            <a:pPr algn="l"/>
-            <a:r>
-              <a:rPr sz="1400" b="0" i="1">
-                <a:solidFill>
-                  <a:srgbClr val="54595D"/>
-                </a:solidFill>
-                <a:latin typeface="Calibri"/>
-              </a:rPr>
-              <a:t>Pairs</a:t>
-            </a:r>
-          </a:p>
-        </p:txBody>
-      </p:sp>
-      <p:sp>
-        <p:nvSpPr>
-          <p:cNvPr id="9" name="Oval 8"/>
-          <p:cNvSpPr/>
-          <p:nvPr/>
-        </p:nvSpPr>
-        <p:spPr>
-          <a:xfrm>
-            <a:off x="548640" y="2482596"/>
-            <a:ext cx="384048" cy="384048"/>
-          </a:xfrm>
-          <a:prstGeom prst="ellipse">
-            <a:avLst/>
-          </a:prstGeom>
-          <a:solidFill>
-            <a:srgbClr val="0645AD"/>
-          </a:solidFill>
-          <a:ln>
-            <a:noFill/>
-          </a:ln>
-          <a:effectLst/>
-        </p:spPr>
-        <p:style>
-          <a:lnRef idx="1">
-            <a:schemeClr val="accent1"/>
-          </a:lnRef>
-          <a:fillRef idx="3">
-            <a:schemeClr val="accent1"/>
-          </a:fillRef>
-          <a:effectRef idx="2">
-            <a:schemeClr val="accent1"/>
-          </a:effectRef>
-          <a:fontRef idx="minor">
-            <a:schemeClr val="lt1"/>
-          </a:fontRef>
-        </p:style>
-        <p:txBody>
-          <a:bodyPr rtlCol="0" anchor="ctr" lIns="0" rIns="0" tIns="0" bIns="0"/>
-          <a:lstStyle/>
-          <a:p>
-            <a:pPr algn="ctr"/>
-            <a:r>
-              <a:rPr sz="1300" b="1">
-                <a:solidFill>
-                  <a:srgbClr val="FFFFFF"/>
-                </a:solidFill>
-                <a:latin typeface="Calibri"/>
-              </a:rPr>
-              <a:t>1</a:t>
-            </a:r>
-          </a:p>
-        </p:txBody>
-      </p:sp>
-      <p:sp>
-        <p:nvSpPr>
-          <p:cNvPr id="10" name="TextBox 9"/>
-          <p:cNvSpPr txBox="1"/>
-          <p:nvPr/>
-        </p:nvSpPr>
-        <p:spPr>
-          <a:xfrm>
-            <a:off x="1143000" y="2240280"/>
-            <a:ext cx="5943600" cy="868680"/>
-          </a:xfrm>
-          <a:prstGeom prst="rect">
-            <a:avLst/>
-          </a:prstGeom>
-          <a:noFill/>
-        </p:spPr>
-        <p:txBody>
-          <a:bodyPr wrap="square" anchor="ctr" lIns="0" rIns="0" tIns="0" bIns="0"/>
-          <a:lstStyle/>
-          <a:p>
-            <a:pPr algn="l"/>
-            <a:r>
-              <a:rPr sz="1700" b="0" i="0">
-                <a:solidFill>
-                  <a:srgbClr val="202122"/>
-                </a:solidFill>
-                <a:latin typeface="Calibri"/>
-              </a:rPr>
-              <a:t>Use the material and labour data from your teacher for a steel bracket.</a:t>
-            </a:r>
-          </a:p>
-        </p:txBody>
-      </p:sp>
-      <p:sp>
-        <p:nvSpPr>
-          <p:cNvPr id="11" name="Oval 10"/>
-          <p:cNvSpPr/>
-          <p:nvPr/>
-        </p:nvSpPr>
-        <p:spPr>
-          <a:xfrm>
-            <a:off x="548640" y="3461004"/>
-            <a:ext cx="384048" cy="384048"/>
-          </a:xfrm>
-          <a:prstGeom prst="ellipse">
-            <a:avLst/>
-          </a:prstGeom>
-          <a:solidFill>
-            <a:srgbClr val="0645AD"/>
-          </a:solidFill>
-          <a:ln>
-            <a:noFill/>
-          </a:ln>
-          <a:effectLst/>
-        </p:spPr>
-        <p:style>
-          <a:lnRef idx="1">
-            <a:schemeClr val="accent1"/>
-          </a:lnRef>
-          <a:fillRef idx="3">
-            <a:schemeClr val="accent1"/>
-          </a:fillRef>
-          <a:effectRef idx="2">
-            <a:schemeClr val="accent1"/>
-          </a:effectRef>
-          <a:fontRef idx="minor">
-            <a:schemeClr val="lt1"/>
-          </a:fontRef>
-        </p:style>
-        <p:txBody>
-          <a:bodyPr rtlCol="0" anchor="ctr" lIns="0" rIns="0" tIns="0" bIns="0"/>
-          <a:lstStyle/>
-          <a:p>
-            <a:pPr algn="ctr"/>
-            <a:r>
-              <a:rPr sz="1300" b="1">
-                <a:solidFill>
-                  <a:srgbClr val="FFFFFF"/>
-                </a:solidFill>
-                <a:latin typeface="Calibri"/>
-              </a:rPr>
-              <a:t>2</a:t>
+              <a:t>Why do design decisions affect cost so much?</a:t>
             </a:r>
           </a:p>
         </p:txBody>
@@ -8066,8 +10799,8 @@
         </p:nvSpPr>
         <p:spPr>
           <a:xfrm>
-            <a:off x="1143000" y="3218688"/>
-            <a:ext cx="5943600" cy="868680"/>
+            <a:off x="548640" y="5852160"/>
+            <a:ext cx="11094415" cy="365760"/>
           </a:xfrm>
           <a:prstGeom prst="rect">
             <a:avLst/>
@@ -8075,879 +10808,18 @@
           <a:noFill/>
         </p:spPr>
         <p:txBody>
-          <a:bodyPr wrap="square" anchor="ctr" lIns="0" rIns="0" tIns="0" bIns="0"/>
+          <a:bodyPr wrap="square" anchor="t" lIns="0" rIns="0" tIns="0" bIns="0"/>
           <a:lstStyle/>
           <a:p>
             <a:pPr algn="l"/>
             <a:r>
-              <a:rPr sz="1700" b="0" i="0">
-                <a:solidFill>
-                  <a:srgbClr val="202122"/>
-                </a:solidFill>
-                <a:latin typeface="Calibri"/>
-              </a:rPr>
-              <a:t>Calculate the total manufacturing cost per unit.</a:t>
-            </a:r>
-          </a:p>
-        </p:txBody>
-      </p:sp>
-      <p:sp>
-        <p:nvSpPr>
-          <p:cNvPr id="13" name="Oval 12"/>
-          <p:cNvSpPr/>
-          <p:nvPr/>
-        </p:nvSpPr>
-        <p:spPr>
-          <a:xfrm>
-            <a:off x="548640" y="4439412"/>
-            <a:ext cx="384048" cy="384048"/>
-          </a:xfrm>
-          <a:prstGeom prst="ellipse">
-            <a:avLst/>
-          </a:prstGeom>
-          <a:solidFill>
-            <a:srgbClr val="0645AD"/>
-          </a:solidFill>
-          <a:ln>
-            <a:noFill/>
-          </a:ln>
-          <a:effectLst/>
-        </p:spPr>
-        <p:style>
-          <a:lnRef idx="1">
-            <a:schemeClr val="accent1"/>
-          </a:lnRef>
-          <a:fillRef idx="3">
-            <a:schemeClr val="accent1"/>
-          </a:fillRef>
-          <a:effectRef idx="2">
-            <a:schemeClr val="accent1"/>
-          </a:effectRef>
-          <a:fontRef idx="minor">
-            <a:schemeClr val="lt1"/>
-          </a:fontRef>
-        </p:style>
-        <p:txBody>
-          <a:bodyPr rtlCol="0" anchor="ctr" lIns="0" rIns="0" tIns="0" bIns="0"/>
-          <a:lstStyle/>
-          <a:p>
-            <a:pPr algn="ctr"/>
-            <a:r>
-              <a:rPr sz="1300" b="1">
-                <a:solidFill>
-                  <a:srgbClr val="FFFFFF"/>
-                </a:solidFill>
-                <a:latin typeface="Calibri"/>
-              </a:rPr>
-              <a:t>3</a:t>
-            </a:r>
-          </a:p>
-        </p:txBody>
-      </p:sp>
-      <p:sp>
-        <p:nvSpPr>
-          <p:cNvPr id="14" name="TextBox 13"/>
-          <p:cNvSpPr txBox="1"/>
-          <p:nvPr/>
-        </p:nvSpPr>
-        <p:spPr>
-          <a:xfrm>
-            <a:off x="1143000" y="4197096"/>
-            <a:ext cx="5943600" cy="868680"/>
-          </a:xfrm>
-          <a:prstGeom prst="rect">
-            <a:avLst/>
-          </a:prstGeom>
-          <a:noFill/>
-        </p:spPr>
-        <p:txBody>
-          <a:bodyPr wrap="square" anchor="ctr" lIns="0" rIns="0" tIns="0" bIns="0"/>
-          <a:lstStyle/>
-          <a:p>
-            <a:pPr algn="l"/>
-            <a:r>
-              <a:rPr sz="1700" b="0" i="0">
-                <a:solidFill>
-                  <a:srgbClr val="202122"/>
-                </a:solidFill>
-                <a:latin typeface="Calibri"/>
-              </a:rPr>
-              <a:t>Set a selling price for a 25% profit margin.</a:t>
-            </a:r>
-          </a:p>
-        </p:txBody>
-      </p:sp>
-      <p:sp>
-        <p:nvSpPr>
-          <p:cNvPr id="15" name="Oval 14"/>
-          <p:cNvSpPr/>
-          <p:nvPr/>
-        </p:nvSpPr>
-        <p:spPr>
-          <a:xfrm>
-            <a:off x="548640" y="5417820"/>
-            <a:ext cx="384048" cy="384048"/>
-          </a:xfrm>
-          <a:prstGeom prst="ellipse">
-            <a:avLst/>
-          </a:prstGeom>
-          <a:solidFill>
-            <a:srgbClr val="0645AD"/>
-          </a:solidFill>
-          <a:ln>
-            <a:noFill/>
-          </a:ln>
-          <a:effectLst/>
-        </p:spPr>
-        <p:style>
-          <a:lnRef idx="1">
-            <a:schemeClr val="accent1"/>
-          </a:lnRef>
-          <a:fillRef idx="3">
-            <a:schemeClr val="accent1"/>
-          </a:fillRef>
-          <a:effectRef idx="2">
-            <a:schemeClr val="accent1"/>
-          </a:effectRef>
-          <a:fontRef idx="minor">
-            <a:schemeClr val="lt1"/>
-          </a:fontRef>
-        </p:style>
-        <p:txBody>
-          <a:bodyPr rtlCol="0" anchor="ctr" lIns="0" rIns="0" tIns="0" bIns="0"/>
-          <a:lstStyle/>
-          <a:p>
-            <a:pPr algn="ctr"/>
-            <a:r>
-              <a:rPr sz="1300" b="1">
-                <a:solidFill>
-                  <a:srgbClr val="FFFFFF"/>
-                </a:solidFill>
-                <a:latin typeface="Calibri"/>
-              </a:rPr>
-              <a:t>4</a:t>
-            </a:r>
-          </a:p>
-        </p:txBody>
-      </p:sp>
-      <p:sp>
-        <p:nvSpPr>
-          <p:cNvPr id="16" name="TextBox 15"/>
-          <p:cNvSpPr txBox="1"/>
-          <p:nvPr/>
-        </p:nvSpPr>
-        <p:spPr>
-          <a:xfrm>
-            <a:off x="1143000" y="5175504"/>
-            <a:ext cx="5943600" cy="868680"/>
-          </a:xfrm>
-          <a:prstGeom prst="rect">
-            <a:avLst/>
-          </a:prstGeom>
-          <a:noFill/>
-        </p:spPr>
-        <p:txBody>
-          <a:bodyPr wrap="square" anchor="ctr" lIns="0" rIns="0" tIns="0" bIns="0"/>
-          <a:lstStyle/>
-          <a:p>
-            <a:pPr algn="l"/>
-            <a:r>
-              <a:rPr sz="1700" b="0" i="0">
-                <a:solidFill>
-                  <a:srgbClr val="202122"/>
-                </a:solidFill>
-                <a:latin typeface="Calibri"/>
-              </a:rPr>
-              <a:t>Identify one constraint and how to overcome it.</a:t>
-            </a:r>
-          </a:p>
-        </p:txBody>
-      </p:sp>
-      <p:sp>
-        <p:nvSpPr>
-          <p:cNvPr id="17" name="Rounded Rectangle 16"/>
-          <p:cNvSpPr/>
-          <p:nvPr/>
-        </p:nvSpPr>
-        <p:spPr>
-          <a:xfrm>
-            <a:off x="7772400" y="1508760"/>
-            <a:ext cx="3867912" cy="4572000"/>
-          </a:xfrm>
-          <a:prstGeom prst="roundRect">
-            <a:avLst>
-              <a:gd name="adj" fmla="val 8000"/>
-            </a:avLst>
-          </a:prstGeom>
-          <a:solidFill>
-            <a:srgbClr val="EAF3FF"/>
-          </a:solidFill>
-          <a:ln>
-            <a:noFill/>
-          </a:ln>
-          <a:effectLst/>
-        </p:spPr>
-        <p:style>
-          <a:lnRef idx="1">
-            <a:schemeClr val="accent1"/>
-          </a:lnRef>
-          <a:fillRef idx="3">
-            <a:schemeClr val="accent1"/>
-          </a:fillRef>
-          <a:effectRef idx="2">
-            <a:schemeClr val="accent1"/>
-          </a:effectRef>
-          <a:fontRef idx="minor">
-            <a:schemeClr val="lt1"/>
-          </a:fontRef>
-        </p:style>
-        <p:txBody>
-          <a:bodyPr rtlCol="0" anchor="ctr"/>
-          <a:lstStyle/>
-          <a:p/>
-        </p:txBody>
-      </p:sp>
-      <p:sp>
-        <p:nvSpPr>
-          <p:cNvPr id="18" name="TextBox 17"/>
-          <p:cNvSpPr txBox="1"/>
-          <p:nvPr/>
-        </p:nvSpPr>
-        <p:spPr>
-          <a:xfrm>
-            <a:off x="8046720" y="1737360"/>
-            <a:ext cx="3291840" cy="365760"/>
-          </a:xfrm>
-          <a:prstGeom prst="rect">
-            <a:avLst/>
-          </a:prstGeom>
-          <a:noFill/>
-        </p:spPr>
-        <p:txBody>
-          <a:bodyPr wrap="square" anchor="t" lIns="0" rIns="0" tIns="0" bIns="0"/>
-          <a:lstStyle/>
-          <a:p>
-            <a:pPr algn="l"/>
-            <a:r>
-              <a:rPr sz="1300" b="1" i="0">
-                <a:solidFill>
-                  <a:srgbClr val="0645AD"/>
-                </a:solidFill>
-                <a:latin typeface="Calibri"/>
-              </a:rPr>
-              <a:t>SUCCESS CRITERIA</a:t>
-            </a:r>
-          </a:p>
-        </p:txBody>
-      </p:sp>
-      <p:sp>
-        <p:nvSpPr>
-          <p:cNvPr id="19" name="TextBox 18"/>
-          <p:cNvSpPr txBox="1"/>
-          <p:nvPr/>
-        </p:nvSpPr>
-        <p:spPr>
-          <a:xfrm>
-            <a:off x="8046720" y="2240280"/>
-            <a:ext cx="3337560" cy="3657600"/>
-          </a:xfrm>
-          <a:prstGeom prst="rect">
-            <a:avLst/>
-          </a:prstGeom>
-          <a:noFill/>
-        </p:spPr>
-        <p:txBody>
-          <a:bodyPr wrap="square" lIns="0" rIns="0" tIns="0" bIns="0">
-            <a:spAutoFit/>
-          </a:bodyPr>
-          <a:lstStyle/>
-          <a:p>
-            <a:pPr marL="274320" indent="-274320">
-              <a:spcAft>
-                <a:spcPts val="810"/>
-              </a:spcAft>
-              <a:buClr>
-                <a:srgbClr val="0645AD"/>
-              </a:buClr>
-              <a:buFont typeface="Arial"/>
-              <a:buChar char="•"/>
-            </a:pPr>
-            <a:r>
-              <a:rPr sz="1800" b="0">
-                <a:solidFill>
-                  <a:srgbClr val="202122"/>
-                </a:solidFill>
-                <a:latin typeface="Calibri"/>
-              </a:rPr>
-              <a:t>All three cost elements included</a:t>
-            </a:r>
-          </a:p>
-          <a:p>
-            <a:pPr marL="274320" indent="-274320">
-              <a:spcAft>
-                <a:spcPts val="810"/>
-              </a:spcAft>
-              <a:buClr>
-                <a:srgbClr val="0645AD"/>
-              </a:buClr>
-              <a:buFont typeface="Arial"/>
-              <a:buChar char="•"/>
-            </a:pPr>
-            <a:r>
-              <a:rPr sz="1800" b="0">
-                <a:solidFill>
-                  <a:srgbClr val="202122"/>
-                </a:solidFill>
-                <a:latin typeface="Calibri"/>
-              </a:rPr>
-              <a:t>Price calculation correct</a:t>
-            </a:r>
-          </a:p>
-          <a:p>
-            <a:pPr marL="274320" indent="-274320">
-              <a:spcAft>
-                <a:spcPts val="810"/>
-              </a:spcAft>
-              <a:buClr>
-                <a:srgbClr val="0645AD"/>
-              </a:buClr>
-              <a:buFont typeface="Arial"/>
-              <a:buChar char="•"/>
-            </a:pPr>
-            <a:r>
-              <a:rPr sz="1800" b="0">
-                <a:solidFill>
-                  <a:srgbClr val="202122"/>
-                </a:solidFill>
-                <a:latin typeface="Calibri"/>
-              </a:rPr>
-              <a:t>Constraint solution realistic</a:t>
-            </a:r>
-          </a:p>
-        </p:txBody>
-      </p:sp>
-    </p:spTree>
-  </p:cSld>
-  <p:clrMapOvr>
-    <a:masterClrMapping/>
-  </p:clrMapOvr>
-</p:sld>
-</file>
-
-<file path=ppt/slides/slide9.xml><?xml version="1.0" encoding="utf-8"?>
-<p:sld xmlns:a="http://schemas.openxmlformats.org/drawingml/2006/main" xmlns:p="http://schemas.openxmlformats.org/presentationml/2006/main" xmlns:r="http://schemas.openxmlformats.org/officeDocument/2006/relationships">
-  <p:cSld>
-    <p:bg>
-      <p:bgPr>
-        <a:solidFill>
-          <a:srgbClr val="03306E"/>
-        </a:solidFill>
-        <a:effectLst/>
-      </p:bgPr>
-    </p:bg>
-    <p:spTree>
-      <p:nvGrpSpPr>
-        <p:cNvPr id="1" name=""/>
-        <p:cNvGrpSpPr/>
-        <p:nvPr/>
-      </p:nvGrpSpPr>
-      <p:grpSpPr/>
-      <p:sp>
-        <p:nvSpPr>
-          <p:cNvPr id="2" name="TextBox 1"/>
-          <p:cNvSpPr txBox="1"/>
-          <p:nvPr/>
-        </p:nvSpPr>
-        <p:spPr>
-          <a:xfrm>
-            <a:off x="548640" y="320040"/>
-            <a:ext cx="11094415" cy="274320"/>
-          </a:xfrm>
-          <a:prstGeom prst="rect">
-            <a:avLst/>
-          </a:prstGeom>
-          <a:noFill/>
-        </p:spPr>
-        <p:txBody>
-          <a:bodyPr wrap="square" anchor="t" lIns="0" rIns="0" tIns="0" bIns="0"/>
-          <a:lstStyle/>
-          <a:p>
-            <a:pPr algn="l"/>
-            <a:r>
-              <a:rPr sz="1100" b="1" i="0">
-                <a:solidFill>
-                  <a:srgbClr val="A9C8F0"/>
-                </a:solidFill>
-                <a:latin typeface="Calibri"/>
-              </a:rPr>
-              <a:t>MECHANICAL ENGINEERING  ·  Mechanical: Knowledge criteria</a:t>
-            </a:r>
-          </a:p>
-        </p:txBody>
-      </p:sp>
-      <p:sp>
-        <p:nvSpPr>
-          <p:cNvPr id="3" name="TextBox 2"/>
-          <p:cNvSpPr txBox="1"/>
-          <p:nvPr/>
-        </p:nvSpPr>
-        <p:spPr>
-          <a:xfrm>
-            <a:off x="548640" y="566928"/>
-            <a:ext cx="11094415" cy="822960"/>
-          </a:xfrm>
-          <a:prstGeom prst="rect">
-            <a:avLst/>
-          </a:prstGeom>
-          <a:noFill/>
-        </p:spPr>
-        <p:txBody>
-          <a:bodyPr wrap="square" anchor="ctr" lIns="0" rIns="0" tIns="0" bIns="0"/>
-          <a:lstStyle/>
-          <a:p>
-            <a:pPr algn="l"/>
-            <a:r>
-              <a:rPr sz="3200" b="1" i="0">
-                <a:solidFill>
-                  <a:srgbClr val="FFFFFF"/>
-                </a:solidFill>
-                <a:latin typeface="Cambria"/>
-              </a:rPr>
-              <a:t>Exit ticket</a:t>
-            </a:r>
-          </a:p>
-        </p:txBody>
-      </p:sp>
-      <p:sp>
-        <p:nvSpPr>
-          <p:cNvPr id="4" name="Oval 3"/>
-          <p:cNvSpPr/>
-          <p:nvPr/>
-        </p:nvSpPr>
-        <p:spPr>
-          <a:xfrm>
-            <a:off x="548640" y="1737360"/>
-            <a:ext cx="502920" cy="502920"/>
-          </a:xfrm>
-          <a:prstGeom prst="ellipse">
-            <a:avLst/>
-          </a:prstGeom>
-          <a:solidFill>
-            <a:srgbClr val="E0463A"/>
-          </a:solidFill>
-          <a:ln>
-            <a:noFill/>
-          </a:ln>
-          <a:effectLst/>
-        </p:spPr>
-        <p:style>
-          <a:lnRef idx="1">
-            <a:schemeClr val="accent1"/>
-          </a:lnRef>
-          <a:fillRef idx="3">
-            <a:schemeClr val="accent1"/>
-          </a:fillRef>
-          <a:effectRef idx="2">
-            <a:schemeClr val="accent1"/>
-          </a:effectRef>
-          <a:fontRef idx="minor">
-            <a:schemeClr val="lt1"/>
-          </a:fontRef>
-        </p:style>
-        <p:txBody>
-          <a:bodyPr rtlCol="0" anchor="ctr" lIns="0" rIns="0" tIns="0" bIns="0"/>
-          <a:lstStyle/>
-          <a:p>
-            <a:pPr algn="ctr"/>
-            <a:r>
-              <a:rPr sz="1700" b="1">
-                <a:solidFill>
-                  <a:srgbClr val="FFFFFF"/>
-                </a:solidFill>
-                <a:latin typeface="Calibri"/>
-              </a:rPr>
-              <a:t>1</a:t>
-            </a:r>
-          </a:p>
-        </p:txBody>
-      </p:sp>
-      <p:sp>
-        <p:nvSpPr>
-          <p:cNvPr id="5" name="TextBox 4"/>
-          <p:cNvSpPr txBox="1"/>
-          <p:nvPr/>
-        </p:nvSpPr>
-        <p:spPr>
-          <a:xfrm>
-            <a:off x="1325880" y="1645920"/>
-            <a:ext cx="6583680" cy="822960"/>
-          </a:xfrm>
-          <a:prstGeom prst="rect">
-            <a:avLst/>
-          </a:prstGeom>
-          <a:noFill/>
-        </p:spPr>
-        <p:txBody>
-          <a:bodyPr wrap="square" anchor="ctr" lIns="0" rIns="0" tIns="0" bIns="0"/>
-          <a:lstStyle/>
-          <a:p>
-            <a:pPr algn="l"/>
-            <a:r>
-              <a:rPr sz="2000" b="0" i="0">
-                <a:solidFill>
-                  <a:srgbClr val="FFFFFF"/>
-                </a:solidFill>
-                <a:latin typeface="Calibri"/>
-              </a:rPr>
-              <a:t>Give an example of technology push.</a:t>
-            </a:r>
-          </a:p>
-        </p:txBody>
-      </p:sp>
-      <p:sp>
-        <p:nvSpPr>
-          <p:cNvPr id="6" name="Oval 5"/>
-          <p:cNvSpPr/>
-          <p:nvPr/>
-        </p:nvSpPr>
-        <p:spPr>
-          <a:xfrm>
-            <a:off x="548640" y="2697480"/>
-            <a:ext cx="502920" cy="502920"/>
-          </a:xfrm>
-          <a:prstGeom prst="ellipse">
-            <a:avLst/>
-          </a:prstGeom>
-          <a:solidFill>
-            <a:srgbClr val="E0463A"/>
-          </a:solidFill>
-          <a:ln>
-            <a:noFill/>
-          </a:ln>
-          <a:effectLst/>
-        </p:spPr>
-        <p:style>
-          <a:lnRef idx="1">
-            <a:schemeClr val="accent1"/>
-          </a:lnRef>
-          <a:fillRef idx="3">
-            <a:schemeClr val="accent1"/>
-          </a:fillRef>
-          <a:effectRef idx="2">
-            <a:schemeClr val="accent1"/>
-          </a:effectRef>
-          <a:fontRef idx="minor">
-            <a:schemeClr val="lt1"/>
-          </a:fontRef>
-        </p:style>
-        <p:txBody>
-          <a:bodyPr rtlCol="0" anchor="ctr" lIns="0" rIns="0" tIns="0" bIns="0"/>
-          <a:lstStyle/>
-          <a:p>
-            <a:pPr algn="ctr"/>
-            <a:r>
-              <a:rPr sz="1700" b="1">
-                <a:solidFill>
-                  <a:srgbClr val="FFFFFF"/>
-                </a:solidFill>
-                <a:latin typeface="Calibri"/>
-              </a:rPr>
-              <a:t>2</a:t>
-            </a:r>
-          </a:p>
-        </p:txBody>
-      </p:sp>
-      <p:sp>
-        <p:nvSpPr>
-          <p:cNvPr id="7" name="TextBox 6"/>
-          <p:cNvSpPr txBox="1"/>
-          <p:nvPr/>
-        </p:nvSpPr>
-        <p:spPr>
-          <a:xfrm>
-            <a:off x="1325880" y="2606040"/>
-            <a:ext cx="6583680" cy="822960"/>
-          </a:xfrm>
-          <a:prstGeom prst="rect">
-            <a:avLst/>
-          </a:prstGeom>
-          <a:noFill/>
-        </p:spPr>
-        <p:txBody>
-          <a:bodyPr wrap="square" anchor="ctr" lIns="0" rIns="0" tIns="0" bIns="0"/>
-          <a:lstStyle/>
-          <a:p>
-            <a:pPr algn="l"/>
-            <a:r>
-              <a:rPr sz="2000" b="0" i="0">
-                <a:solidFill>
-                  <a:srgbClr val="FFFFFF"/>
-                </a:solidFill>
-                <a:latin typeface="Calibri"/>
-              </a:rPr>
-              <a:t>Why might a company accept a lower profit?</a:t>
-            </a:r>
-          </a:p>
-        </p:txBody>
-      </p:sp>
-      <p:sp>
-        <p:nvSpPr>
-          <p:cNvPr id="8" name="Oval 7"/>
-          <p:cNvSpPr/>
-          <p:nvPr/>
-        </p:nvSpPr>
-        <p:spPr>
-          <a:xfrm>
-            <a:off x="548640" y="3657600"/>
-            <a:ext cx="502920" cy="502920"/>
-          </a:xfrm>
-          <a:prstGeom prst="ellipse">
-            <a:avLst/>
-          </a:prstGeom>
-          <a:solidFill>
-            <a:srgbClr val="E0463A"/>
-          </a:solidFill>
-          <a:ln>
-            <a:noFill/>
-          </a:ln>
-          <a:effectLst/>
-        </p:spPr>
-        <p:style>
-          <a:lnRef idx="1">
-            <a:schemeClr val="accent1"/>
-          </a:lnRef>
-          <a:fillRef idx="3">
-            <a:schemeClr val="accent1"/>
-          </a:fillRef>
-          <a:effectRef idx="2">
-            <a:schemeClr val="accent1"/>
-          </a:effectRef>
-          <a:fontRef idx="minor">
-            <a:schemeClr val="lt1"/>
-          </a:fontRef>
-        </p:style>
-        <p:txBody>
-          <a:bodyPr rtlCol="0" anchor="ctr" lIns="0" rIns="0" tIns="0" bIns="0"/>
-          <a:lstStyle/>
-          <a:p>
-            <a:pPr algn="ctr"/>
-            <a:r>
-              <a:rPr sz="1700" b="1">
-                <a:solidFill>
-                  <a:srgbClr val="FFFFFF"/>
-                </a:solidFill>
-                <a:latin typeface="Calibri"/>
-              </a:rPr>
-              <a:t>3</a:t>
-            </a:r>
-          </a:p>
-        </p:txBody>
-      </p:sp>
-      <p:sp>
-        <p:nvSpPr>
-          <p:cNvPr id="9" name="TextBox 8"/>
-          <p:cNvSpPr txBox="1"/>
-          <p:nvPr/>
-        </p:nvSpPr>
-        <p:spPr>
-          <a:xfrm>
-            <a:off x="1325880" y="3566160"/>
-            <a:ext cx="6583680" cy="822960"/>
-          </a:xfrm>
-          <a:prstGeom prst="rect">
-            <a:avLst/>
-          </a:prstGeom>
-          <a:noFill/>
-        </p:spPr>
-        <p:txBody>
-          <a:bodyPr wrap="square" anchor="ctr" lIns="0" rIns="0" tIns="0" bIns="0"/>
-          <a:lstStyle/>
-          <a:p>
-            <a:pPr algn="l"/>
-            <a:r>
-              <a:rPr sz="2000" b="0" i="0">
-                <a:solidFill>
-                  <a:srgbClr val="FFFFFF"/>
-                </a:solidFill>
-                <a:latin typeface="Calibri"/>
-              </a:rPr>
-              <a:t>How can a constraint be overcome?</a:t>
-            </a:r>
-          </a:p>
-        </p:txBody>
-      </p:sp>
-      <p:sp>
-        <p:nvSpPr>
-          <p:cNvPr id="10" name="Rounded Rectangle 9"/>
-          <p:cNvSpPr/>
-          <p:nvPr/>
-        </p:nvSpPr>
-        <p:spPr>
-          <a:xfrm>
-            <a:off x="8229600" y="1645920"/>
-            <a:ext cx="3410712" cy="2926080"/>
-          </a:xfrm>
-          <a:prstGeom prst="roundRect">
-            <a:avLst>
-              <a:gd name="adj" fmla="val 8000"/>
-            </a:avLst>
-          </a:prstGeom>
-          <a:solidFill>
-            <a:srgbClr val="0645AD"/>
-          </a:solidFill>
-          <a:ln>
-            <a:noFill/>
-          </a:ln>
-          <a:effectLst/>
-        </p:spPr>
-        <p:style>
-          <a:lnRef idx="1">
-            <a:schemeClr val="accent1"/>
-          </a:lnRef>
-          <a:fillRef idx="3">
-            <a:schemeClr val="accent1"/>
-          </a:fillRef>
-          <a:effectRef idx="2">
-            <a:schemeClr val="accent1"/>
-          </a:effectRef>
-          <a:fontRef idx="minor">
-            <a:schemeClr val="lt1"/>
-          </a:fontRef>
-        </p:style>
-        <p:txBody>
-          <a:bodyPr rtlCol="0" anchor="ctr"/>
-          <a:lstStyle/>
-          <a:p/>
-        </p:txBody>
-      </p:sp>
-      <p:sp>
-        <p:nvSpPr>
-          <p:cNvPr id="11" name="TextBox 10"/>
-          <p:cNvSpPr txBox="1"/>
-          <p:nvPr/>
-        </p:nvSpPr>
-        <p:spPr>
-          <a:xfrm>
-            <a:off x="8503920" y="1874519"/>
-            <a:ext cx="2926080" cy="365760"/>
-          </a:xfrm>
-          <a:prstGeom prst="rect">
-            <a:avLst/>
-          </a:prstGeom>
-          <a:noFill/>
-        </p:spPr>
-        <p:txBody>
-          <a:bodyPr wrap="square" anchor="t" lIns="0" rIns="0" tIns="0" bIns="0"/>
-          <a:lstStyle/>
-          <a:p>
-            <a:pPr algn="l"/>
-            <a:r>
-              <a:rPr sz="1300" b="1" i="0">
-                <a:solidFill>
-                  <a:srgbClr val="A9C8F0"/>
-                </a:solidFill>
-                <a:latin typeface="Calibri"/>
-              </a:rPr>
-              <a:t>REVISE THIS TOPIC</a:t>
-            </a:r>
-          </a:p>
-        </p:txBody>
-      </p:sp>
-      <p:sp>
-        <p:nvSpPr>
-          <p:cNvPr id="12" name="TextBox 11"/>
-          <p:cNvSpPr txBox="1"/>
-          <p:nvPr/>
-        </p:nvSpPr>
-        <p:spPr>
-          <a:xfrm>
-            <a:off x="8503920" y="2286000"/>
-            <a:ext cx="2926080" cy="548640"/>
-          </a:xfrm>
-          <a:prstGeom prst="rect">
-            <a:avLst/>
-          </a:prstGeom>
-          <a:noFill/>
-        </p:spPr>
-        <p:txBody>
-          <a:bodyPr wrap="square" anchor="t" lIns="0" rIns="0" tIns="0" bIns="0"/>
-          <a:lstStyle/>
-          <a:p>
-            <a:pPr algn="l"/>
-            <a:r>
-              <a:rPr sz="1400" b="0" i="0">
-                <a:solidFill>
-                  <a:srgbClr val="FFFFFF"/>
-                </a:solidFill>
-                <a:latin typeface="Calibri"/>
-              </a:rPr>
-              <a:t>Revision notes for this lesson are on the study wiki:</a:t>
-            </a:r>
-          </a:p>
-        </p:txBody>
-      </p:sp>
-      <p:sp>
-        <p:nvSpPr>
-          <p:cNvPr id="13" name="TextBox 12"/>
-          <p:cNvSpPr txBox="1"/>
-          <p:nvPr/>
-        </p:nvSpPr>
-        <p:spPr>
-          <a:xfrm>
-            <a:off x="8503920" y="2926080"/>
-            <a:ext cx="2926080" cy="1463040"/>
-          </a:xfrm>
-          <a:prstGeom prst="rect">
-            <a:avLst/>
-          </a:prstGeom>
-          <a:noFill/>
-        </p:spPr>
-        <p:txBody>
-          <a:bodyPr wrap="square" anchor="t" lIns="0" rIns="0" tIns="0" bIns="0"/>
-          <a:lstStyle/>
-          <a:p>
-            <a:pPr algn="l"/>
-            <a:r>
-              <a:rPr sz="2000" b="1" i="0">
-                <a:solidFill>
-                  <a:srgbClr val="FFFFFF"/>
-                </a:solidFill>
-                <a:latin typeface="Cambria"/>
-              </a:rPr>
-              <a:t>Knowledge Criteria</a:t>
-            </a:r>
-          </a:p>
-        </p:txBody>
-      </p:sp>
-      <p:sp>
-        <p:nvSpPr>
-          <p:cNvPr id="14" name="TextBox 13"/>
-          <p:cNvSpPr txBox="1"/>
-          <p:nvPr/>
-        </p:nvSpPr>
-        <p:spPr>
-          <a:xfrm>
-            <a:off x="548640" y="5669280"/>
-            <a:ext cx="11094415" cy="548640"/>
-          </a:xfrm>
-          <a:prstGeom prst="rect">
-            <a:avLst/>
-          </a:prstGeom>
-          <a:noFill/>
-        </p:spPr>
-        <p:txBody>
-          <a:bodyPr wrap="square" anchor="t" lIns="0" rIns="0" tIns="0" bIns="0"/>
-          <a:lstStyle/>
-          <a:p>
-            <a:pPr algn="l"/>
-            <a:r>
-              <a:rPr sz="1200" b="0" i="0">
-                <a:solidFill>
-                  <a:srgbClr val="A9C8F0"/>
-                </a:solidFill>
-                <a:latin typeface="Calibri"/>
-              </a:rPr>
-              <a:t>https://lana6478.github.io/T-level-Design-Development-Engineering-Manufacturing/#/02-occupational-specialism/01-knowledge-criteria.md</a:t>
+              <a:rPr sz="1300" b="0" i="1">
+                <a:solidFill>
+                  <a:srgbClr val="54595D"/>
+                </a:solidFill>
+                <a:latin typeface="Calibri"/>
+              </a:rPr>
+              <a:t>Answer on mini whiteboards or in your book. Answers are in the speaker notes.</a:t>
             </a:r>
           </a:p>
         </p:txBody>
